--- a/docs/presentation.pptx
+++ b/docs/presentation.pptx
@@ -7807,8 +7807,8 @@
         </p:nvSpPr>
         <p:spPr>
           <a:xfrm>
-            <a:off x="640080" y="5943600"/>
-            <a:ext cx="10908792" cy="365760"/>
+            <a:off x="640080" y="5852160"/>
+            <a:ext cx="6858000" cy="292608"/>
           </a:xfrm>
           <a:prstGeom prst="rect">
             <a:avLst/>
@@ -7824,7 +7824,46 @@
               <a:buNone/>
             </a:pPr>
             <a:r>
-              <a:rPr lang="en-US" sz="1300" dirty="0">
+              <a:rPr lang="en-US" sz="1400" b="1" dirty="0">
+                <a:solidFill>
+                  <a:srgbClr val="8FB4E8"/>
+                </a:solidFill>
+                <a:latin typeface="Calibri" pitchFamily="34" charset="0"/>
+                <a:ea typeface="Calibri" pitchFamily="34" charset="-122"/>
+                <a:cs typeface="Calibri" pitchFamily="34" charset="-120"/>
+              </a:rPr>
+              <a:t>github.com/Sawaiz-zip/agentic-verilog-testbench</a:t>
+            </a:r>
+            <a:endParaRPr lang="en-US" sz="1400" dirty="0"/>
+          </a:p>
+        </p:txBody>
+      </p:sp>
+      <p:sp>
+        <p:nvSpPr>
+          <p:cNvPr id="13" name="Text 11"/>
+          <p:cNvSpPr txBox="1"/>
+          <p:nvPr/>
+        </p:nvSpPr>
+        <p:spPr>
+          <a:xfrm>
+            <a:off x="640080" y="6163056"/>
+            <a:ext cx="6858000" cy="292608"/>
+          </a:xfrm>
+          <a:prstGeom prst="rect">
+            <a:avLst/>
+          </a:prstGeom>
+          <a:noFill/>
+          <a:ln/>
+        </p:spPr>
+        <p:txBody>
+          <a:bodyPr wrap="square" lIns="0" tIns="0" rIns="0" bIns="0" rtlCol="0" anchor="ctr"/>
+          <a:lstStyle/>
+          <a:p>
+            <a:pPr indent="0" marL="0">
+              <a:buNone/>
+            </a:pPr>
+            <a:r>
+              <a:rPr lang="en-US" sz="1200" dirty="0">
                 <a:solidFill>
                   <a:srgbClr val="A8B6CE"/>
                 </a:solidFill>
@@ -7832,12 +7871,36 @@
                 <a:ea typeface="Calibri" pitchFamily="34" charset="-122"/>
                 <a:cs typeface="Calibri" pitchFamily="34" charset="-120"/>
               </a:rPr>
-              <a:t>github.com/Sawaiz-zip/agentic-verilog-testbench      ·      results/RESULTS.md traces every number in this talk to its raw data</a:t>
+              <a:t>results/RESULTS.md traces every number in this talk to its raw records</a:t>
             </a:r>
-            <a:endParaRPr lang="en-US" sz="1300" dirty="0"/>
+            <a:endParaRPr lang="en-US" sz="1200" dirty="0"/>
           </a:p>
         </p:txBody>
       </p:sp>
+      <p:pic>
+        <p:nvPicPr>
+          <p:cNvPr id="14" name="Image 0" descr="/Users/sawaiznaveed/Ilmenau Uni/ResearchProject/docs/figures/shots/results-md.jpg">    </p:cNvPr>
+          <p:cNvPicPr>
+            <a:picLocks noChangeAspect="1"/>
+          </p:cNvPicPr>
+          <p:nvPr/>
+        </p:nvPicPr>
+        <p:blipFill>
+          <a:blip r:embed="rId1"/>
+          <a:stretch>
+            <a:fillRect/>
+          </a:stretch>
+        </p:blipFill>
+        <p:spPr>
+          <a:xfrm>
+            <a:off x="7772400" y="1371600"/>
+            <a:ext cx="3776472" cy="1883664"/>
+          </a:xfrm>
+          <a:prstGeom prst="rect">
+            <a:avLst/>
+          </a:prstGeom>
+        </p:spPr>
+      </p:pic>
     </p:spTree>
   </p:cSld>
   <p:clrMapOvr>
@@ -17524,6 +17587,30 @@
           </a:p>
         </p:txBody>
       </p:sp>
+      <p:pic>
+        <p:nvPicPr>
+          <p:cNvPr id="5" name="Image 0" descr="/Users/sawaiznaveed/Ilmenau Uni/ResearchProject/docs/figures/shots/repo-tree.jpg">    </p:cNvPr>
+          <p:cNvPicPr>
+            <a:picLocks noChangeAspect="1"/>
+          </p:cNvPicPr>
+          <p:nvPr/>
+        </p:nvPicPr>
+        <p:blipFill>
+          <a:blip r:embed="rId1"/>
+          <a:stretch>
+            <a:fillRect/>
+          </a:stretch>
+        </p:blipFill>
+        <p:spPr>
+          <a:xfrm>
+            <a:off x="6903720" y="1600200"/>
+            <a:ext cx="4645152" cy="2313432"/>
+          </a:xfrm>
+          <a:prstGeom prst="rect">
+            <a:avLst/>
+          </a:prstGeom>
+        </p:spPr>
+      </p:pic>
       <p:graphicFrame>
         <p:nvGraphicFramePr>
           <p:cNvPr id="26" name="Table 0"/>
@@ -17540,15 +17627,15 @@
         </p:nvGraphicFramePr>
         <p:xfrm>
           <a:off x="640080" y="1600200"/>
-          <a:ext cx="10908792" cy="914400"/>
+          <a:ext cx="6035040" cy="914400"/>
         </p:xfrm>
         <a:graphic>
           <a:graphicData uri="http://schemas.openxmlformats.org/drawingml/2006/table">
             <a:tbl>
               <a:tblPr/>
               <a:tblGrid>
-                <a:gridCol w="3108960"/>
-                <a:gridCol w="7799832"/>
+                <a:gridCol w="2286000"/>
+                <a:gridCol w="3749040"/>
               </a:tblGrid>
               <a:tr h="310896">
                 <a:tc>
@@ -18520,9 +18607,33 @@
           </a:graphicData>
         </a:graphic>
       </p:graphicFrame>
-      <p:sp>
-        <p:nvSpPr>
-          <p:cNvPr id="6" name="Shape 3"/>
+      <p:pic>
+        <p:nvPicPr>
+          <p:cNvPr id="7" name="Image 1" descr="/Users/sawaiznaveed/Ilmenau Uni/ResearchProject/docs/figures/shots/results-md.jpg">    </p:cNvPr>
+          <p:cNvPicPr>
+            <a:picLocks noChangeAspect="1"/>
+          </p:cNvPicPr>
+          <p:nvPr/>
+        </p:nvPicPr>
+        <p:blipFill>
+          <a:blip r:embed="rId2"/>
+          <a:stretch>
+            <a:fillRect/>
+          </a:stretch>
+        </p:blipFill>
+        <p:spPr>
+          <a:xfrm>
+            <a:off x="6903720" y="4087368"/>
+            <a:ext cx="4645152" cy="2313432"/>
+          </a:xfrm>
+          <a:prstGeom prst="rect">
+            <a:avLst/>
+          </a:prstGeom>
+        </p:spPr>
+      </p:pic>
+      <p:sp>
+        <p:nvSpPr>
+          <p:cNvPr id="8" name="Shape 3"/>
           <p:cNvSpPr/>
           <p:nvPr/>
         </p:nvSpPr>
@@ -18556,7 +18667,7 @@
       </p:sp>
       <p:sp>
         <p:nvSpPr>
-          <p:cNvPr id="7" name="Text 4"/>
+          <p:cNvPr id="9" name="Text 4"/>
           <p:cNvSpPr txBox="1"/>
           <p:nvPr/>
         </p:nvSpPr>

--- a/docs/presentation.pptx
+++ b/docs/presentation.pptx
@@ -3930,17 +3930,17 @@
         </p:nvSpPr>
         <p:spPr>
           <a:xfrm>
-            <a:off x="877824" y="2057400"/>
-            <a:ext cx="6382512" cy="1097280"/>
-          </a:xfrm>
-          <a:prstGeom prst="rect">
-            <a:avLst/>
-          </a:prstGeom>
-          <a:noFill/>
-          <a:ln/>
-        </p:spPr>
-        <p:txBody>
-          <a:bodyPr wrap="square" lIns="0" tIns="0" rIns="0" bIns="0" rtlCol="0" anchor="ctr"/>
+            <a:off x="877824" y="2075688"/>
+            <a:ext cx="6382512" cy="1188720"/>
+          </a:xfrm>
+          <a:prstGeom prst="rect">
+            <a:avLst/>
+          </a:prstGeom>
+          <a:noFill/>
+          <a:ln/>
+        </p:spPr>
+        <p:txBody>
+          <a:bodyPr wrap="square" lIns="0" tIns="0" rIns="0" bIns="0" rtlCol="0" anchor="t"/>
           <a:lstStyle/>
           <a:p>
             <a:pPr indent="0" marL="0">
@@ -4045,17 +4045,17 @@
         </p:nvSpPr>
         <p:spPr>
           <a:xfrm>
-            <a:off x="877824" y="4069080"/>
-            <a:ext cx="6382512" cy="1828800"/>
-          </a:xfrm>
-          <a:prstGeom prst="rect">
-            <a:avLst/>
-          </a:prstGeom>
-          <a:noFill/>
-          <a:ln/>
-        </p:spPr>
-        <p:txBody>
-          <a:bodyPr wrap="square" lIns="0" tIns="0" rIns="0" bIns="0" rtlCol="0" anchor="ctr"/>
+            <a:off x="877824" y="4087368"/>
+            <a:ext cx="6382512" cy="1920240"/>
+          </a:xfrm>
+          <a:prstGeom prst="rect">
+            <a:avLst/>
+          </a:prstGeom>
+          <a:noFill/>
+          <a:ln/>
+        </p:spPr>
+        <p:txBody>
+          <a:bodyPr wrap="square" lIns="0" tIns="0" rIns="0" bIns="0" rtlCol="0" anchor="t"/>
           <a:lstStyle/>
           <a:p>
             <a:pPr indent="0" marL="0">
@@ -4199,17 +4199,17 @@
         </p:nvSpPr>
         <p:spPr>
           <a:xfrm>
-            <a:off x="8101584" y="2898648"/>
-            <a:ext cx="3227832" cy="685800"/>
-          </a:xfrm>
-          <a:prstGeom prst="rect">
-            <a:avLst/>
-          </a:prstGeom>
-          <a:noFill/>
-          <a:ln/>
-        </p:spPr>
-        <p:txBody>
-          <a:bodyPr wrap="square" lIns="0" tIns="0" rIns="0" bIns="0" rtlCol="0" anchor="ctr"/>
+            <a:off x="8101584" y="2916936"/>
+            <a:ext cx="3227832" cy="731520"/>
+          </a:xfrm>
+          <a:prstGeom prst="rect">
+            <a:avLst/>
+          </a:prstGeom>
+          <a:noFill/>
+          <a:ln/>
+        </p:spPr>
+        <p:txBody>
+          <a:bodyPr wrap="square" lIns="0" tIns="0" rIns="0" bIns="0" rtlCol="0" anchor="t"/>
           <a:lstStyle/>
           <a:p>
             <a:pPr indent="0" marL="0">
@@ -4261,17 +4261,17 @@
         </p:nvSpPr>
         <p:spPr>
           <a:xfrm>
-            <a:off x="8101584" y="3840480"/>
-            <a:ext cx="3209544" cy="2103120"/>
-          </a:xfrm>
-          <a:prstGeom prst="rect">
-            <a:avLst/>
-          </a:prstGeom>
-          <a:noFill/>
-          <a:ln/>
-        </p:spPr>
-        <p:txBody>
-          <a:bodyPr wrap="square" lIns="0" tIns="0" rIns="0" bIns="0" rtlCol="0" anchor="ctr"/>
+            <a:off x="8101584" y="3813048"/>
+            <a:ext cx="3209544" cy="2194560"/>
+          </a:xfrm>
+          <a:prstGeom prst="rect">
+            <a:avLst/>
+          </a:prstGeom>
+          <a:noFill/>
+          <a:ln/>
+        </p:spPr>
+        <p:txBody>
+          <a:bodyPr wrap="square" lIns="0" tIns="0" rIns="0" bIns="0" rtlCol="0" anchor="t"/>
           <a:lstStyle/>
           <a:p>
             <a:pPr indent="0" marL="0">
@@ -4876,17 +4876,17 @@
         </p:nvSpPr>
         <p:spPr>
           <a:xfrm>
-            <a:off x="877824" y="2057400"/>
-            <a:ext cx="6382512" cy="1097280"/>
-          </a:xfrm>
-          <a:prstGeom prst="rect">
-            <a:avLst/>
-          </a:prstGeom>
-          <a:noFill/>
-          <a:ln/>
-        </p:spPr>
-        <p:txBody>
-          <a:bodyPr wrap="square" lIns="0" tIns="0" rIns="0" bIns="0" rtlCol="0" anchor="ctr"/>
+            <a:off x="877824" y="2075688"/>
+            <a:ext cx="6382512" cy="1188720"/>
+          </a:xfrm>
+          <a:prstGeom prst="rect">
+            <a:avLst/>
+          </a:prstGeom>
+          <a:noFill/>
+          <a:ln/>
+        </p:spPr>
+        <p:txBody>
+          <a:bodyPr wrap="square" lIns="0" tIns="0" rIns="0" bIns="0" rtlCol="0" anchor="t"/>
           <a:lstStyle/>
           <a:p>
             <a:pPr indent="0" marL="0">
@@ -4991,17 +4991,17 @@
         </p:nvSpPr>
         <p:spPr>
           <a:xfrm>
-            <a:off x="877824" y="4069080"/>
-            <a:ext cx="6382512" cy="1828800"/>
-          </a:xfrm>
-          <a:prstGeom prst="rect">
-            <a:avLst/>
-          </a:prstGeom>
-          <a:noFill/>
-          <a:ln/>
-        </p:spPr>
-        <p:txBody>
-          <a:bodyPr wrap="square" lIns="0" tIns="0" rIns="0" bIns="0" rtlCol="0" anchor="ctr"/>
+            <a:off x="877824" y="4087368"/>
+            <a:ext cx="6382512" cy="1920240"/>
+          </a:xfrm>
+          <a:prstGeom prst="rect">
+            <a:avLst/>
+          </a:prstGeom>
+          <a:noFill/>
+          <a:ln/>
+        </p:spPr>
+        <p:txBody>
+          <a:bodyPr wrap="square" lIns="0" tIns="0" rIns="0" bIns="0" rtlCol="0" anchor="t"/>
           <a:lstStyle/>
           <a:p>
             <a:pPr indent="0" marL="0">
@@ -5145,17 +5145,17 @@
         </p:nvSpPr>
         <p:spPr>
           <a:xfrm>
-            <a:off x="8101584" y="2898648"/>
-            <a:ext cx="3227832" cy="685800"/>
-          </a:xfrm>
-          <a:prstGeom prst="rect">
-            <a:avLst/>
-          </a:prstGeom>
-          <a:noFill/>
-          <a:ln/>
-        </p:spPr>
-        <p:txBody>
-          <a:bodyPr wrap="square" lIns="0" tIns="0" rIns="0" bIns="0" rtlCol="0" anchor="ctr"/>
+            <a:off x="8101584" y="2916936"/>
+            <a:ext cx="3227832" cy="731520"/>
+          </a:xfrm>
+          <a:prstGeom prst="rect">
+            <a:avLst/>
+          </a:prstGeom>
+          <a:noFill/>
+          <a:ln/>
+        </p:spPr>
+        <p:txBody>
+          <a:bodyPr wrap="square" lIns="0" tIns="0" rIns="0" bIns="0" rtlCol="0" anchor="t"/>
           <a:lstStyle/>
           <a:p>
             <a:pPr indent="0" marL="0">
@@ -5207,17 +5207,17 @@
         </p:nvSpPr>
         <p:spPr>
           <a:xfrm>
-            <a:off x="8101584" y="3840480"/>
-            <a:ext cx="3209544" cy="2103120"/>
-          </a:xfrm>
-          <a:prstGeom prst="rect">
-            <a:avLst/>
-          </a:prstGeom>
-          <a:noFill/>
-          <a:ln/>
-        </p:spPr>
-        <p:txBody>
-          <a:bodyPr wrap="square" lIns="0" tIns="0" rIns="0" bIns="0" rtlCol="0" anchor="ctr"/>
+            <a:off x="8101584" y="3813048"/>
+            <a:ext cx="3209544" cy="2194560"/>
+          </a:xfrm>
+          <a:prstGeom prst="rect">
+            <a:avLst/>
+          </a:prstGeom>
+          <a:noFill/>
+          <a:ln/>
+        </p:spPr>
+        <p:txBody>
+          <a:bodyPr wrap="square" lIns="0" tIns="0" rIns="0" bIns="0" rtlCol="0" anchor="t"/>
           <a:lstStyle/>
           <a:p>
             <a:pPr indent="0" marL="0">
@@ -5822,17 +5822,17 @@
         </p:nvSpPr>
         <p:spPr>
           <a:xfrm>
-            <a:off x="877824" y="2057400"/>
-            <a:ext cx="6382512" cy="1097280"/>
-          </a:xfrm>
-          <a:prstGeom prst="rect">
-            <a:avLst/>
-          </a:prstGeom>
-          <a:noFill/>
-          <a:ln/>
-        </p:spPr>
-        <p:txBody>
-          <a:bodyPr wrap="square" lIns="0" tIns="0" rIns="0" bIns="0" rtlCol="0" anchor="ctr"/>
+            <a:off x="877824" y="2075688"/>
+            <a:ext cx="6382512" cy="1188720"/>
+          </a:xfrm>
+          <a:prstGeom prst="rect">
+            <a:avLst/>
+          </a:prstGeom>
+          <a:noFill/>
+          <a:ln/>
+        </p:spPr>
+        <p:txBody>
+          <a:bodyPr wrap="square" lIns="0" tIns="0" rIns="0" bIns="0" rtlCol="0" anchor="t"/>
           <a:lstStyle/>
           <a:p>
             <a:pPr indent="0" marL="0">
@@ -5937,17 +5937,17 @@
         </p:nvSpPr>
         <p:spPr>
           <a:xfrm>
-            <a:off x="877824" y="4069080"/>
-            <a:ext cx="6382512" cy="1828800"/>
-          </a:xfrm>
-          <a:prstGeom prst="rect">
-            <a:avLst/>
-          </a:prstGeom>
-          <a:noFill/>
-          <a:ln/>
-        </p:spPr>
-        <p:txBody>
-          <a:bodyPr wrap="square" lIns="0" tIns="0" rIns="0" bIns="0" rtlCol="0" anchor="ctr"/>
+            <a:off x="877824" y="4087368"/>
+            <a:ext cx="6382512" cy="1920240"/>
+          </a:xfrm>
+          <a:prstGeom prst="rect">
+            <a:avLst/>
+          </a:prstGeom>
+          <a:noFill/>
+          <a:ln/>
+        </p:spPr>
+        <p:txBody>
+          <a:bodyPr wrap="square" lIns="0" tIns="0" rIns="0" bIns="0" rtlCol="0" anchor="t"/>
           <a:lstStyle/>
           <a:p>
             <a:pPr indent="0" marL="0">
@@ -6091,17 +6091,17 @@
         </p:nvSpPr>
         <p:spPr>
           <a:xfrm>
-            <a:off x="8101584" y="2898648"/>
-            <a:ext cx="3227832" cy="685800"/>
-          </a:xfrm>
-          <a:prstGeom prst="rect">
-            <a:avLst/>
-          </a:prstGeom>
-          <a:noFill/>
-          <a:ln/>
-        </p:spPr>
-        <p:txBody>
-          <a:bodyPr wrap="square" lIns="0" tIns="0" rIns="0" bIns="0" rtlCol="0" anchor="ctr"/>
+            <a:off x="8101584" y="2916936"/>
+            <a:ext cx="3227832" cy="731520"/>
+          </a:xfrm>
+          <a:prstGeom prst="rect">
+            <a:avLst/>
+          </a:prstGeom>
+          <a:noFill/>
+          <a:ln/>
+        </p:spPr>
+        <p:txBody>
+          <a:bodyPr wrap="square" lIns="0" tIns="0" rIns="0" bIns="0" rtlCol="0" anchor="t"/>
           <a:lstStyle/>
           <a:p>
             <a:pPr indent="0" marL="0">
@@ -6153,17 +6153,17 @@
         </p:nvSpPr>
         <p:spPr>
           <a:xfrm>
-            <a:off x="8101584" y="3840480"/>
-            <a:ext cx="3209544" cy="2103120"/>
-          </a:xfrm>
-          <a:prstGeom prst="rect">
-            <a:avLst/>
-          </a:prstGeom>
-          <a:noFill/>
-          <a:ln/>
-        </p:spPr>
-        <p:txBody>
-          <a:bodyPr wrap="square" lIns="0" tIns="0" rIns="0" bIns="0" rtlCol="0" anchor="ctr"/>
+            <a:off x="8101584" y="3813048"/>
+            <a:ext cx="3209544" cy="2194560"/>
+          </a:xfrm>
+          <a:prstGeom prst="rect">
+            <a:avLst/>
+          </a:prstGeom>
+          <a:noFill/>
+          <a:ln/>
+        </p:spPr>
+        <p:txBody>
+          <a:bodyPr wrap="square" lIns="0" tIns="0" rIns="0" bIns="0" rtlCol="0" anchor="t"/>
           <a:lstStyle/>
           <a:p>
             <a:pPr indent="0" marL="0">
@@ -6768,17 +6768,17 @@
         </p:nvSpPr>
         <p:spPr>
           <a:xfrm>
-            <a:off x="877824" y="2057400"/>
-            <a:ext cx="6382512" cy="1097280"/>
-          </a:xfrm>
-          <a:prstGeom prst="rect">
-            <a:avLst/>
-          </a:prstGeom>
-          <a:noFill/>
-          <a:ln/>
-        </p:spPr>
-        <p:txBody>
-          <a:bodyPr wrap="square" lIns="0" tIns="0" rIns="0" bIns="0" rtlCol="0" anchor="ctr"/>
+            <a:off x="877824" y="2075688"/>
+            <a:ext cx="6382512" cy="1188720"/>
+          </a:xfrm>
+          <a:prstGeom prst="rect">
+            <a:avLst/>
+          </a:prstGeom>
+          <a:noFill/>
+          <a:ln/>
+        </p:spPr>
+        <p:txBody>
+          <a:bodyPr wrap="square" lIns="0" tIns="0" rIns="0" bIns="0" rtlCol="0" anchor="t"/>
           <a:lstStyle/>
           <a:p>
             <a:pPr indent="0" marL="0">
@@ -6883,17 +6883,17 @@
         </p:nvSpPr>
         <p:spPr>
           <a:xfrm>
-            <a:off x="877824" y="4069080"/>
-            <a:ext cx="6382512" cy="1828800"/>
-          </a:xfrm>
-          <a:prstGeom prst="rect">
-            <a:avLst/>
-          </a:prstGeom>
-          <a:noFill/>
-          <a:ln/>
-        </p:spPr>
-        <p:txBody>
-          <a:bodyPr wrap="square" lIns="0" tIns="0" rIns="0" bIns="0" rtlCol="0" anchor="ctr"/>
+            <a:off x="877824" y="4087368"/>
+            <a:ext cx="6382512" cy="1920240"/>
+          </a:xfrm>
+          <a:prstGeom prst="rect">
+            <a:avLst/>
+          </a:prstGeom>
+          <a:noFill/>
+          <a:ln/>
+        </p:spPr>
+        <p:txBody>
+          <a:bodyPr wrap="square" lIns="0" tIns="0" rIns="0" bIns="0" rtlCol="0" anchor="t"/>
           <a:lstStyle/>
           <a:p>
             <a:pPr indent="0" marL="0">
@@ -7037,17 +7037,17 @@
         </p:nvSpPr>
         <p:spPr>
           <a:xfrm>
-            <a:off x="8101584" y="2898648"/>
-            <a:ext cx="3227832" cy="685800"/>
-          </a:xfrm>
-          <a:prstGeom prst="rect">
-            <a:avLst/>
-          </a:prstGeom>
-          <a:noFill/>
-          <a:ln/>
-        </p:spPr>
-        <p:txBody>
-          <a:bodyPr wrap="square" lIns="0" tIns="0" rIns="0" bIns="0" rtlCol="0" anchor="ctr"/>
+            <a:off x="8101584" y="2916936"/>
+            <a:ext cx="3227832" cy="731520"/>
+          </a:xfrm>
+          <a:prstGeom prst="rect">
+            <a:avLst/>
+          </a:prstGeom>
+          <a:noFill/>
+          <a:ln/>
+        </p:spPr>
+        <p:txBody>
+          <a:bodyPr wrap="square" lIns="0" tIns="0" rIns="0" bIns="0" rtlCol="0" anchor="t"/>
           <a:lstStyle/>
           <a:p>
             <a:pPr indent="0" marL="0">
@@ -7099,17 +7099,17 @@
         </p:nvSpPr>
         <p:spPr>
           <a:xfrm>
-            <a:off x="8101584" y="3840480"/>
-            <a:ext cx="3209544" cy="2103120"/>
-          </a:xfrm>
-          <a:prstGeom prst="rect">
-            <a:avLst/>
-          </a:prstGeom>
-          <a:noFill/>
-          <a:ln/>
-        </p:spPr>
-        <p:txBody>
-          <a:bodyPr wrap="square" lIns="0" tIns="0" rIns="0" bIns="0" rtlCol="0" anchor="ctr"/>
+            <a:off x="8101584" y="3813048"/>
+            <a:ext cx="3209544" cy="2194560"/>
+          </a:xfrm>
+          <a:prstGeom prst="rect">
+            <a:avLst/>
+          </a:prstGeom>
+          <a:noFill/>
+          <a:ln/>
+        </p:spPr>
+        <p:txBody>
+          <a:bodyPr wrap="square" lIns="0" tIns="0" rIns="0" bIns="0" rtlCol="0" anchor="t"/>
           <a:lstStyle/>
           <a:p>
             <a:pPr indent="0" marL="0">
@@ -7714,17 +7714,17 @@
         </p:nvSpPr>
         <p:spPr>
           <a:xfrm>
-            <a:off x="877824" y="2057400"/>
-            <a:ext cx="6382512" cy="1097280"/>
-          </a:xfrm>
-          <a:prstGeom prst="rect">
-            <a:avLst/>
-          </a:prstGeom>
-          <a:noFill/>
-          <a:ln/>
-        </p:spPr>
-        <p:txBody>
-          <a:bodyPr wrap="square" lIns="0" tIns="0" rIns="0" bIns="0" rtlCol="0" anchor="ctr"/>
+            <a:off x="877824" y="2075688"/>
+            <a:ext cx="6382512" cy="1188720"/>
+          </a:xfrm>
+          <a:prstGeom prst="rect">
+            <a:avLst/>
+          </a:prstGeom>
+          <a:noFill/>
+          <a:ln/>
+        </p:spPr>
+        <p:txBody>
+          <a:bodyPr wrap="square" lIns="0" tIns="0" rIns="0" bIns="0" rtlCol="0" anchor="t"/>
           <a:lstStyle/>
           <a:p>
             <a:pPr indent="0" marL="0">
@@ -7829,17 +7829,17 @@
         </p:nvSpPr>
         <p:spPr>
           <a:xfrm>
-            <a:off x="877824" y="4069080"/>
-            <a:ext cx="6382512" cy="1828800"/>
-          </a:xfrm>
-          <a:prstGeom prst="rect">
-            <a:avLst/>
-          </a:prstGeom>
-          <a:noFill/>
-          <a:ln/>
-        </p:spPr>
-        <p:txBody>
-          <a:bodyPr wrap="square" lIns="0" tIns="0" rIns="0" bIns="0" rtlCol="0" anchor="ctr"/>
+            <a:off x="877824" y="4087368"/>
+            <a:ext cx="6382512" cy="1920240"/>
+          </a:xfrm>
+          <a:prstGeom prst="rect">
+            <a:avLst/>
+          </a:prstGeom>
+          <a:noFill/>
+          <a:ln/>
+        </p:spPr>
+        <p:txBody>
+          <a:bodyPr wrap="square" lIns="0" tIns="0" rIns="0" bIns="0" rtlCol="0" anchor="t"/>
           <a:lstStyle/>
           <a:p>
             <a:pPr indent="0" marL="0">
@@ -7983,17 +7983,17 @@
         </p:nvSpPr>
         <p:spPr>
           <a:xfrm>
-            <a:off x="8101584" y="2898648"/>
-            <a:ext cx="3227832" cy="685800"/>
-          </a:xfrm>
-          <a:prstGeom prst="rect">
-            <a:avLst/>
-          </a:prstGeom>
-          <a:noFill/>
-          <a:ln/>
-        </p:spPr>
-        <p:txBody>
-          <a:bodyPr wrap="square" lIns="0" tIns="0" rIns="0" bIns="0" rtlCol="0" anchor="ctr"/>
+            <a:off x="8101584" y="2916936"/>
+            <a:ext cx="3227832" cy="731520"/>
+          </a:xfrm>
+          <a:prstGeom prst="rect">
+            <a:avLst/>
+          </a:prstGeom>
+          <a:noFill/>
+          <a:ln/>
+        </p:spPr>
+        <p:txBody>
+          <a:bodyPr wrap="square" lIns="0" tIns="0" rIns="0" bIns="0" rtlCol="0" anchor="t"/>
           <a:lstStyle/>
           <a:p>
             <a:pPr indent="0" marL="0">
@@ -8045,17 +8045,17 @@
         </p:nvSpPr>
         <p:spPr>
           <a:xfrm>
-            <a:off x="8101584" y="3840480"/>
-            <a:ext cx="3209544" cy="2103120"/>
-          </a:xfrm>
-          <a:prstGeom prst="rect">
-            <a:avLst/>
-          </a:prstGeom>
-          <a:noFill/>
-          <a:ln/>
-        </p:spPr>
-        <p:txBody>
-          <a:bodyPr wrap="square" lIns="0" tIns="0" rIns="0" bIns="0" rtlCol="0" anchor="ctr"/>
+            <a:off x="8101584" y="3813048"/>
+            <a:ext cx="3209544" cy="2194560"/>
+          </a:xfrm>
+          <a:prstGeom prst="rect">
+            <a:avLst/>
+          </a:prstGeom>
+          <a:noFill/>
+          <a:ln/>
+        </p:spPr>
+        <p:txBody>
+          <a:bodyPr wrap="square" lIns="0" tIns="0" rIns="0" bIns="0" rtlCol="0" anchor="t"/>
           <a:lstStyle/>
           <a:p>
             <a:pPr indent="0" marL="0">
@@ -8660,17 +8660,17 @@
         </p:nvSpPr>
         <p:spPr>
           <a:xfrm>
-            <a:off x="877824" y="2057400"/>
-            <a:ext cx="6382512" cy="1097280"/>
-          </a:xfrm>
-          <a:prstGeom prst="rect">
-            <a:avLst/>
-          </a:prstGeom>
-          <a:noFill/>
-          <a:ln/>
-        </p:spPr>
-        <p:txBody>
-          <a:bodyPr wrap="square" lIns="0" tIns="0" rIns="0" bIns="0" rtlCol="0" anchor="ctr"/>
+            <a:off x="877824" y="2075688"/>
+            <a:ext cx="6382512" cy="1188720"/>
+          </a:xfrm>
+          <a:prstGeom prst="rect">
+            <a:avLst/>
+          </a:prstGeom>
+          <a:noFill/>
+          <a:ln/>
+        </p:spPr>
+        <p:txBody>
+          <a:bodyPr wrap="square" lIns="0" tIns="0" rIns="0" bIns="0" rtlCol="0" anchor="t"/>
           <a:lstStyle/>
           <a:p>
             <a:pPr indent="0" marL="0">
@@ -8775,17 +8775,17 @@
         </p:nvSpPr>
         <p:spPr>
           <a:xfrm>
-            <a:off x="877824" y="4069080"/>
-            <a:ext cx="6382512" cy="1828800"/>
-          </a:xfrm>
-          <a:prstGeom prst="rect">
-            <a:avLst/>
-          </a:prstGeom>
-          <a:noFill/>
-          <a:ln/>
-        </p:spPr>
-        <p:txBody>
-          <a:bodyPr wrap="square" lIns="0" tIns="0" rIns="0" bIns="0" rtlCol="0" anchor="ctr"/>
+            <a:off x="877824" y="4087368"/>
+            <a:ext cx="6382512" cy="1920240"/>
+          </a:xfrm>
+          <a:prstGeom prst="rect">
+            <a:avLst/>
+          </a:prstGeom>
+          <a:noFill/>
+          <a:ln/>
+        </p:spPr>
+        <p:txBody>
+          <a:bodyPr wrap="square" lIns="0" tIns="0" rIns="0" bIns="0" rtlCol="0" anchor="t"/>
           <a:lstStyle/>
           <a:p>
             <a:pPr indent="0" marL="0">
@@ -8929,17 +8929,17 @@
         </p:nvSpPr>
         <p:spPr>
           <a:xfrm>
-            <a:off x="8101584" y="2898648"/>
-            <a:ext cx="3227832" cy="685800"/>
-          </a:xfrm>
-          <a:prstGeom prst="rect">
-            <a:avLst/>
-          </a:prstGeom>
-          <a:noFill/>
-          <a:ln/>
-        </p:spPr>
-        <p:txBody>
-          <a:bodyPr wrap="square" lIns="0" tIns="0" rIns="0" bIns="0" rtlCol="0" anchor="ctr"/>
+            <a:off x="8101584" y="2916936"/>
+            <a:ext cx="3227832" cy="731520"/>
+          </a:xfrm>
+          <a:prstGeom prst="rect">
+            <a:avLst/>
+          </a:prstGeom>
+          <a:noFill/>
+          <a:ln/>
+        </p:spPr>
+        <p:txBody>
+          <a:bodyPr wrap="square" lIns="0" tIns="0" rIns="0" bIns="0" rtlCol="0" anchor="t"/>
           <a:lstStyle/>
           <a:p>
             <a:pPr indent="0" marL="0">
@@ -8991,17 +8991,17 @@
         </p:nvSpPr>
         <p:spPr>
           <a:xfrm>
-            <a:off x="8101584" y="3840480"/>
-            <a:ext cx="3209544" cy="2103120"/>
-          </a:xfrm>
-          <a:prstGeom prst="rect">
-            <a:avLst/>
-          </a:prstGeom>
-          <a:noFill/>
-          <a:ln/>
-        </p:spPr>
-        <p:txBody>
-          <a:bodyPr wrap="square" lIns="0" tIns="0" rIns="0" bIns="0" rtlCol="0" anchor="ctr"/>
+            <a:off x="8101584" y="3813048"/>
+            <a:ext cx="3209544" cy="2194560"/>
+          </a:xfrm>
+          <a:prstGeom prst="rect">
+            <a:avLst/>
+          </a:prstGeom>
+          <a:noFill/>
+          <a:ln/>
+        </p:spPr>
+        <p:txBody>
+          <a:bodyPr wrap="square" lIns="0" tIns="0" rIns="0" bIns="0" rtlCol="0" anchor="t"/>
           <a:lstStyle/>
           <a:p>
             <a:pPr indent="0" marL="0">
@@ -9606,17 +9606,17 @@
         </p:nvSpPr>
         <p:spPr>
           <a:xfrm>
-            <a:off x="877824" y="2057400"/>
-            <a:ext cx="6382512" cy="1097280"/>
-          </a:xfrm>
-          <a:prstGeom prst="rect">
-            <a:avLst/>
-          </a:prstGeom>
-          <a:noFill/>
-          <a:ln/>
-        </p:spPr>
-        <p:txBody>
-          <a:bodyPr wrap="square" lIns="0" tIns="0" rIns="0" bIns="0" rtlCol="0" anchor="ctr"/>
+            <a:off x="877824" y="2075688"/>
+            <a:ext cx="6382512" cy="1188720"/>
+          </a:xfrm>
+          <a:prstGeom prst="rect">
+            <a:avLst/>
+          </a:prstGeom>
+          <a:noFill/>
+          <a:ln/>
+        </p:spPr>
+        <p:txBody>
+          <a:bodyPr wrap="square" lIns="0" tIns="0" rIns="0" bIns="0" rtlCol="0" anchor="t"/>
           <a:lstStyle/>
           <a:p>
             <a:pPr indent="0" marL="0">
@@ -9721,17 +9721,17 @@
         </p:nvSpPr>
         <p:spPr>
           <a:xfrm>
-            <a:off x="877824" y="4069080"/>
-            <a:ext cx="6382512" cy="1828800"/>
-          </a:xfrm>
-          <a:prstGeom prst="rect">
-            <a:avLst/>
-          </a:prstGeom>
-          <a:noFill/>
-          <a:ln/>
-        </p:spPr>
-        <p:txBody>
-          <a:bodyPr wrap="square" lIns="0" tIns="0" rIns="0" bIns="0" rtlCol="0" anchor="ctr"/>
+            <a:off x="877824" y="4087368"/>
+            <a:ext cx="6382512" cy="1920240"/>
+          </a:xfrm>
+          <a:prstGeom prst="rect">
+            <a:avLst/>
+          </a:prstGeom>
+          <a:noFill/>
+          <a:ln/>
+        </p:spPr>
+        <p:txBody>
+          <a:bodyPr wrap="square" lIns="0" tIns="0" rIns="0" bIns="0" rtlCol="0" anchor="t"/>
           <a:lstStyle/>
           <a:p>
             <a:pPr indent="0" marL="0">
@@ -9875,17 +9875,17 @@
         </p:nvSpPr>
         <p:spPr>
           <a:xfrm>
-            <a:off x="8101584" y="2898648"/>
-            <a:ext cx="3227832" cy="685800"/>
-          </a:xfrm>
-          <a:prstGeom prst="rect">
-            <a:avLst/>
-          </a:prstGeom>
-          <a:noFill/>
-          <a:ln/>
-        </p:spPr>
-        <p:txBody>
-          <a:bodyPr wrap="square" lIns="0" tIns="0" rIns="0" bIns="0" rtlCol="0" anchor="ctr"/>
+            <a:off x="8101584" y="2916936"/>
+            <a:ext cx="3227832" cy="731520"/>
+          </a:xfrm>
+          <a:prstGeom prst="rect">
+            <a:avLst/>
+          </a:prstGeom>
+          <a:noFill/>
+          <a:ln/>
+        </p:spPr>
+        <p:txBody>
+          <a:bodyPr wrap="square" lIns="0" tIns="0" rIns="0" bIns="0" rtlCol="0" anchor="t"/>
           <a:lstStyle/>
           <a:p>
             <a:pPr indent="0" marL="0">
@@ -9937,17 +9937,17 @@
         </p:nvSpPr>
         <p:spPr>
           <a:xfrm>
-            <a:off x="8101584" y="3840480"/>
-            <a:ext cx="3209544" cy="2103120"/>
-          </a:xfrm>
-          <a:prstGeom prst="rect">
-            <a:avLst/>
-          </a:prstGeom>
-          <a:noFill/>
-          <a:ln/>
-        </p:spPr>
-        <p:txBody>
-          <a:bodyPr wrap="square" lIns="0" tIns="0" rIns="0" bIns="0" rtlCol="0" anchor="ctr"/>
+            <a:off x="8101584" y="3813048"/>
+            <a:ext cx="3209544" cy="2194560"/>
+          </a:xfrm>
+          <a:prstGeom prst="rect">
+            <a:avLst/>
+          </a:prstGeom>
+          <a:noFill/>
+          <a:ln/>
+        </p:spPr>
+        <p:txBody>
+          <a:bodyPr wrap="square" lIns="0" tIns="0" rIns="0" bIns="0" rtlCol="0" anchor="t"/>
           <a:lstStyle/>
           <a:p>
             <a:pPr indent="0" marL="0">
@@ -10552,17 +10552,17 @@
         </p:nvSpPr>
         <p:spPr>
           <a:xfrm>
-            <a:off x="877824" y="2057400"/>
-            <a:ext cx="6382512" cy="1097280"/>
-          </a:xfrm>
-          <a:prstGeom prst="rect">
-            <a:avLst/>
-          </a:prstGeom>
-          <a:noFill/>
-          <a:ln/>
-        </p:spPr>
-        <p:txBody>
-          <a:bodyPr wrap="square" lIns="0" tIns="0" rIns="0" bIns="0" rtlCol="0" anchor="ctr"/>
+            <a:off x="877824" y="2075688"/>
+            <a:ext cx="6382512" cy="1188720"/>
+          </a:xfrm>
+          <a:prstGeom prst="rect">
+            <a:avLst/>
+          </a:prstGeom>
+          <a:noFill/>
+          <a:ln/>
+        </p:spPr>
+        <p:txBody>
+          <a:bodyPr wrap="square" lIns="0" tIns="0" rIns="0" bIns="0" rtlCol="0" anchor="t"/>
           <a:lstStyle/>
           <a:p>
             <a:pPr indent="0" marL="0">
@@ -10667,17 +10667,17 @@
         </p:nvSpPr>
         <p:spPr>
           <a:xfrm>
-            <a:off x="877824" y="4069080"/>
-            <a:ext cx="6382512" cy="1828800"/>
-          </a:xfrm>
-          <a:prstGeom prst="rect">
-            <a:avLst/>
-          </a:prstGeom>
-          <a:noFill/>
-          <a:ln/>
-        </p:spPr>
-        <p:txBody>
-          <a:bodyPr wrap="square" lIns="0" tIns="0" rIns="0" bIns="0" rtlCol="0" anchor="ctr"/>
+            <a:off x="877824" y="4087368"/>
+            <a:ext cx="6382512" cy="1920240"/>
+          </a:xfrm>
+          <a:prstGeom prst="rect">
+            <a:avLst/>
+          </a:prstGeom>
+          <a:noFill/>
+          <a:ln/>
+        </p:spPr>
+        <p:txBody>
+          <a:bodyPr wrap="square" lIns="0" tIns="0" rIns="0" bIns="0" rtlCol="0" anchor="t"/>
           <a:lstStyle/>
           <a:p>
             <a:pPr indent="0" marL="0">
@@ -10821,17 +10821,17 @@
         </p:nvSpPr>
         <p:spPr>
           <a:xfrm>
-            <a:off x="8101584" y="2898648"/>
-            <a:ext cx="3227832" cy="685800"/>
-          </a:xfrm>
-          <a:prstGeom prst="rect">
-            <a:avLst/>
-          </a:prstGeom>
-          <a:noFill/>
-          <a:ln/>
-        </p:spPr>
-        <p:txBody>
-          <a:bodyPr wrap="square" lIns="0" tIns="0" rIns="0" bIns="0" rtlCol="0" anchor="ctr"/>
+            <a:off x="8101584" y="2916936"/>
+            <a:ext cx="3227832" cy="731520"/>
+          </a:xfrm>
+          <a:prstGeom prst="rect">
+            <a:avLst/>
+          </a:prstGeom>
+          <a:noFill/>
+          <a:ln/>
+        </p:spPr>
+        <p:txBody>
+          <a:bodyPr wrap="square" lIns="0" tIns="0" rIns="0" bIns="0" rtlCol="0" anchor="t"/>
           <a:lstStyle/>
           <a:p>
             <a:pPr indent="0" marL="0">
@@ -10883,17 +10883,17 @@
         </p:nvSpPr>
         <p:spPr>
           <a:xfrm>
-            <a:off x="8101584" y="3840480"/>
-            <a:ext cx="3209544" cy="2103120"/>
-          </a:xfrm>
-          <a:prstGeom prst="rect">
-            <a:avLst/>
-          </a:prstGeom>
-          <a:noFill/>
-          <a:ln/>
-        </p:spPr>
-        <p:txBody>
-          <a:bodyPr wrap="square" lIns="0" tIns="0" rIns="0" bIns="0" rtlCol="0" anchor="ctr"/>
+            <a:off x="8101584" y="3813048"/>
+            <a:ext cx="3209544" cy="2194560"/>
+          </a:xfrm>
+          <a:prstGeom prst="rect">
+            <a:avLst/>
+          </a:prstGeom>
+          <a:noFill/>
+          <a:ln/>
+        </p:spPr>
+        <p:txBody>
+          <a:bodyPr wrap="square" lIns="0" tIns="0" rIns="0" bIns="0" rtlCol="0" anchor="t"/>
           <a:lstStyle/>
           <a:p>
             <a:pPr indent="0" marL="0">
@@ -11884,16 +11884,16 @@
         <p:spPr>
           <a:xfrm>
             <a:off x="859536" y="2075688"/>
-            <a:ext cx="3014472" cy="868680"/>
-          </a:xfrm>
-          <a:prstGeom prst="rect">
-            <a:avLst/>
-          </a:prstGeom>
-          <a:noFill/>
-          <a:ln/>
-        </p:spPr>
-        <p:txBody>
-          <a:bodyPr wrap="square" lIns="0" tIns="0" rIns="0" bIns="0" rtlCol="0" anchor="ctr"/>
+            <a:ext cx="3014472" cy="1737360"/>
+          </a:xfrm>
+          <a:prstGeom prst="rect">
+            <a:avLst/>
+          </a:prstGeom>
+          <a:noFill/>
+          <a:ln/>
+        </p:spPr>
+        <p:txBody>
+          <a:bodyPr wrap="square" lIns="0" tIns="0" rIns="0" bIns="0" rtlCol="0" anchor="t"/>
           <a:lstStyle/>
           <a:p>
             <a:pPr indent="0" marL="0">
@@ -12035,16 +12035,16 @@
         <p:spPr>
           <a:xfrm>
             <a:off x="4587240" y="2075688"/>
-            <a:ext cx="3014472" cy="868680"/>
-          </a:xfrm>
-          <a:prstGeom prst="rect">
-            <a:avLst/>
-          </a:prstGeom>
-          <a:noFill/>
-          <a:ln/>
-        </p:spPr>
-        <p:txBody>
-          <a:bodyPr wrap="square" lIns="0" tIns="0" rIns="0" bIns="0" rtlCol="0" anchor="ctr"/>
+            <a:ext cx="3014472" cy="1737360"/>
+          </a:xfrm>
+          <a:prstGeom prst="rect">
+            <a:avLst/>
+          </a:prstGeom>
+          <a:noFill/>
+          <a:ln/>
+        </p:spPr>
+        <p:txBody>
+          <a:bodyPr wrap="square" lIns="0" tIns="0" rIns="0" bIns="0" rtlCol="0" anchor="t"/>
           <a:lstStyle/>
           <a:p>
             <a:pPr indent="0" marL="0">
@@ -12186,16 +12186,16 @@
         <p:spPr>
           <a:xfrm>
             <a:off x="8314944" y="2075688"/>
-            <a:ext cx="3014472" cy="868680"/>
-          </a:xfrm>
-          <a:prstGeom prst="rect">
-            <a:avLst/>
-          </a:prstGeom>
-          <a:noFill/>
-          <a:ln/>
-        </p:spPr>
-        <p:txBody>
-          <a:bodyPr wrap="square" lIns="0" tIns="0" rIns="0" bIns="0" rtlCol="0" anchor="ctr"/>
+            <a:ext cx="3014472" cy="1737360"/>
+          </a:xfrm>
+          <a:prstGeom prst="rect">
+            <a:avLst/>
+          </a:prstGeom>
+          <a:noFill/>
+          <a:ln/>
+        </p:spPr>
+        <p:txBody>
+          <a:bodyPr wrap="square" lIns="0" tIns="0" rIns="0" bIns="0" rtlCol="0" anchor="t"/>
           <a:lstStyle/>
           <a:p>
             <a:pPr indent="0" marL="0">
@@ -15938,17 +15938,17 @@
         </p:nvSpPr>
         <p:spPr>
           <a:xfrm>
-            <a:off x="877824" y="2057400"/>
-            <a:ext cx="6382512" cy="1097280"/>
-          </a:xfrm>
-          <a:prstGeom prst="rect">
-            <a:avLst/>
-          </a:prstGeom>
-          <a:noFill/>
-          <a:ln/>
-        </p:spPr>
-        <p:txBody>
-          <a:bodyPr wrap="square" lIns="0" tIns="0" rIns="0" bIns="0" rtlCol="0" anchor="ctr"/>
+            <a:off x="877824" y="2075688"/>
+            <a:ext cx="6382512" cy="1188720"/>
+          </a:xfrm>
+          <a:prstGeom prst="rect">
+            <a:avLst/>
+          </a:prstGeom>
+          <a:noFill/>
+          <a:ln/>
+        </p:spPr>
+        <p:txBody>
+          <a:bodyPr wrap="square" lIns="0" tIns="0" rIns="0" bIns="0" rtlCol="0" anchor="t"/>
           <a:lstStyle/>
           <a:p>
             <a:pPr indent="0" marL="0">
@@ -16053,17 +16053,17 @@
         </p:nvSpPr>
         <p:spPr>
           <a:xfrm>
-            <a:off x="877824" y="4069080"/>
-            <a:ext cx="6382512" cy="1828800"/>
-          </a:xfrm>
-          <a:prstGeom prst="rect">
-            <a:avLst/>
-          </a:prstGeom>
-          <a:noFill/>
-          <a:ln/>
-        </p:spPr>
-        <p:txBody>
-          <a:bodyPr wrap="square" lIns="0" tIns="0" rIns="0" bIns="0" rtlCol="0" anchor="ctr"/>
+            <a:off x="877824" y="4087368"/>
+            <a:ext cx="6382512" cy="1920240"/>
+          </a:xfrm>
+          <a:prstGeom prst="rect">
+            <a:avLst/>
+          </a:prstGeom>
+          <a:noFill/>
+          <a:ln/>
+        </p:spPr>
+        <p:txBody>
+          <a:bodyPr wrap="square" lIns="0" tIns="0" rIns="0" bIns="0" rtlCol="0" anchor="t"/>
           <a:lstStyle/>
           <a:p>
             <a:pPr indent="0" marL="0">
@@ -16207,17 +16207,17 @@
         </p:nvSpPr>
         <p:spPr>
           <a:xfrm>
-            <a:off x="8101584" y="2898648"/>
-            <a:ext cx="3227832" cy="685800"/>
-          </a:xfrm>
-          <a:prstGeom prst="rect">
-            <a:avLst/>
-          </a:prstGeom>
-          <a:noFill/>
-          <a:ln/>
-        </p:spPr>
-        <p:txBody>
-          <a:bodyPr wrap="square" lIns="0" tIns="0" rIns="0" bIns="0" rtlCol="0" anchor="ctr"/>
+            <a:off x="8101584" y="2916936"/>
+            <a:ext cx="3227832" cy="731520"/>
+          </a:xfrm>
+          <a:prstGeom prst="rect">
+            <a:avLst/>
+          </a:prstGeom>
+          <a:noFill/>
+          <a:ln/>
+        </p:spPr>
+        <p:txBody>
+          <a:bodyPr wrap="square" lIns="0" tIns="0" rIns="0" bIns="0" rtlCol="0" anchor="t"/>
           <a:lstStyle/>
           <a:p>
             <a:pPr indent="0" marL="0">
@@ -16269,17 +16269,17 @@
         </p:nvSpPr>
         <p:spPr>
           <a:xfrm>
-            <a:off x="8101584" y="3840480"/>
-            <a:ext cx="3209544" cy="2103120"/>
-          </a:xfrm>
-          <a:prstGeom prst="rect">
-            <a:avLst/>
-          </a:prstGeom>
-          <a:noFill/>
-          <a:ln/>
-        </p:spPr>
-        <p:txBody>
-          <a:bodyPr wrap="square" lIns="0" tIns="0" rIns="0" bIns="0" rtlCol="0" anchor="ctr"/>
+            <a:off x="8101584" y="3813048"/>
+            <a:ext cx="3209544" cy="2194560"/>
+          </a:xfrm>
+          <a:prstGeom prst="rect">
+            <a:avLst/>
+          </a:prstGeom>
+          <a:noFill/>
+          <a:ln/>
+        </p:spPr>
+        <p:txBody>
+          <a:bodyPr wrap="square" lIns="0" tIns="0" rIns="0" bIns="0" rtlCol="0" anchor="t"/>
           <a:lstStyle/>
           <a:p>
             <a:pPr indent="0" marL="0">
@@ -16884,17 +16884,17 @@
         </p:nvSpPr>
         <p:spPr>
           <a:xfrm>
-            <a:off x="877824" y="2057400"/>
-            <a:ext cx="6382512" cy="1097280"/>
-          </a:xfrm>
-          <a:prstGeom prst="rect">
-            <a:avLst/>
-          </a:prstGeom>
-          <a:noFill/>
-          <a:ln/>
-        </p:spPr>
-        <p:txBody>
-          <a:bodyPr wrap="square" lIns="0" tIns="0" rIns="0" bIns="0" rtlCol="0" anchor="ctr"/>
+            <a:off x="877824" y="2075688"/>
+            <a:ext cx="6382512" cy="1188720"/>
+          </a:xfrm>
+          <a:prstGeom prst="rect">
+            <a:avLst/>
+          </a:prstGeom>
+          <a:noFill/>
+          <a:ln/>
+        </p:spPr>
+        <p:txBody>
+          <a:bodyPr wrap="square" lIns="0" tIns="0" rIns="0" bIns="0" rtlCol="0" anchor="t"/>
           <a:lstStyle/>
           <a:p>
             <a:pPr indent="0" marL="0">
@@ -16999,17 +16999,17 @@
         </p:nvSpPr>
         <p:spPr>
           <a:xfrm>
-            <a:off x="877824" y="4069080"/>
-            <a:ext cx="6382512" cy="1828800"/>
-          </a:xfrm>
-          <a:prstGeom prst="rect">
-            <a:avLst/>
-          </a:prstGeom>
-          <a:noFill/>
-          <a:ln/>
-        </p:spPr>
-        <p:txBody>
-          <a:bodyPr wrap="square" lIns="0" tIns="0" rIns="0" bIns="0" rtlCol="0" anchor="ctr"/>
+            <a:off x="877824" y="4087368"/>
+            <a:ext cx="6382512" cy="1920240"/>
+          </a:xfrm>
+          <a:prstGeom prst="rect">
+            <a:avLst/>
+          </a:prstGeom>
+          <a:noFill/>
+          <a:ln/>
+        </p:spPr>
+        <p:txBody>
+          <a:bodyPr wrap="square" lIns="0" tIns="0" rIns="0" bIns="0" rtlCol="0" anchor="t"/>
           <a:lstStyle/>
           <a:p>
             <a:pPr indent="0" marL="0">
@@ -17153,17 +17153,17 @@
         </p:nvSpPr>
         <p:spPr>
           <a:xfrm>
-            <a:off x="8101584" y="2898648"/>
-            <a:ext cx="3227832" cy="685800"/>
-          </a:xfrm>
-          <a:prstGeom prst="rect">
-            <a:avLst/>
-          </a:prstGeom>
-          <a:noFill/>
-          <a:ln/>
-        </p:spPr>
-        <p:txBody>
-          <a:bodyPr wrap="square" lIns="0" tIns="0" rIns="0" bIns="0" rtlCol="0" anchor="ctr"/>
+            <a:off x="8101584" y="2916936"/>
+            <a:ext cx="3227832" cy="731520"/>
+          </a:xfrm>
+          <a:prstGeom prst="rect">
+            <a:avLst/>
+          </a:prstGeom>
+          <a:noFill/>
+          <a:ln/>
+        </p:spPr>
+        <p:txBody>
+          <a:bodyPr wrap="square" lIns="0" tIns="0" rIns="0" bIns="0" rtlCol="0" anchor="t"/>
           <a:lstStyle/>
           <a:p>
             <a:pPr indent="0" marL="0">
@@ -17215,17 +17215,17 @@
         </p:nvSpPr>
         <p:spPr>
           <a:xfrm>
-            <a:off x="8101584" y="3840480"/>
-            <a:ext cx="3209544" cy="2103120"/>
-          </a:xfrm>
-          <a:prstGeom prst="rect">
-            <a:avLst/>
-          </a:prstGeom>
-          <a:noFill/>
-          <a:ln/>
-        </p:spPr>
-        <p:txBody>
-          <a:bodyPr wrap="square" lIns="0" tIns="0" rIns="0" bIns="0" rtlCol="0" anchor="ctr"/>
+            <a:off x="8101584" y="3813048"/>
+            <a:ext cx="3209544" cy="2194560"/>
+          </a:xfrm>
+          <a:prstGeom prst="rect">
+            <a:avLst/>
+          </a:prstGeom>
+          <a:noFill/>
+          <a:ln/>
+        </p:spPr>
+        <p:txBody>
+          <a:bodyPr wrap="square" lIns="0" tIns="0" rIns="0" bIns="0" rtlCol="0" anchor="t"/>
           <a:lstStyle/>
           <a:p>
             <a:pPr indent="0" marL="0">
@@ -17830,17 +17830,17 @@
         </p:nvSpPr>
         <p:spPr>
           <a:xfrm>
-            <a:off x="877824" y="2057400"/>
-            <a:ext cx="6382512" cy="1097280"/>
-          </a:xfrm>
-          <a:prstGeom prst="rect">
-            <a:avLst/>
-          </a:prstGeom>
-          <a:noFill/>
-          <a:ln/>
-        </p:spPr>
-        <p:txBody>
-          <a:bodyPr wrap="square" lIns="0" tIns="0" rIns="0" bIns="0" rtlCol="0" anchor="ctr"/>
+            <a:off x="877824" y="2075688"/>
+            <a:ext cx="6382512" cy="1188720"/>
+          </a:xfrm>
+          <a:prstGeom prst="rect">
+            <a:avLst/>
+          </a:prstGeom>
+          <a:noFill/>
+          <a:ln/>
+        </p:spPr>
+        <p:txBody>
+          <a:bodyPr wrap="square" lIns="0" tIns="0" rIns="0" bIns="0" rtlCol="0" anchor="t"/>
           <a:lstStyle/>
           <a:p>
             <a:pPr indent="0" marL="0">
@@ -17945,17 +17945,17 @@
         </p:nvSpPr>
         <p:spPr>
           <a:xfrm>
-            <a:off x="877824" y="4069080"/>
-            <a:ext cx="6382512" cy="1828800"/>
-          </a:xfrm>
-          <a:prstGeom prst="rect">
-            <a:avLst/>
-          </a:prstGeom>
-          <a:noFill/>
-          <a:ln/>
-        </p:spPr>
-        <p:txBody>
-          <a:bodyPr wrap="square" lIns="0" tIns="0" rIns="0" bIns="0" rtlCol="0" anchor="ctr"/>
+            <a:off x="877824" y="4087368"/>
+            <a:ext cx="6382512" cy="1920240"/>
+          </a:xfrm>
+          <a:prstGeom prst="rect">
+            <a:avLst/>
+          </a:prstGeom>
+          <a:noFill/>
+          <a:ln/>
+        </p:spPr>
+        <p:txBody>
+          <a:bodyPr wrap="square" lIns="0" tIns="0" rIns="0" bIns="0" rtlCol="0" anchor="t"/>
           <a:lstStyle/>
           <a:p>
             <a:pPr indent="0" marL="0">
@@ -18099,17 +18099,17 @@
         </p:nvSpPr>
         <p:spPr>
           <a:xfrm>
-            <a:off x="8101584" y="2898648"/>
-            <a:ext cx="3227832" cy="685800"/>
-          </a:xfrm>
-          <a:prstGeom prst="rect">
-            <a:avLst/>
-          </a:prstGeom>
-          <a:noFill/>
-          <a:ln/>
-        </p:spPr>
-        <p:txBody>
-          <a:bodyPr wrap="square" lIns="0" tIns="0" rIns="0" bIns="0" rtlCol="0" anchor="ctr"/>
+            <a:off x="8101584" y="2916936"/>
+            <a:ext cx="3227832" cy="731520"/>
+          </a:xfrm>
+          <a:prstGeom prst="rect">
+            <a:avLst/>
+          </a:prstGeom>
+          <a:noFill/>
+          <a:ln/>
+        </p:spPr>
+        <p:txBody>
+          <a:bodyPr wrap="square" lIns="0" tIns="0" rIns="0" bIns="0" rtlCol="0" anchor="t"/>
           <a:lstStyle/>
           <a:p>
             <a:pPr indent="0" marL="0">
@@ -18161,17 +18161,17 @@
         </p:nvSpPr>
         <p:spPr>
           <a:xfrm>
-            <a:off x="8101584" y="3840480"/>
-            <a:ext cx="3209544" cy="2103120"/>
-          </a:xfrm>
-          <a:prstGeom prst="rect">
-            <a:avLst/>
-          </a:prstGeom>
-          <a:noFill/>
-          <a:ln/>
-        </p:spPr>
-        <p:txBody>
-          <a:bodyPr wrap="square" lIns="0" tIns="0" rIns="0" bIns="0" rtlCol="0" anchor="ctr"/>
+            <a:off x="8101584" y="3813048"/>
+            <a:ext cx="3209544" cy="2194560"/>
+          </a:xfrm>
+          <a:prstGeom prst="rect">
+            <a:avLst/>
+          </a:prstGeom>
+          <a:noFill/>
+          <a:ln/>
+        </p:spPr>
+        <p:txBody>
+          <a:bodyPr wrap="square" lIns="0" tIns="0" rIns="0" bIns="0" rtlCol="0" anchor="t"/>
           <a:lstStyle/>
           <a:p>
             <a:pPr indent="0" marL="0">
@@ -18776,17 +18776,17 @@
         </p:nvSpPr>
         <p:spPr>
           <a:xfrm>
-            <a:off x="877824" y="2057400"/>
-            <a:ext cx="6382512" cy="1097280"/>
-          </a:xfrm>
-          <a:prstGeom prst="rect">
-            <a:avLst/>
-          </a:prstGeom>
-          <a:noFill/>
-          <a:ln/>
-        </p:spPr>
-        <p:txBody>
-          <a:bodyPr wrap="square" lIns="0" tIns="0" rIns="0" bIns="0" rtlCol="0" anchor="ctr"/>
+            <a:off x="877824" y="2075688"/>
+            <a:ext cx="6382512" cy="1188720"/>
+          </a:xfrm>
+          <a:prstGeom prst="rect">
+            <a:avLst/>
+          </a:prstGeom>
+          <a:noFill/>
+          <a:ln/>
+        </p:spPr>
+        <p:txBody>
+          <a:bodyPr wrap="square" lIns="0" tIns="0" rIns="0" bIns="0" rtlCol="0" anchor="t"/>
           <a:lstStyle/>
           <a:p>
             <a:pPr indent="0" marL="0">
@@ -18891,17 +18891,17 @@
         </p:nvSpPr>
         <p:spPr>
           <a:xfrm>
-            <a:off x="877824" y="4069080"/>
-            <a:ext cx="6382512" cy="1828800"/>
-          </a:xfrm>
-          <a:prstGeom prst="rect">
-            <a:avLst/>
-          </a:prstGeom>
-          <a:noFill/>
-          <a:ln/>
-        </p:spPr>
-        <p:txBody>
-          <a:bodyPr wrap="square" lIns="0" tIns="0" rIns="0" bIns="0" rtlCol="0" anchor="ctr"/>
+            <a:off x="877824" y="4087368"/>
+            <a:ext cx="6382512" cy="1920240"/>
+          </a:xfrm>
+          <a:prstGeom prst="rect">
+            <a:avLst/>
+          </a:prstGeom>
+          <a:noFill/>
+          <a:ln/>
+        </p:spPr>
+        <p:txBody>
+          <a:bodyPr wrap="square" lIns="0" tIns="0" rIns="0" bIns="0" rtlCol="0" anchor="t"/>
           <a:lstStyle/>
           <a:p>
             <a:pPr indent="0" marL="0">
@@ -19045,17 +19045,17 @@
         </p:nvSpPr>
         <p:spPr>
           <a:xfrm>
-            <a:off x="8101584" y="2898648"/>
-            <a:ext cx="3227832" cy="685800"/>
-          </a:xfrm>
-          <a:prstGeom prst="rect">
-            <a:avLst/>
-          </a:prstGeom>
-          <a:noFill/>
-          <a:ln/>
-        </p:spPr>
-        <p:txBody>
-          <a:bodyPr wrap="square" lIns="0" tIns="0" rIns="0" bIns="0" rtlCol="0" anchor="ctr"/>
+            <a:off x="8101584" y="2916936"/>
+            <a:ext cx="3227832" cy="731520"/>
+          </a:xfrm>
+          <a:prstGeom prst="rect">
+            <a:avLst/>
+          </a:prstGeom>
+          <a:noFill/>
+          <a:ln/>
+        </p:spPr>
+        <p:txBody>
+          <a:bodyPr wrap="square" lIns="0" tIns="0" rIns="0" bIns="0" rtlCol="0" anchor="t"/>
           <a:lstStyle/>
           <a:p>
             <a:pPr indent="0" marL="0">
@@ -19087,17 +19087,17 @@
         </p:nvSpPr>
         <p:spPr>
           <a:xfrm>
-            <a:off x="8101584" y="3840480"/>
-            <a:ext cx="3209544" cy="2103120"/>
-          </a:xfrm>
-          <a:prstGeom prst="rect">
-            <a:avLst/>
-          </a:prstGeom>
-          <a:noFill/>
-          <a:ln/>
-        </p:spPr>
-        <p:txBody>
-          <a:bodyPr wrap="square" lIns="0" tIns="0" rIns="0" bIns="0" rtlCol="0" anchor="ctr"/>
+            <a:off x="8101584" y="3813048"/>
+            <a:ext cx="3209544" cy="2194560"/>
+          </a:xfrm>
+          <a:prstGeom prst="rect">
+            <a:avLst/>
+          </a:prstGeom>
+          <a:noFill/>
+          <a:ln/>
+        </p:spPr>
+        <p:txBody>
+          <a:bodyPr wrap="square" lIns="0" tIns="0" rIns="0" bIns="0" rtlCol="0" anchor="t"/>
           <a:lstStyle/>
           <a:p>
             <a:pPr indent="0" marL="0">
@@ -19702,17 +19702,17 @@
         </p:nvSpPr>
         <p:spPr>
           <a:xfrm>
-            <a:off x="877824" y="2057400"/>
-            <a:ext cx="6382512" cy="1097280"/>
-          </a:xfrm>
-          <a:prstGeom prst="rect">
-            <a:avLst/>
-          </a:prstGeom>
-          <a:noFill/>
-          <a:ln/>
-        </p:spPr>
-        <p:txBody>
-          <a:bodyPr wrap="square" lIns="0" tIns="0" rIns="0" bIns="0" rtlCol="0" anchor="ctr"/>
+            <a:off x="877824" y="2075688"/>
+            <a:ext cx="6382512" cy="1188720"/>
+          </a:xfrm>
+          <a:prstGeom prst="rect">
+            <a:avLst/>
+          </a:prstGeom>
+          <a:noFill/>
+          <a:ln/>
+        </p:spPr>
+        <p:txBody>
+          <a:bodyPr wrap="square" lIns="0" tIns="0" rIns="0" bIns="0" rtlCol="0" anchor="t"/>
           <a:lstStyle/>
           <a:p>
             <a:pPr indent="0" marL="0">
@@ -19817,17 +19817,17 @@
         </p:nvSpPr>
         <p:spPr>
           <a:xfrm>
-            <a:off x="877824" y="4069080"/>
-            <a:ext cx="6382512" cy="1828800"/>
-          </a:xfrm>
-          <a:prstGeom prst="rect">
-            <a:avLst/>
-          </a:prstGeom>
-          <a:noFill/>
-          <a:ln/>
-        </p:spPr>
-        <p:txBody>
-          <a:bodyPr wrap="square" lIns="0" tIns="0" rIns="0" bIns="0" rtlCol="0" anchor="ctr"/>
+            <a:off x="877824" y="4087368"/>
+            <a:ext cx="6382512" cy="1920240"/>
+          </a:xfrm>
+          <a:prstGeom prst="rect">
+            <a:avLst/>
+          </a:prstGeom>
+          <a:noFill/>
+          <a:ln/>
+        </p:spPr>
+        <p:txBody>
+          <a:bodyPr wrap="square" lIns="0" tIns="0" rIns="0" bIns="0" rtlCol="0" anchor="t"/>
           <a:lstStyle/>
           <a:p>
             <a:pPr indent="0" marL="0">
@@ -19971,17 +19971,17 @@
         </p:nvSpPr>
         <p:spPr>
           <a:xfrm>
-            <a:off x="8101584" y="2898648"/>
-            <a:ext cx="3227832" cy="685800"/>
-          </a:xfrm>
-          <a:prstGeom prst="rect">
-            <a:avLst/>
-          </a:prstGeom>
-          <a:noFill/>
-          <a:ln/>
-        </p:spPr>
-        <p:txBody>
-          <a:bodyPr wrap="square" lIns="0" tIns="0" rIns="0" bIns="0" rtlCol="0" anchor="ctr"/>
+            <a:off x="8101584" y="2916936"/>
+            <a:ext cx="3227832" cy="731520"/>
+          </a:xfrm>
+          <a:prstGeom prst="rect">
+            <a:avLst/>
+          </a:prstGeom>
+          <a:noFill/>
+          <a:ln/>
+        </p:spPr>
+        <p:txBody>
+          <a:bodyPr wrap="square" lIns="0" tIns="0" rIns="0" bIns="0" rtlCol="0" anchor="t"/>
           <a:lstStyle/>
           <a:p>
             <a:pPr indent="0" marL="0">
@@ -20033,17 +20033,17 @@
         </p:nvSpPr>
         <p:spPr>
           <a:xfrm>
-            <a:off x="8101584" y="3840480"/>
-            <a:ext cx="3209544" cy="2103120"/>
-          </a:xfrm>
-          <a:prstGeom prst="rect">
-            <a:avLst/>
-          </a:prstGeom>
-          <a:noFill/>
-          <a:ln/>
-        </p:spPr>
-        <p:txBody>
-          <a:bodyPr wrap="square" lIns="0" tIns="0" rIns="0" bIns="0" rtlCol="0" anchor="ctr"/>
+            <a:off x="8101584" y="3813048"/>
+            <a:ext cx="3209544" cy="2194560"/>
+          </a:xfrm>
+          <a:prstGeom prst="rect">
+            <a:avLst/>
+          </a:prstGeom>
+          <a:noFill/>
+          <a:ln/>
+        </p:spPr>
+        <p:txBody>
+          <a:bodyPr wrap="square" lIns="0" tIns="0" rIns="0" bIns="0" rtlCol="0" anchor="t"/>
           <a:lstStyle/>
           <a:p>
             <a:pPr indent="0" marL="0">

--- a/docs/presentation.pptx
+++ b/docs/presentation.pptx
@@ -529,9 +529,9 @@
           <a:p>
             <a:r>
               <a:rPr lang="en-US" dirty="0"/>
-              <a:t>SAY: Good morning. This project is about testing circuits — specifically, getting an AI to write the test programme, and then catching its mistakes before we run anything.
-PLAN: I will show you the problem, then walk the pipeline node by node, then the results. About twenty minutes.
-TIMING: if you are past 3 minutes when you leave slide 3, speed up the node slides.</a:t>
+              <a:t>Opening line is yours — the slide says the title. One sentence on what the project is and move.
+TIMING: 20 minutes. Protect the results, slides 20 to 25, above everything else. If you are past 5 minutes when you leave the pipeline overview, speed up — the node slides are built to run at about 30 seconds each and they are deliberately uniform so the audience learns the layout once.
+The three chips on the slide are there so the scale lands before you say anything: 280 runs, 215 injected faults, 4 sweeps.</a:t>
             </a:r>
             <a:endParaRPr lang="en-US" dirty="0"/>
           </a:p>
@@ -619,10 +619,9 @@
           <a:p>
             <a:r>
               <a:rPr lang="en-US" dirty="0"/>
-              <a:t>SAY: Here the AI plans what to test, as a list of named situations. Reset clears the counter. It wraps at the maximum. And so on.
-The names matter more than they look. They get printed in the output as PASS or FAIL next to the name, so when a run fails we know which behaviour broke — not just that something did. All our failure analysis depends on that.
-We get about eight of these per run. Remember that number — it comes back.
-IF ASKED about the eight: on a circuit with ten input bits there are over a thousand input combinations, so eight test cases is a thin sample. That is the honest explanation for why our mutant-detection score drops on the bigger benchmark circuits. It is in the report as future work.</a:t>
+              <a:t>NOT ON SLIDE — the eight is our own instruction, not a model limit. The prompt says “generate between 5 and 10 scenarios” and the distribution peaks at 8 and 9.
+IF ASKED whether eight is enough: on a circuit with ten input bits there are 1,024 input combinations, so eight is under one percent of them. That is the honest reason our broken-copy detection falls from 95% on our small circuits to about half on the big benchmark ones — the bug lives in a case the eight never visit. Raising the count is in the report as future work.
+IF ASKED about AutoBench: they check that every scenario they planned actually made it into the testbench, with up to three retries. We have no equivalent. Also future work.</a:t>
             </a:r>
             <a:endParaRPr lang="en-US" dirty="0"/>
           </a:p>
@@ -710,9 +709,9 @@
           <a:p>
             <a:r>
               <a:rPr lang="en-US" dirty="0"/>
-              <a:t>SAY: This is the main event — the actual test programme, in Verilog. It feeds inputs in, watches what comes out, and prints PASS or FAIL for each of the scenarios from the previous step.
-Nearly everything it writes compiles — 92.5%. But compiling is the easy part. Only about a third of them actually pass against the real circuit, and that gap is where the interesting part of this project lives.
-We use the strong model here. Writing correct hardware code is genuinely hard.</a:t>
+              <a:t>Strong model — writing correct hardware code is genuinely hard.
+NOT ON SLIDE: 92.5% compile but only 31% pass. That gap is where this project lives.
+IF ASKED what the failures look like: almost all are wrong expected values rather than broken structure. 87% of them.</a:t>
             </a:r>
             <a:endParaRPr lang="en-US" dirty="0"/>
           </a:p>
@@ -800,8 +799,8 @@
           <a:p>
             <a:r>
               <a:rPr lang="en-US" dirty="0"/>
-              <a:t>SAY: Alongside the testbench we also generate a small Python checker. These two run at the same time, in parallel, because neither needs the other's output — it saves wall-clock time.
-IF ASKED how this differs from AutoBench: theirs is a bigger split. Their Verilog only drives the circuit and dumps everything into a text file, and their Python does all the judging. Ours is a self-checking testbench — the Verilog decides PASS or FAIL itself. Ours is simpler and closer to what engineers actually write. Theirs separates the stimulus from the checking, which in principle lets the checking be more thorough. We did not test which is better.</a:t>
+              <a:t>NOT ON SLIDE — how this differs from AutoBench. Theirs is a bigger split: their Verilog only drives the circuit and dumps to a text file, and Python does all the judging. Ours is self-checking — the Verilog decides PASS or FAIL itself.
+Ours is simpler and closer to what engineers write. Theirs separates the stimulus from the checking, which in principle allows more thorough checking. We did not test which is better, and I would say so.</a:t>
             </a:r>
             <a:endParaRPr lang="en-US" dirty="0"/>
           </a:p>
@@ -889,8 +888,8 @@
           <a:p>
             <a:r>
               <a:rPr lang="en-US" dirty="0"/>
-              <a:t>SAY: This one does nothing — it is a waiting point. The two previous steps run in parallel, so something has to wait for both before we continue.
-Move fast here. Fifteen seconds. It is on its own slide for completeness, not because it is interesting.</a:t>
+              <a:t>Fifteen seconds. It is on its own slide for completeness, not because it is interesting.
+IF ASKED why it exists at all: the two previous steps run in parallel to save wall-clock time, and something has to wait for both.</a:t>
             </a:r>
             <a:endParaRPr lang="en-US" dirty="0"/>
           </a:p>
@@ -978,11 +977,10 @@
           <a:p>
             <a:r>
               <a:rPr lang="en-US" dirty="0"/>
-              <a:t>SAY: This step is plain Python, no AI at all. It inserts a missing print statement, or starts a clock that was declared but never ticks. There is one correct answer to both, so a script beats a model — it is faster, free, and predictable.
-THE INTERESTING BIT: AutoBench has the same idea, and for them it was the single biggest improvement in the whole paper — it took their sequential compile rate from 55 percent to 97. Forty-two points.
-Ours fired six times in a hundred and eighty-eight runs. Almost nothing.
-That is not because our version is worse. It is because the mistake it fixes has stopped happening — current models do not forget to print their outputs any more. I will show you the number that proves that later.
-IF ASKED for the proof now: the 182 runs where our script never fired at all still compile at 90.7 percent, against AutoBench's 55.5 without theirs.</a:t>
+              <a:t>THE POINT, and it is only half on the slide: AutoBench has the same idea and for them it was the single biggest improvement in the paper — sequential compile rate 55% to 97%. Forty-two points. Ours fired six times in 188 runs.
+That is not because ours is worse. The mistake it fixes has stopped happening. I show the number that proves it in the results.
+IF ASKED for the proof now: the 182 runs where our script never fired still compile at 90.7%, against AutoBench's 55.5% without theirs.
+IF ASKED why Python rather than a model: one correct answer, so a script is faster, free, and does the same thing every time. It also marks its own work so a second pass cannot double-insert.</a:t>
             </a:r>
             <a:endParaRPr lang="en-US" dirty="0"/>
           </a:p>
@@ -1070,12 +1068,9 @@
           <a:p>
             <a:r>
               <a:rPr lang="en-US" dirty="0"/>
-              <a:t>SAY: This is the heart of the project. It reads the testbench and the circuit as structure rather than as text, and runs six checks — without running anything.
-The six are things like: is a pin wired to the wrong name, does a signal width match the pin, is an input never given a value. Two of them are the important ones: is there an output nobody ever checks, and for clocked circuits, is there an output that is never printed.
-Those two are the argument for the whole project, because nothing else can catch them. If the testbench stops checking an output, running it passes.
-The next slide shows how well it works. Do not give the number here — save it.
-IF ASKED about coverage: the parser could only read about 60 percent of the files. The rest use newer SystemVerilog syntax it does not support, and fall back to a second parser that only checks whether the file is valid. That is a real limitation and it is in the report.
-IF ASKED whether we tuned the checks: we built seven and deleted one. It caught none of the faults it was built for and raised a false alarm on a correct testbench, so we removed it rather than patch it.</a:t>
+              <a:t>Do NOT give the performance number here — the results slide has it. Set it up and move.
+IF ASKED about coverage: the parser could only read 262 of 434 files. The rest use newer SystemVerilog syntax it does not support and fall back to a second parser that only checks validity. Real limitation, in the report. Worse, those unreadable files are not a random sample — they fail Eval1 far more often, so our result is measured on the healthier half.
+IF ASKED whether we tuned the checks to flatter ourselves: we built seven and deleted one. It caught none of the five faults it was built for and raised the only false alarm on a correct testbench, so we removed it rather than patch it.</a:t>
             </a:r>
             <a:endParaRPr lang="en-US" dirty="0"/>
           </a:p>
@@ -1163,9 +1158,8 @@
           <a:p>
             <a:r>
               <a:rPr lang="en-US" dirty="0"/>
-              <a:t>SAY: The checker produces a machine report. This step turns it into an instruction the AI can actually act on — which signal, what is wrong, what to do.
-One small design point worth mentioning: it skips the AI call entirely when the report is clean. Since our reports were almost always clean, that made the static-analysis-only setting cheaper to run than doing nothing at all.
-Quick slide. Thirty seconds.</a:t>
+              <a:t>Thirty seconds.
+NOT ON SLIDE: because our reports were almost always clean, skipping the call made the static-only setting cheaper to run than doing nothing at all — 2% fewer tokens than baseline.</a:t>
             </a:r>
             <a:endParaRPr lang="en-US" dirty="0"/>
           </a:p>
@@ -1253,10 +1247,9 @@
           <a:p>
             <a:r>
               <a:rPr lang="en-US" dirty="0"/>
-              <a:t>SAY: When something is wrong, this step rewrites the testbench — and it is told what was wrong. Three things can trigger it: our checker, the compiler, or a failed run.
-A hundred and two runs tried a repair. Twenty-six of them ended up working. About one in four.
-TWO SAFEGUARDS worth naming: if the same error comes back twice we stop, because a fourth identical attempt will not suddenly work. And we keep the best version, not the last one — repair rewrites the whole file, so attempt three can be worse than attempt one. Without that, a setting that repairs more could score worse, which is not something an experiment can allow.
-IF ASKED why three quarters fail: two patterns. Some regenerate a testbench that fails the exact same scenarios — the diagnosis was not acted on. Others produce a different error every single time until the budget runs out. Across fourteen multi-attempt runs, no error ever repeated. Prior work does not report this.</a:t>
+              <a:t>NOT ON SLIDE — two safeguards. If the same error comes back twice we stop, because a fourth identical attempt will not work. And we keep the best version rather than the last, because repair rewrites the whole file and attempt three can be worse than attempt one. Without that a setting that repairs more could score worse, which an experiment cannot allow.
+IF ASKED why three quarters fail: two patterns. Some regenerate a testbench failing the exact same scenarios — the diagnosis was not acted on. Others produce a different error every iteration until the budget runs out. Across fourteen multi-attempt runs, no error signature ever repeated. Prior work does not report this.
+IF ASKED about the example: the repair worked at attempt 2 and the loop then undid it. Cause is on the gen_dut slide — our checker reads the generated circuit, marking uses the real one.</a:t>
             </a:r>
             <a:endParaRPr lang="en-US" dirty="0"/>
           </a:p>
@@ -1344,11 +1337,9 @@
           <a:p>
             <a:r>
               <a:rPr lang="en-US" dirty="0"/>
-              <a:t>SAY: This one looks strange — it rewrites the testbench and is told nothing at all about what was wrong.
-Here is why it exists. Suppose our full version beats the plain one. Two explanations fit equally well: the feedback found the problem, or the AI just got a second roll of the dice. You cannot tell those apart, because the plain version never gets a second try.
-So we added one that gets the second try with no information. That isolates the dice roll.
-And the result: a blind second attempt is worth nothing at all. Which is useful — it means any real improvement has to be coming from the diagnosis.
-AutoBench has nothing like this, so their reported improvements cannot separate those two explanations. This is the clearest methodological thing we add.</a:t>
+              <a:t>THE METHODOLOGICAL POINT. Spend your time here, not on the mechanics.
+NOT ON SLIDE: AutoBench has no arm like this, so their reported gains cannot separate “the feedback worked” from “the model got another go”.
+IF ASKED whose idea it was: ours, and it came from catching our own mistake. We re-audited the earlier results before building on them and found an apparent win was fake — all five of its static-triggered repairs traced to a single false positive. So that setting was really just one extra attempt, and nothing could tell the two apart. The control was built to expose exactly that.</a:t>
             </a:r>
             <a:endParaRPr lang="en-US" dirty="0"/>
           </a:p>
@@ -1436,10 +1427,9 @@
           <a:p>
             <a:r>
               <a:rPr lang="en-US" dirty="0"/>
-              <a:t>SAY: Finally, marking. Three levels. Does it compile — 92.5 percent. Does it pass against the real circuit — 31 percent. And does it catch deliberately broken copies of the circuit — 95 percent.
-BE UP FRONT ABOUT THE LAST ONE: that 95 looks great and we report it as a limitation rather than a result. Our own test circuits are small — a one-bit flip-flop has nowhere for a bug to hide, so almost any testbench catches everything. We checked this properly rather than assuming: we regenerated the broken copies with a better model and the score moved one point. We swapped in the bigger benchmark circuits and it moved forty-four. So it is the circuits, not the test.
-IF ASKED how 31 percent compares: AutoBench report 37 percent on sequential circuits, and ours are mostly sequential and the hardest quintile of their benchmark. Same range.
-IF ASKED whether our 95 beats their 44.8: it does not — they measure something different. Theirs counts a problem as passed only if the testbench agrees with a reference testbench on 80 percent of the broken copies. Under their rule we get 20 percent against their 26 on sequential circuits. No ranking either way at this sample size.</a:t>
+              <a:t>NOT ON SLIDE: Eval2's 95% on our own circuits is a ceiling, not a result, and I would say so before being asked. Our circuits are too small for a bug to hide in. We tested that rather than assuming — regenerating the broken copies with a better model moved the score one point; swapping in bigger circuits moved it forty-four.
+IF ASKED how 31% compares: AutoBench report 37% on clocked circuits, and ours are mostly clocked and the hardest fifth of their benchmark. Same range.
+IF ASKED whether our 95 beats their 44.8: it does not — they measure agreement with a reference testbench at an 80% threshold. Under their rule we get 20% against their 26%. Next section has the table.</a:t>
             </a:r>
             <a:endParaRPr lang="en-US" dirty="0"/>
           </a:p>
@@ -1527,11 +1517,8 @@
           <a:p>
             <a:r>
               <a:rPr lang="en-US" dirty="0"/>
-              <a:t>SAY: Two words I will use throughout, before anything else.
-A circuit — the DUT, device under test — is a hardware design in Verilog. Verilog is not a programming language in the usual sense. It does not run line by line; it describes wires and gates operating simultaneously, and it eventually becomes actual silicon.
-A testbench is a second piece of Verilog whose only job is to test the first. Feed inputs in, watch the outputs, compare against what should have happened, print PASS or FAIL.
-Writing these by hand is most of the work in verification. That is why people want an AI to do it — and this project is about the mistakes it makes when it does.
-THE BOX: a testbench is itself a test, and a test can be written badly. It can run happily, report success, and have checked almost nothing. Hold onto that one.</a:t>
+              <a:t>NOT ON SLIDE, worth saying: Verilog does not execute line by line like a normal programme. Everything happens at once, because it describes physical hardware. That is the single biggest source of confusion for a software audience.
+DUT is the jargon they will hear for the rest of the talk — say it once here so it lands.</a:t>
             </a:r>
             <a:endParaRPr lang="en-US" dirty="0"/>
           </a:p>
@@ -1619,11 +1606,9 @@
           <a:p>
             <a:r>
               <a:rPr lang="en-US" dirty="0"/>
-              <a:t>SAY: To test the checker we deliberately broke 215 testbenches in known ways and scored three things against them: our checker, the compiler, and actually running it.
-Our checker finds all of every kind it was built for. No false alarms on clean testbenches.
-POINT AT THE BOLD ROW: this is the one that matters. Nineteen cases where the testbench stops checking an output. We find all of them. The compiler finds none. Running it finds none — because the test passes. It is not looking any more.
-The last two rows are controls. We built those faults to be impossible to spot from structure — swapping two signals of the same width, for instance. Our checker scores zero on them, exactly as predicted. We put them in so nobody has to take our word that the fault set was fair.
-This is the strongest slide in the talk. Take your time on it.</a:t>
+              <a:t>NOT ON SLIDE: 215 faults, eight kinds, injected into testbenches that already passed. The checker localises to the right signal as well as the right class, not just “something is wrong”.
+IF ASKED how we know the injected faults were legal Verilog: an injector that produced a syntax error would score as the compiler catching a fault the injector itself created. Mutations must produce legal code, and injectors that cannot mutate cleanly decline — those cases are excluded from the denominator.
+This is the strongest slide in the talk. Take your time.</a:t>
             </a:r>
             <a:endParaRPr lang="en-US" dirty="0"/>
           </a:p>
@@ -1711,11 +1696,8 @@
           <a:p>
             <a:r>
               <a:rPr lang="en-US" dirty="0"/>
-              <a:t>SAY: All three scores side by side with theirs.
-Eval0, does it compile — level. 92.5 against their 95.7, and our strong model alone reaches 98.7.
-Eval1, does it actually work — 31 against their 51. But their 51 is across all circuits; on clocked circuits, which is what ours mostly are, they report 37. Comparable.
-Eval2 — careful with this row. Ours says 95, theirs says 44.8, and that looks like we win by miles. We do not. They measure something different: a problem only counts as passed if the testbench agrees with a reference testbench on 80 percent of the broken copies. Apply their rule to us and we get 20 percent against their 26 on clocked circuits. At twenty circuits that establishes no ranking either way.
-IF ASKED why our 95 is so high: our own circuits are too small for a bug to hide in, and we tested that rather than assuming it.</a:t>
+              <a:t>NOT ON SLIDE — the pilot behind the Eval2 claim was pre-registered: we wrote down the criteria before generating anything. Better broken copies moved the score one point; different circuits moved it forty-four.
+IF ASKED about sample size: 20 circuits, so the interval on that 20% runs roughly 8 to 42 percent. Their 26 sits inside it. No ranking is established in either direction, and I would not claim one.</a:t>
             </a:r>
             <a:endParaRPr lang="en-US" dirty="0"/>
           </a:p>
@@ -1803,12 +1785,9 @@
           <a:p>
             <a:r>
               <a:rPr lang="en-US" dirty="0"/>
-              <a:t>SAY: We ran the same pipeline five ways. The only thing that changes is when it is allowed to try again.
-Our full version gets 18 circuits out of 44. The plain one gets 12. Six better, looks like a clear win.
-But the fair comparison is against the blind retry — the control — which gets 13. So five, not six.
-AND NOW THE IMPORTANT BIT: look at the bottom pair of that comparison list. Those two settings never actually repaired anything, because our checker never fired. So they ran effectively identical logic. They still came out three circuits apart.
-That means three circuits of difference happens by pure luck. A five-circuit lead against a three-circuit noise floor is not a result, and we report it as not significant rather than claiming the win.
-Building that control is what caught our own overclaim. It is the part of this project I am most confident about.</a:t>
+              <a:t>NOT ON SLIDE: 44 is 12 of our circuits on the strong model, the same 12 on the weak one, and 20 benchmark circuits — so 44 runs per setting, 220 in these three sweeps.
+The statistics: ours versus the control is McNemar p = 0.372. The control versus plain is p = 1.000, which is the useful one — a blind extra attempt is worth nothing, so any real gain has to sit on the diagnosis.
+IF ASKED about the noise floor: those two settings ran identical logic because our checker never fired, and still landed three circuits apart. That is the measurement.</a:t>
             </a:r>
             <a:endParaRPr lang="en-US" dirty="0"/>
           </a:p>
@@ -1896,12 +1875,9 @@
           <a:p>
             <a:r>
               <a:rPr lang="en-US" dirty="0"/>
-              <a:t>SAY: This is the central finding, and I want to state it plainly.
-Across 280 runs, our layer triggered exactly one repair. Simulation triggered 79. The compiler triggered 10. And the setting that isolates our checker on its own repaired zero times in 44 runs.
-DO NOT APOLOGISE HERE. Deliver it as a discovery:
-This is not a broken tool. The previous slide showed it catches everything it was built for, with no false alarms. The mistakes it looks for have simply become rare in what current models produce.
-We could only establish that because we measured the tool separately from the pipeline. Without that, this would just look like something that did not work.
-IF ASKED whether our full version's lead proves the checker helps: no, and I would not claim it. That setting is also the only one that gets simulation feedback, which drove almost all the repairs. We cannot separate the two, and that is in the report.</a:t>
+              <a:t>DISCLOSE THIS BEFORE THEY FIND IT: our full version is also the only setting that can act on simulation feedback, which drove 79 of the 90 informed repairs. So its lead cannot be credited to our checker, and there is no simulation-only arm to separate them. That is a gap in our design and it is in the report. Volunteering it reads as confidence; being caught on it does not.
+NOT ON SLIDE: 102 runs attempted a repair and 26 succeeded, about one in four.
+Do not apologise here. It is a discovery, not a failure.</a:t>
             </a:r>
             <a:endParaRPr lang="en-US" dirty="0"/>
           </a:p>
@@ -1989,13 +1965,8 @@
           <a:p>
             <a:r>
               <a:rPr lang="en-US" dirty="0"/>
-              <a:t>SAY: So why did the mistakes disappear? I want to separate what we measured from what we think explains it.
-WHAT WE MEASURED: 87 percent of the failures we see are about meaning, not structure. And our checker fired once in 280 runs.
-WHAT WE THINK EXPLAINS IT — interpretation, not measurement: structural correctness is local and repetitive. A port list, a signal width, wiring up an instance — those exact shapes appear in millions of code examples, so getting them right is pattern matching, and that is what these models became very good at.
-Meaning is different. To know a counter should read 8 rather than 7 you have to work out what the circuit does over several clock cycles. That is reasoning about behaviour over time, and it is much harder.
-So model progress solved the pattern half and left the reasoning half — and our tool was built for the pattern half.
-THE EVIDENCE IT IS THE MODELS AND NOT US — point at the table: AutoBench had the same kind of cleanup step and it was their biggest single win, worth 42 points. On the 182 runs where ours never fired at all we still compile at 90.7 percent, against their 55.5 without theirs.
-BE HONEST IF PUSHED: the measurements are solid. The explanation is a reasonable reading of them, not something we ran an experiment on.</a:t>
+              <a:t>BE EXPLICIT ABOUT THE BOUNDARY: the measurements are solid — 87% of failures are semantic, the checker fired once. The explanation on the left and right is a reasonable reading of that, not something we ran an experiment on. Say so if pushed; it costs nothing and being caught overclaiming costs a lot.
+IF ASKED what would bring structural faults back: larger designs, or smaller and older models. Both are untested and both are in future work.</a:t>
             </a:r>
             <a:endParaRPr lang="en-US" dirty="0"/>
           </a:p>
@@ -2083,12 +2054,8 @@
           <a:p>
             <a:r>
               <a:rPr lang="en-US" dirty="0"/>
-              <a:t>SAY: Question four was cost. This is the answer.
-Our full version buys the best score, at fifty percent more tokens and fifty percent more time — and as we saw, not significantly better than the control.
-The value winner is compiler feedback: seven points for six percent more tokens. If you only do one thing, do that.
-And our own layer costs essentially nothing — it is deterministic, milliseconds, no model call. It is actually slightly cheaper than doing nothing, because we skip the reasoning step when the report comes back clean.
-So the cost answer is nuanced: our layer is nearly free and nearly useless against current models. Those are not in tension — free means there is little reason to remove it, in case a weaker or older model is the one generating.
-The whole project cost about sixteen dollars fifty.</a:t>
+              <a:t>NOT ON SLIDE: per run at the strong tier it is about 7 cents for plain, 10 for ours, 11 for the control.
+THE NUANCE WORTH SAYING: our layer is nearly free and nearly useless against current models. Those are not in tension — free means there is little reason to remove it, in case a weaker or older model is the one generating.</a:t>
             </a:r>
             <a:endParaRPr lang="en-US" dirty="0"/>
           </a:p>
@@ -2176,12 +2143,7 @@
           <a:p>
             <a:r>
               <a:rPr lang="en-US" dirty="0"/>
-              <a:t>SAY: Back to the four questions.
-One — what mistakes, and which are findable without running. Six kinds, and we now know 87 percent of real failures are about meaning rather than structure.
-Two — how far can reading the code narrow them down. Completely, for what it targets. Every class it was built for, no false alarms.
-Three — can the AI repair itself from that diagnosis. Rarely, because the diagnosis almost never fires. Simulation feedback does essentially all the repair work. That is a negative answer and it is the most interesting thing in the project.
-Four — cost. Our layer is nearly free; compiler feedback is the best value.
-All four answered. One negatively — and a negative answer with a validated instrument behind it is worth more than a positive one without.</a:t>
+              <a:t>Keep this quick — they have seen all four answers already. The line that matters is the last one: a negative answer with a validated instrument behind it is worth more than a positive one without.</a:t>
             </a:r>
             <a:endParaRPr lang="en-US" dirty="0"/>
           </a:p>
@@ -2269,10 +2231,8 @@
           <a:p>
             <a:r>
               <a:rPr lang="en-US" dirty="0"/>
-              <a:t>SAY: Four things this project contributes.
-A working pipeline, open source, with every AI call recorded. A checker we actually measured rather than asserted. A control group the prior work does not have — which changed our own conclusion. And a finding about the field: the mistake behind prior work's biggest win has largely stopped happening.
-READ THE BOTTOM LINE OUT: we built the tool, showed that it works, and showed that it is not needed much any more. Only the second half of that was a surprise.
-IF ASKED whether the project succeeded: yes, and I would put it precisely. We set out to find whether you can localise testbench errors before simulation. You can — completely, for the faults it targets, including ones nothing else sees. But against current models there is not much left to find. We can say that with confidence rather than as a guess, because we validated the tool separately and ran a control group. A measured negative is worth more than an unmeasured positive.</a:t>
+              <a:t>IF ASKED whether the project succeeded, the precise answer: we set out to find whether you can localise testbench errors before simulation. You can — completely, for the faults it targets, including ones nothing else sees. But against current models there is little left to find. We can say that with confidence rather than as a guess, because we validated the tool separately and ran a control group.
+IF ASKED what you would do differently: run a simulation-only arm to separate the two feedback sources, and use bigger circuits so the broken-copy score discriminates.</a:t>
             </a:r>
             <a:endParaRPr lang="en-US" dirty="0"/>
           </a:p>
@@ -2453,9 +2413,8 @@
           <a:p>
             <a:r>
               <a:rPr lang="en-US" dirty="0"/>
-              <a:t>SAY: Verification is about sixty percent of the effort in chip design. AI can write these test programmes now, but they are often valid code that tests the wrong thing — and the only way to find out is to run a full simulation.
-THEN THE BOX, SLOWLY: if a testbench stops checking one of the outputs, running it PASSES. It is not looking any more. So simulation can never find that particular mistake. That is the gap this project goes after.
-This one sentence is the reason the whole project exists. Pause after it.</a:t>
+              <a:t>Source for the 60%: Foster 2022, the Wilson Research industry survey.
+PAUSE after the box. That one sentence is the reason the whole project exists, and the rest of the talk only makes sense if it lands.</a:t>
             </a:r>
             <a:endParaRPr lang="en-US" dirty="0"/>
           </a:p>
@@ -2543,12 +2502,7 @@
           <a:p>
             <a:r>
               <a:rPr lang="en-US" dirty="0"/>
-              <a:t>SAY: Four questions drive the project.
-One — what kinds of mistake does an AI actually make, and which can you find without running anything?
-Two — how far can reading the code narrow a mistake down?
-Three — can the AI use that diagnosis to fix itself, and is it better than just letting the compiler tell it?
-Four — what does it cost, and is it worth it?
-I come back to all four at the end with the answers. Do not answer them now — just plant them. Thirty seconds.</a:t>
+              <a:t>Thirty seconds. Plant them, do not answer them — the answers get their own slide at the end, and the payoff depends on them not being spoiled here.</a:t>
             </a:r>
             <a:endParaRPr lang="en-US" dirty="0"/>
           </a:p>
@@ -2636,10 +2590,8 @@
           <a:p>
             <a:r>
               <a:rPr lang="en-US" dirty="0"/>
-              <a:t>SAY: This builds directly on a 2024 paper called AutoBench. They built a six-stage AI pipeline that writes testbenches, and it works reasonably well.
-Two things they do not do. First, they never actually read the Verilog they produce — their error detection is text search and compiler messages. Second, they have no control group, and I will come back to why that matters.
-Those two gaps are exactly what this project adds.
-IF ASKED why build on AutoBench: it is the closest prior work on this exact task and it uses the standard benchmark, so our numbers sit on the same ground as theirs.</a:t>
+              <a:t>IF ASKED why build on AutoBench: it is the closest prior work on this exact task and it uses the standard benchmark, so our numbers sit on the same ground as theirs.
+NOT ON SLIDE: they ran 156 circuits with GPT-4-turbo. We run a 20-circuit subset of the same benchmark, chosen as the hardest fifth, plus 12 of our own.</a:t>
             </a:r>
             <a:endParaRPr lang="en-US" dirty="0"/>
           </a:p>
@@ -2727,9 +2679,8 @@
           <a:p>
             <a:r>
               <a:rPr lang="en-US" dirty="0"/>
-              <a:t>SAY: Here is the whole thing. On the left is AutoBench's design; on the right is ours. Most of it is theirs and I want to be clear about that — the four highlighted boxes are what we added.
-Do not read the boxes out. Point at the four blue ones, then move on. The next thirteen slides cover them one at a time.
-TIMING: leave this slide by 4:30.</a:t>
+              <a:t>Do not read the boxes out. Point at the four blue ones and move. Leave by 5:00.
+NOT ON SLIDE — mention it, it shows you read the paper properly: they have one thing we do not. They check that every scenario they planned actually made it into the generated testbench, retrying up to three times. We have no equivalent, and it is in our future work.</a:t>
             </a:r>
             <a:endParaRPr lang="en-US" dirty="0"/>
           </a:p>
@@ -2817,10 +2768,9 @@
           <a:p>
             <a:r>
               <a:rPr lang="en-US" dirty="0"/>
-              <a:t>SAY: The first step just sorts the circuit into one of two kinds. Does it remember anything, or not? A calculator does not — two plus three is five, always. A counter does — the answer depends on how many times you pressed the button.
-This matters because everything downstream changes depending on the answer.
-We use the cheap model here — it is a yes-or-no question from a paragraph of English, so paying for the expensive one would be waste.
-IF ASKED how AutoBench does it: they get the AI to write a sample of the circuit and then text-search it for a clock. We just ask the model directly.</a:t>
+              <a:t>Cheap model — a yes/no question from a paragraph does not need the expensive one.
+NOT ON SLIDE: AutoBench does this differently — they have the AI write a sample of the circuit, then text-search it for a clock. We just ask the model.
+IF ASKED how often it is wrong: we never traced a failure back to a wrong answer here. It is the easy part of the problem.</a:t>
             </a:r>
             <a:endParaRPr lang="en-US" dirty="0"/>
           </a:p>
@@ -2908,10 +2858,9 @@
           <a:p>
             <a:r>
               <a:rPr lang="en-US" dirty="0"/>
-              <a:t>SAY: This is the first thing that is ours — AutoBench never generates the design, only the test.
-Why do it? Two reasons. It is the realistic flow. And it keeps marking honest: if the AI could see the correct circuit while writing the test, it could just copy the answers. So the correct circuit stays locked away until the very end.
-THE ISSUE, SAY IT HERE: there is a consequence. For most of the pipeline we are working with the AI's own version of the circuit, and only at marking do we swap in the real one. So two versions are in play. We measured how far apart they get — 273 of 280 match exactly. The seven that do not are all one circuit, where the AI added a clock and reset pin that the real design does not have.
-IF PUSHED: that comparison is on the pin interface, not on behaviour — we did not run an equivalence check. And the one circuit where it went wrong is the same one that shows up later in the repair story, so it is a single known case, not a pattern.</a:t>
+              <a:t>SAY OUT LOUD, it is not on the slide: for most of the pipeline we work with the AI's own version of the circuit, and only swap in the real one at marking. Two versions in play. We measured how far apart they get.
+IF PUSHED: the 273/280 is the pin interface only — no equivalence check was run, so it bounds the structural side and says nothing about behaviour. The seven exceptions are all Prob150, under both models and all five settings, so it is that problem's description and not sampling noise. All seven fail Eval1 anyway.
+IF ASKED why AutoBench does not do this: they argue mixing the two makes it impossible to tell a bad test from a bad design. Fair — our answer is the golden circuit at marking.</a:t>
             </a:r>
             <a:endParaRPr lang="en-US" dirty="0"/>
           </a:p>
@@ -2999,9 +2948,9 @@
           <a:p>
             <a:r>
               <a:rPr lang="en-US" dirty="0"/>
-              <a:t>SAY: This one turns the English description into a structured checklist — the pin names, the widths, the timing.
-Why bother? Because later steps ask what pins exist dozens of times, and if you re-read English prose every time, the AI can answer slightly differently each time. Pin it down once and everything downstream agrees.
-This one is straight out of AutoBench. Keep it quick — nothing interesting happened here and that is worth saying plainly.</a:t>
+              <a:t>Straight out of AutoBench — their Stage 1. Nothing interesting happened here, and saying that plainly is better than padding it.
+Thirty seconds. Move.
+IF ASKED why not just re-read the description each time: the AI answers slightly differently each time it reads prose. Pinning it down once means every later step agrees.</a:t>
             </a:r>
             <a:endParaRPr lang="en-US" dirty="0"/>
           </a:p>

--- a/docs/presentation.pptx
+++ b/docs/presentation.pptx
@@ -799,8 +799,10 @@
           <a:p>
             <a:r>
               <a:rPr lang="en-US" dirty="0"/>
-              <a:t>NOT ON SLIDE — how this differs from AutoBench. Theirs is a bigger split: their Verilog only drives the circuit and dumps to a text file, and Python does all the judging. Ours is self-checking — the Verilog decides PASS or FAIL itself.
-Ours is simpler and closer to what engineers write. Theirs separates the stimulus from the checking, which in principle allows more thorough checking. We did not test which is better, and I would say so.</a:t>
+              <a:t>BE STRAIGHT ABOUT THIS ONE — it is in the code and an examiner could find it. The generated checker is written, stored in every result record, and never executed. Evaluation parses the PASS and FAIL lines with a hand-written function, not this.
+WHY IT IS STILL THERE: we took the two-track design from AutoBench, then made the testbench self-checking, which made the Python track redundant. We left it in rather than remove it.
+IF ASKED which design is better: theirs separates the stimulus from the checking, which in principle allows more thorough checking; ours is simpler and closer to what engineers write. We did not test which is better, and I would not guess.
+IF ASKED why they run in parallel: both read the same inputs and neither needs the other's output, so overlapping them saves wall-clock time. Nothing is running at this point — both steps are writing files.</a:t>
             </a:r>
             <a:endParaRPr lang="en-US" dirty="0"/>
           </a:p>
@@ -7385,7 +7387,7 @@
                 <a:ea typeface="Calibri" pitchFamily="34" charset="-122"/>
                 <a:cs typeface="Calibri" pitchFamily="34" charset="-120"/>
               </a:rPr>
-              <a:t>A second opinion, in Python</a:t>
+              <a:t>A Python checker — inherited, and unused</a:t>
             </a:r>
             <a:endParaRPr lang="en-US" sz="1600" dirty="0"/>
           </a:p>
@@ -7500,7 +7502,7 @@
                 <a:ea typeface="Calibri" pitchFamily="34" charset="-122"/>
                 <a:cs typeface="Calibri" pitchFamily="34" charset="-120"/>
               </a:rPr>
-              <a:t>Writes a small Python programme that can read the testbench's output and decide pass or fail independently.</a:t>
+              <a:t>Reads the same spec and scenarios as the previous step and writes a small Python programme that could read the testbench's output and decide pass or fail.</a:t>
             </a:r>
             <a:endParaRPr lang="en-US" sz="1350" dirty="0"/>
           </a:p>
@@ -7615,7 +7617,7 @@
                 <a:ea typeface="Calibri" pitchFamily="34" charset="-122"/>
                 <a:cs typeface="Calibri" pitchFamily="34" charset="-120"/>
               </a:rPr>
-              <a:t>It separates deciding the verdict from producing the output — a second, independent way to judge the same run.</a:t>
+              <a:t>AutoBench splits the work this way: their Verilog only drives the circuit and dumps what it sees, and Python does all the judging. We copied the structure — then made our testbench judge itself, which left this track with nothing to do.</a:t>
             </a:r>
             <a:endParaRPr lang="en-US" sz="1350" dirty="0"/>
           </a:p>
@@ -7727,7 +7729,7 @@
                 <a:ea typeface="Calibri" pitchFamily="34" charset="-122"/>
                 <a:cs typeface="Calibri" pitchFamily="34" charset="-120"/>
               </a:rPr>
-              <a:t>the output it reads — one line per scenario</a:t>
+              <a:t>it runs beside gen_driver, not after it — neither needs the other</a:t>
             </a:r>
             <a:endParaRPr lang="en-US" sz="1150" dirty="0"/>
           </a:p>
@@ -7769,7 +7771,7 @@
                 <a:ea typeface="Courier New" pitchFamily="34" charset="-122"/>
                 <a:cs typeface="Courier New" pitchFamily="34" charset="-120"/>
               </a:rPr>
-              <a:t>FAIL: normal_increment</a:t>
+              <a:t>spec + scenarios</a:t>
             </a:r>
             <a:endParaRPr lang="en-US" sz="1400" dirty="0"/>
           </a:p>
@@ -7789,7 +7791,7 @@
                 <a:ea typeface="Courier New" pitchFamily="34" charset="-122"/>
                 <a:cs typeface="Courier New" pitchFamily="34" charset="-120"/>
               </a:rPr>
-              <a:t>PASS: reset_to_zero</a:t>
+              <a:t>      ├─→  gen_driver   →  testbench.v</a:t>
             </a:r>
             <a:endParaRPr lang="en-US" sz="1400" dirty="0"/>
           </a:p>
@@ -7809,27 +7811,7 @@
                 <a:ea typeface="Courier New" pitchFamily="34" charset="-122"/>
                 <a:cs typeface="Courier New" pitchFamily="34" charset="-120"/>
               </a:rPr>
-              <a:t>PASS: wrap_around</a:t>
-            </a:r>
-            <a:endParaRPr lang="en-US" sz="1400" dirty="0"/>
-          </a:p>
-          <a:p>
-            <a:pPr indent="0" marL="0">
-              <a:lnSpc>
-                <a:spcPct val="128000"/>
-              </a:lnSpc>
-              <a:buNone/>
-            </a:pPr>
-            <a:r>
-              <a:rPr lang="en-US" sz="1400" dirty="0">
-                <a:solidFill>
-                  <a:srgbClr val="0B0B0B"/>
-                </a:solidFill>
-                <a:latin typeface="Courier New" pitchFamily="34" charset="0"/>
-                <a:ea typeface="Courier New" pitchFamily="34" charset="-122"/>
-                <a:cs typeface="Courier New" pitchFamily="34" charset="-120"/>
-              </a:rPr>
-              <a:t>FAIL: increment_from_zero_to_five</a:t>
+              <a:t>      └─→  gen_checker  →  checker.py</a:t>
             </a:r>
             <a:endParaRPr lang="en-US" sz="1400" dirty="0"/>
           </a:p>
@@ -7933,7 +7915,7 @@
               <a:buNone/>
             </a:pPr>
             <a:r>
-              <a:rPr lang="en-US" sz="2100" b="1" dirty="0">
+              <a:rPr lang="en-US" sz="3100" b="1" dirty="0">
                 <a:solidFill>
                   <a:srgbClr val="0B0B0B"/>
                 </a:solidFill>
@@ -7941,9 +7923,9 @@
                 <a:ea typeface="Cambria" pitchFamily="34" charset="-122"/>
                 <a:cs typeface="Cambria" pitchFamily="34" charset="-120"/>
               </a:rPr>
-              <a:t>runs in parallel</a:t>
+              <a:t>never run</a:t>
             </a:r>
-            <a:endParaRPr lang="en-US" sz="2100" dirty="0"/>
+            <a:endParaRPr lang="en-US" sz="3100" dirty="0"/>
           </a:p>
         </p:txBody>
       </p:sp>
@@ -7983,7 +7965,7 @@
                 <a:ea typeface="Calibri" pitchFamily="34" charset="-122"/>
                 <a:cs typeface="Calibri" pitchFamily="34" charset="-120"/>
               </a:rPr>
-              <a:t>alongside the testbench —</a:t>
+              <a:t>the generated checker is stored</a:t>
             </a:r>
             <a:endParaRPr lang="en-US" sz="1250" dirty="0"/>
           </a:p>
@@ -8003,7 +7985,7 @@
                 <a:ea typeface="Calibri" pitchFamily="34" charset="-122"/>
                 <a:cs typeface="Calibri" pitchFamily="34" charset="-120"/>
               </a:rPr>
-              <a:t>neither waits for the other</a:t>
+              <a:t>with each run and not executed</a:t>
             </a:r>
             <a:endParaRPr lang="en-US" sz="1250" dirty="0"/>
           </a:p>
@@ -8045,7 +8027,7 @@
                 <a:ea typeface="Calibri" pitchFamily="34" charset="-122"/>
                 <a:cs typeface="Calibri" pitchFamily="34" charset="-120"/>
               </a:rPr>
-              <a:t>Ours does less work than AutoBench's, because our testbench already judges itself.</a:t>
+              <a:t>Our testbench decides PASS or FAIL itself, so evaluation reads those lines directly. We report this as dead weight rather than a second opinion.</a:t>
             </a:r>
             <a:endParaRPr lang="en-US" sz="1300" dirty="0"/>
           </a:p>

--- a/docs/presentation.pptx
+++ b/docs/presentation.pptx
@@ -799,10 +799,10 @@
           <a:p>
             <a:r>
               <a:rPr lang="en-US" dirty="0"/>
-              <a:t>BE STRAIGHT ABOUT THIS ONE — it is in the code and an examiner could find it. The generated checker is written, stored in every result record, and never executed. Evaluation parses the PASS and FAIL lines with a hand-written function, not this.
-WHY IT IS STILL THERE: we took the two-track design from AutoBench, then made the testbench self-checking, which made the Python track redundant. We left it in rather than remove it.
-IF ASKED which design is better: theirs separates the stimulus from the checking, which in principle allows more thorough checking; ours is simpler and closer to what engineers write. We did not test which is better, and I would not guess.
-IF ASKED why they run in parallel: both read the same inputs and neither needs the other's output, so overlapping them saves wall-clock time. Nothing is running at this point — both steps are writing files.</a:t>
+              <a:t>Thirty seconds. Nothing here produced a finding.
+NOT ON SLIDE — how this differs from AutoBench, worth one sentence: theirs is a bigger split. Their Verilog only drives the circuit and dumps what it sees to a text file, and Python does the judging. Ours is self-checking — the Verilog prints PASS or FAIL itself.
+Ours is simpler and closer to what engineers actually write. Theirs separates the stimulus from the checking, which in principle allows more thorough checking. We did not test which is better and I would not guess.
+IF ASKED why the two run in parallel: both read the same inputs and neither needs the other's output. Nothing is executing at this point — both steps are writing files.</a:t>
             </a:r>
             <a:endParaRPr lang="en-US" dirty="0"/>
           </a:p>
@@ -7387,7 +7387,7 @@
                 <a:ea typeface="Calibri" pitchFamily="34" charset="-122"/>
                 <a:cs typeface="Calibri" pitchFamily="34" charset="-120"/>
               </a:rPr>
-              <a:t>A Python checker — inherited, and unused</a:t>
+              <a:t>A Python checker, written alongside</a:t>
             </a:r>
             <a:endParaRPr lang="en-US" sz="1600" dirty="0"/>
           </a:p>
@@ -7502,7 +7502,7 @@
                 <a:ea typeface="Calibri" pitchFamily="34" charset="-122"/>
                 <a:cs typeface="Calibri" pitchFamily="34" charset="-120"/>
               </a:rPr>
-              <a:t>Reads the same spec and scenarios as the previous step and writes a small Python programme that could read the testbench's output and decide pass or fail.</a:t>
+              <a:t>Reads the same spec and scenarios as the previous step and writes a small Python programme for reading a testbench's output and deciding pass or fail.</a:t>
             </a:r>
             <a:endParaRPr lang="en-US" sz="1350" dirty="0"/>
           </a:p>
@@ -7617,7 +7617,7 @@
                 <a:ea typeface="Calibri" pitchFamily="34" charset="-122"/>
                 <a:cs typeface="Calibri" pitchFamily="34" charset="-120"/>
               </a:rPr>
-              <a:t>AutoBench splits the work this way: their Verilog only drives the circuit and dumps what it sees, and Python does all the judging. We copied the structure — then made our testbench judge itself, which left this track with nothing to do.</a:t>
+              <a:t>It comes from AutoBench's structure, where the Verilog drives the circuit and Python judges the result. It needs nothing from the testbench, so the two are generated at the same time.</a:t>
             </a:r>
             <a:endParaRPr lang="en-US" sz="1350" dirty="0"/>
           </a:p>
@@ -7923,7 +7923,7 @@
                 <a:ea typeface="Cambria" pitchFamily="34" charset="-122"/>
                 <a:cs typeface="Cambria" pitchFamily="34" charset="-120"/>
               </a:rPr>
-              <a:t>never run</a:t>
+              <a:t>in parallel</a:t>
             </a:r>
             <a:endParaRPr lang="en-US" sz="3100" dirty="0"/>
           </a:p>
@@ -7965,7 +7965,7 @@
                 <a:ea typeface="Calibri" pitchFamily="34" charset="-122"/>
                 <a:cs typeface="Calibri" pitchFamily="34" charset="-120"/>
               </a:rPr>
-              <a:t>the generated checker is stored</a:t>
+              <a:t>generated alongside the testbench,</a:t>
             </a:r>
             <a:endParaRPr lang="en-US" sz="1250" dirty="0"/>
           </a:p>
@@ -7985,7 +7985,7 @@
                 <a:ea typeface="Calibri" pitchFamily="34" charset="-122"/>
                 <a:cs typeface="Calibri" pitchFamily="34" charset="-120"/>
               </a:rPr>
-              <a:t>with each run and not executed</a:t>
+              <a:t>not after it</a:t>
             </a:r>
             <a:endParaRPr lang="en-US" sz="1250" dirty="0"/>
           </a:p>
@@ -8027,7 +8027,7 @@
                 <a:ea typeface="Calibri" pitchFamily="34" charset="-122"/>
                 <a:cs typeface="Calibri" pitchFamily="34" charset="-120"/>
               </a:rPr>
-              <a:t>Our testbench decides PASS or FAIL itself, so evaluation reads those lines directly. We report this as dead weight rather than a second opinion.</a:t>
+              <a:t>Ours carries less of the load than AutoBench's, because our testbench prints its own PASS and FAIL verdicts.</a:t>
             </a:r>
             <a:endParaRPr lang="en-US" sz="1300" dirty="0"/>
           </a:p>

--- a/docs/presentation.pptx
+++ b/docs/presentation.pptx
@@ -1071,7 +1071,10 @@
             <a:r>
               <a:rPr lang="en-US" dirty="0"/>
               <a:t>Do NOT give the performance number here — the results slide has it. Set it up and move.
-IF ASKED about coverage: the parser could only read 262 of 434 files. The rest use newer SystemVerilog syntax it does not support and fall back to a second parser that only checks validity. Real limitation, in the report. Worse, those unreadable files are not a random sample — they fail Eval1 far more often, so our result is measured on the healthier half.
+THE TWO BOLD ROWS carry the argument. unobserved_output and missing_fdisplay are the ones nothing else can catch.
+WHAT THIS DOES NOT DO — worth being clear if asked: it is not part of Eval0, 1 or 2. It runs before any of them, before anything is compiled or simulated. That earliness is the whole point — “early error localisation” in the title.
+THE INFERENCE WORTH DRAWING, and it is the cleanest way to put the whole project: the checker detects 100% of these six in a controlled test, and in 280 real runs it found almost nothing. Both things being true means the real testbenches did not contain these mistakes. That is a statement about what current models produce, not about whether our tool works.
+IF ASKED about coverage: the parser could only read 262 of 434 files. The rest use newer SystemVerilog syntax it does not support and fall back to a second parser that only checks validity. Real limitation, in the report. Worse, those unreadable files fail Eval1 far more often, so our result is measured on the healthier half.
 IF ASKED whether we tuned the checks to flatter ourselves: we built seven and deleted one. It caught none of the five faults it was built for and raised the only false alarm on a correct testbench, so we removed it rather than patch it.</a:t>
             </a:r>
             <a:endParaRPr lang="en-US" dirty="0"/>
@@ -10931,7 +10934,7 @@
                 <a:ea typeface="Calibri" pitchFamily="34" charset="-122"/>
                 <a:cs typeface="Calibri" pitchFamily="34" charset="-120"/>
               </a:rPr>
-              <a:t>Parses the testbench and the circuit into a structure — not text — and runs six checks looking for mistakes. No simulation.</a:t>
+              <a:t>Parses the testbench and the circuit into a structure — not text — and runs six checks looking for mistakes. Nothing is simulated.</a:t>
             </a:r>
             <a:endParaRPr lang="en-US" sz="1350" dirty="0"/>
           </a:p>
@@ -11046,7 +11049,7 @@
                 <a:ea typeface="Calibri" pitchFamily="34" charset="-122"/>
                 <a:cs typeface="Calibri" pitchFamily="34" charset="-120"/>
               </a:rPr>
-              <a:t>Two of the six catch faults that nothing else can see: an output nobody checks, and a sequential output that is never printed. If the testbench stops looking, running it passes.</a:t>
+              <a:t>Two of the six catch faults that nothing else can see: an output nobody checks, and a clocked output that is never printed. If the testbench stops looking, running it passes.</a:t>
             </a:r>
             <a:endParaRPr lang="en-US" sz="1350" dirty="0"/>
           </a:p>
@@ -11158,7 +11161,7 @@
                 <a:ea typeface="Calibri" pitchFamily="34" charset="-122"/>
                 <a:cs typeface="Calibri" pitchFamily="34" charset="-120"/>
               </a:rPr>
-              <a:t>a real finding — Prob150, where the AI invented a clock pin</a:t>
+              <a:t>the six checks, and what each one catches</a:t>
             </a:r>
             <a:endParaRPr lang="en-US" sz="1150" dirty="0"/>
           </a:p>
@@ -11208,7 +11211,7 @@
                           <a:ea typeface="Calibri" pitchFamily="34" charset="-122"/>
                           <a:cs typeface="Calibri" pitchFamily="34" charset="-120"/>
                         </a:rPr>
-                        <a:t>field</a:t>
+                        <a:t>check</a:t>
                       </a:r>
                       <a:endParaRPr lang="en-US" sz="1250" dirty="0">
                         <a:latin typeface="Calibri" charset="0"/>
@@ -11276,7 +11279,7 @@
                           <a:ea typeface="Calibri" pitchFamily="34" charset="-122"/>
                           <a:cs typeface="Calibri" pitchFamily="34" charset="-120"/>
                         </a:rPr>
-                        <a:t>value</a:t>
+                        <a:t>catches</a:t>
                       </a:r>
                       <a:endParaRPr lang="en-US" sz="1250" dirty="0">
                         <a:latin typeface="Calibri" charset="0"/>
@@ -11329,74 +11332,6 @@
                 </a:tc>
               </a:tr>
               <a:tr h="246888">
-                <a:tc>
-                  <a:txBody>
-                    <a:bodyPr/>
-                    <a:lstStyle/>
-                    <a:p>
-                      <a:pPr indent="0" marL="0">
-                        <a:buNone/>
-                      </a:pPr>
-                      <a:r>
-                        <a:rPr lang="en-US" sz="1250" dirty="0">
-                          <a:solidFill>
-                            <a:srgbClr val="0B0B0B"/>
-                          </a:solidFill>
-                          <a:latin typeface="Calibri" pitchFamily="34" charset="0"/>
-                          <a:ea typeface="Calibri" pitchFamily="34" charset="-122"/>
-                          <a:cs typeface="Calibri" pitchFamily="34" charset="-120"/>
-                        </a:rPr>
-                        <a:t>error_type</a:t>
-                      </a:r>
-                      <a:endParaRPr lang="en-US" sz="1250" dirty="0">
-                        <a:latin typeface="Calibri" charset="0"/>
-                        <a:ea typeface="Calibri" charset="0"/>
-                        <a:cs typeface="Calibri" charset="0"/>
-                      </a:endParaRPr>
-                    </a:p>
-                  </a:txBody>
-                  <a:tcPr marL="50800" marR="50800" marT="50800" marB="50800" anchor="ctr">
-                    <a:lnL w="12700" cap="flat" cmpd="sng" algn="ctr">
-                      <a:solidFill>
-                        <a:srgbClr val="E2E1DC"/>
-                      </a:solidFill>
-                      <a:prstDash val="solid"/>
-                      <a:round/>
-                      <a:headEnd type="none" w="med" len="med"/>
-                      <a:tailEnd type="none" w="med" len="med"/>
-                    </a:lnL>
-                    <a:lnR w="12700" cap="flat" cmpd="sng" algn="ctr">
-                      <a:solidFill>
-                        <a:srgbClr val="E2E1DC"/>
-                      </a:solidFill>
-                      <a:prstDash val="solid"/>
-                      <a:round/>
-                      <a:headEnd type="none" w="med" len="med"/>
-                      <a:tailEnd type="none" w="med" len="med"/>
-                    </a:lnR>
-                    <a:lnT w="12700" cap="flat" cmpd="sng" algn="ctr">
-                      <a:solidFill>
-                        <a:srgbClr val="E2E1DC"/>
-                      </a:solidFill>
-                      <a:prstDash val="solid"/>
-                      <a:round/>
-                      <a:headEnd type="none" w="med" len="med"/>
-                      <a:tailEnd type="none" w="med" len="med"/>
-                    </a:lnT>
-                    <a:lnB w="12700" cap="flat" cmpd="sng" algn="ctr">
-                      <a:solidFill>
-                        <a:srgbClr val="E2E1DC"/>
-                      </a:solidFill>
-                      <a:prstDash val="solid"/>
-                      <a:round/>
-                      <a:headEnd type="none" w="med" len="med"/>
-                      <a:tailEnd type="none" w="med" len="med"/>
-                    </a:lnB>
-                    <a:solidFill>
-                      <a:srgbClr val="FFFFFF"/>
-                    </a:solidFill>
-                  </a:tcPr>
-                </a:tc>
                 <a:tc>
                   <a:txBody>
                     <a:bodyPr/>
@@ -11465,8 +11400,6 @@
                     </a:solidFill>
                   </a:tcPr>
                 </a:tc>
-              </a:tr>
-              <a:tr h="246888">
                 <a:tc>
                   <a:txBody>
                     <a:bodyPr/>
@@ -11484,75 +11417,7 @@
                           <a:ea typeface="Calibri" pitchFamily="34" charset="-122"/>
                           <a:cs typeface="Calibri" pitchFamily="34" charset="-120"/>
                         </a:rPr>
-                        <a:t>affected_signal</a:t>
-                      </a:r>
-                      <a:endParaRPr lang="en-US" sz="1250" dirty="0">
-                        <a:latin typeface="Calibri" charset="0"/>
-                        <a:ea typeface="Calibri" charset="0"/>
-                        <a:cs typeface="Calibri" charset="0"/>
-                      </a:endParaRPr>
-                    </a:p>
-                  </a:txBody>
-                  <a:tcPr marL="50800" marR="50800" marT="50800" marB="50800" anchor="ctr">
-                    <a:lnL w="12700" cap="flat" cmpd="sng" algn="ctr">
-                      <a:solidFill>
-                        <a:srgbClr val="E2E1DC"/>
-                      </a:solidFill>
-                      <a:prstDash val="solid"/>
-                      <a:round/>
-                      <a:headEnd type="none" w="med" len="med"/>
-                      <a:tailEnd type="none" w="med" len="med"/>
-                    </a:lnL>
-                    <a:lnR w="12700" cap="flat" cmpd="sng" algn="ctr">
-                      <a:solidFill>
-                        <a:srgbClr val="E2E1DC"/>
-                      </a:solidFill>
-                      <a:prstDash val="solid"/>
-                      <a:round/>
-                      <a:headEnd type="none" w="med" len="med"/>
-                      <a:tailEnd type="none" w="med" len="med"/>
-                    </a:lnR>
-                    <a:lnT w="12700" cap="flat" cmpd="sng" algn="ctr">
-                      <a:solidFill>
-                        <a:srgbClr val="E2E1DC"/>
-                      </a:solidFill>
-                      <a:prstDash val="solid"/>
-                      <a:round/>
-                      <a:headEnd type="none" w="med" len="med"/>
-                      <a:tailEnd type="none" w="med" len="med"/>
-                    </a:lnT>
-                    <a:lnB w="12700" cap="flat" cmpd="sng" algn="ctr">
-                      <a:solidFill>
-                        <a:srgbClr val="E2E1DC"/>
-                      </a:solidFill>
-                      <a:prstDash val="solid"/>
-                      <a:round/>
-                      <a:headEnd type="none" w="med" len="med"/>
-                      <a:tailEnd type="none" w="med" len="med"/>
-                    </a:lnB>
-                    <a:solidFill>
-                      <a:srgbClr val="FFFFFF"/>
-                    </a:solidFill>
-                  </a:tcPr>
-                </a:tc>
-                <a:tc>
-                  <a:txBody>
-                    <a:bodyPr/>
-                    <a:lstStyle/>
-                    <a:p>
-                      <a:pPr indent="0" marL="0">
-                        <a:buNone/>
-                      </a:pPr>
-                      <a:r>
-                        <a:rPr lang="en-US" sz="1250" dirty="0">
-                          <a:solidFill>
-                            <a:srgbClr val="0B0B0B"/>
-                          </a:solidFill>
-                          <a:latin typeface="Calibri" pitchFamily="34" charset="0"/>
-                          <a:ea typeface="Calibri" pitchFamily="34" charset="-122"/>
-                          <a:cs typeface="Calibri" pitchFamily="34" charset="-120"/>
-                        </a:rPr>
-                        <a:t>clk</a:t>
+                        <a:t>a pin wired to the wrong name</a:t>
                       </a:r>
                       <a:endParaRPr lang="en-US" sz="1250" dirty="0">
                         <a:latin typeface="Calibri" charset="0"/>
@@ -11622,7 +11487,7 @@
                           <a:ea typeface="Calibri" pitchFamily="34" charset="-122"/>
                           <a:cs typeface="Calibri" pitchFamily="34" charset="-120"/>
                         </a:rPr>
-                        <a:t>severity</a:t>
+                        <a:t>width_mismatch</a:t>
                       </a:r>
                       <a:endParaRPr lang="en-US" sz="1250" dirty="0">
                         <a:latin typeface="Calibri" charset="0"/>
@@ -11690,7 +11555,7 @@
                           <a:ea typeface="Calibri" pitchFamily="34" charset="-122"/>
                           <a:cs typeface="Calibri" pitchFamily="34" charset="-120"/>
                         </a:rPr>
-                        <a:t>ERROR</a:t>
+                        <a:t>a 3-bit signal in a 4-bit port</a:t>
                       </a:r>
                       <a:endParaRPr lang="en-US" sz="1250" dirty="0">
                         <a:latin typeface="Calibri" charset="0"/>
@@ -11760,7 +11625,7 @@
                           <a:ea typeface="Calibri" pitchFamily="34" charset="-122"/>
                           <a:cs typeface="Calibri" pitchFamily="34" charset="-120"/>
                         </a:rPr>
-                        <a:t>found by</a:t>
+                        <a:t>undriven_input</a:t>
                       </a:r>
                       <a:endParaRPr lang="en-US" sz="1250" dirty="0">
                         <a:latin typeface="Calibri" charset="0"/>
@@ -11828,7 +11693,421 @@
                           <a:ea typeface="Calibri" pitchFamily="34" charset="-122"/>
                           <a:cs typeface="Calibri" pitchFamily="34" charset="-120"/>
                         </a:rPr>
-                        <a:t>reading the code, before running</a:t>
+                        <a:t>an input never given a value</a:t>
+                      </a:r>
+                      <a:endParaRPr lang="en-US" sz="1250" dirty="0">
+                        <a:latin typeface="Calibri" charset="0"/>
+                        <a:ea typeface="Calibri" charset="0"/>
+                        <a:cs typeface="Calibri" charset="0"/>
+                      </a:endParaRPr>
+                    </a:p>
+                  </a:txBody>
+                  <a:tcPr marL="50800" marR="50800" marT="50800" marB="50800" anchor="ctr">
+                    <a:lnL w="12700" cap="flat" cmpd="sng" algn="ctr">
+                      <a:solidFill>
+                        <a:srgbClr val="E2E1DC"/>
+                      </a:solidFill>
+                      <a:prstDash val="solid"/>
+                      <a:round/>
+                      <a:headEnd type="none" w="med" len="med"/>
+                      <a:tailEnd type="none" w="med" len="med"/>
+                    </a:lnL>
+                    <a:lnR w="12700" cap="flat" cmpd="sng" algn="ctr">
+                      <a:solidFill>
+                        <a:srgbClr val="E2E1DC"/>
+                      </a:solidFill>
+                      <a:prstDash val="solid"/>
+                      <a:round/>
+                      <a:headEnd type="none" w="med" len="med"/>
+                      <a:tailEnd type="none" w="med" len="med"/>
+                    </a:lnR>
+                    <a:lnT w="12700" cap="flat" cmpd="sng" algn="ctr">
+                      <a:solidFill>
+                        <a:srgbClr val="E2E1DC"/>
+                      </a:solidFill>
+                      <a:prstDash val="solid"/>
+                      <a:round/>
+                      <a:headEnd type="none" w="med" len="med"/>
+                      <a:tailEnd type="none" w="med" len="med"/>
+                    </a:lnT>
+                    <a:lnB w="12700" cap="flat" cmpd="sng" algn="ctr">
+                      <a:solidFill>
+                        <a:srgbClr val="E2E1DC"/>
+                      </a:solidFill>
+                      <a:prstDash val="solid"/>
+                      <a:round/>
+                      <a:headEnd type="none" w="med" len="med"/>
+                      <a:tailEnd type="none" w="med" len="med"/>
+                    </a:lnB>
+                    <a:solidFill>
+                      <a:srgbClr val="FFFFFF"/>
+                    </a:solidFill>
+                  </a:tcPr>
+                </a:tc>
+              </a:tr>
+              <a:tr h="246888">
+                <a:tc>
+                  <a:txBody>
+                    <a:bodyPr/>
+                    <a:lstStyle/>
+                    <a:p>
+                      <a:pPr indent="0" marL="0">
+                        <a:buNone/>
+                      </a:pPr>
+                      <a:r>
+                        <a:rPr lang="en-US" sz="1250" dirty="0">
+                          <a:solidFill>
+                            <a:srgbClr val="0B0B0B"/>
+                          </a:solidFill>
+                          <a:latin typeface="Calibri" pitchFamily="34" charset="0"/>
+                          <a:ea typeface="Calibri" pitchFamily="34" charset="-122"/>
+                          <a:cs typeface="Calibri" pitchFamily="34" charset="-120"/>
+                        </a:rPr>
+                        <a:t>unobserved_output</a:t>
+                      </a:r>
+                      <a:endParaRPr lang="en-US" sz="1250" dirty="0">
+                        <a:latin typeface="Calibri" charset="0"/>
+                        <a:ea typeface="Calibri" charset="0"/>
+                        <a:cs typeface="Calibri" charset="0"/>
+                      </a:endParaRPr>
+                    </a:p>
+                  </a:txBody>
+                  <a:tcPr marL="50800" marR="50800" marT="50800" marB="50800" anchor="ctr">
+                    <a:lnL w="12700" cap="flat" cmpd="sng" algn="ctr">
+                      <a:solidFill>
+                        <a:srgbClr val="E2E1DC"/>
+                      </a:solidFill>
+                      <a:prstDash val="solid"/>
+                      <a:round/>
+                      <a:headEnd type="none" w="med" len="med"/>
+                      <a:tailEnd type="none" w="med" len="med"/>
+                    </a:lnL>
+                    <a:lnR w="12700" cap="flat" cmpd="sng" algn="ctr">
+                      <a:solidFill>
+                        <a:srgbClr val="E2E1DC"/>
+                      </a:solidFill>
+                      <a:prstDash val="solid"/>
+                      <a:round/>
+                      <a:headEnd type="none" w="med" len="med"/>
+                      <a:tailEnd type="none" w="med" len="med"/>
+                    </a:lnR>
+                    <a:lnT w="12700" cap="flat" cmpd="sng" algn="ctr">
+                      <a:solidFill>
+                        <a:srgbClr val="E2E1DC"/>
+                      </a:solidFill>
+                      <a:prstDash val="solid"/>
+                      <a:round/>
+                      <a:headEnd type="none" w="med" len="med"/>
+                      <a:tailEnd type="none" w="med" len="med"/>
+                    </a:lnT>
+                    <a:lnB w="12700" cap="flat" cmpd="sng" algn="ctr">
+                      <a:solidFill>
+                        <a:srgbClr val="E2E1DC"/>
+                      </a:solidFill>
+                      <a:prstDash val="solid"/>
+                      <a:round/>
+                      <a:headEnd type="none" w="med" len="med"/>
+                      <a:tailEnd type="none" w="med" len="med"/>
+                    </a:lnB>
+                    <a:solidFill>
+                      <a:srgbClr val="FFFFFF"/>
+                    </a:solidFill>
+                  </a:tcPr>
+                </a:tc>
+                <a:tc>
+                  <a:txBody>
+                    <a:bodyPr/>
+                    <a:lstStyle/>
+                    <a:p>
+                      <a:pPr indent="0" marL="0">
+                        <a:buNone/>
+                      </a:pPr>
+                      <a:r>
+                        <a:rPr lang="en-US" sz="1250" dirty="0">
+                          <a:solidFill>
+                            <a:srgbClr val="0B0B0B"/>
+                          </a:solidFill>
+                          <a:latin typeface="Calibri" pitchFamily="34" charset="0"/>
+                          <a:ea typeface="Calibri" pitchFamily="34" charset="-122"/>
+                          <a:cs typeface="Calibri" pitchFamily="34" charset="-120"/>
+                        </a:rPr>
+                        <a:t>an output nobody ever checks</a:t>
+                      </a:r>
+                      <a:endParaRPr lang="en-US" sz="1250" dirty="0">
+                        <a:latin typeface="Calibri" charset="0"/>
+                        <a:ea typeface="Calibri" charset="0"/>
+                        <a:cs typeface="Calibri" charset="0"/>
+                      </a:endParaRPr>
+                    </a:p>
+                  </a:txBody>
+                  <a:tcPr marL="50800" marR="50800" marT="50800" marB="50800" anchor="ctr">
+                    <a:lnL w="12700" cap="flat" cmpd="sng" algn="ctr">
+                      <a:solidFill>
+                        <a:srgbClr val="E2E1DC"/>
+                      </a:solidFill>
+                      <a:prstDash val="solid"/>
+                      <a:round/>
+                      <a:headEnd type="none" w="med" len="med"/>
+                      <a:tailEnd type="none" w="med" len="med"/>
+                    </a:lnL>
+                    <a:lnR w="12700" cap="flat" cmpd="sng" algn="ctr">
+                      <a:solidFill>
+                        <a:srgbClr val="E2E1DC"/>
+                      </a:solidFill>
+                      <a:prstDash val="solid"/>
+                      <a:round/>
+                      <a:headEnd type="none" w="med" len="med"/>
+                      <a:tailEnd type="none" w="med" len="med"/>
+                    </a:lnR>
+                    <a:lnT w="12700" cap="flat" cmpd="sng" algn="ctr">
+                      <a:solidFill>
+                        <a:srgbClr val="E2E1DC"/>
+                      </a:solidFill>
+                      <a:prstDash val="solid"/>
+                      <a:round/>
+                      <a:headEnd type="none" w="med" len="med"/>
+                      <a:tailEnd type="none" w="med" len="med"/>
+                    </a:lnT>
+                    <a:lnB w="12700" cap="flat" cmpd="sng" algn="ctr">
+                      <a:solidFill>
+                        <a:srgbClr val="E2E1DC"/>
+                      </a:solidFill>
+                      <a:prstDash val="solid"/>
+                      <a:round/>
+                      <a:headEnd type="none" w="med" len="med"/>
+                      <a:tailEnd type="none" w="med" len="med"/>
+                    </a:lnB>
+                    <a:solidFill>
+                      <a:srgbClr val="FFFFFF"/>
+                    </a:solidFill>
+                  </a:tcPr>
+                </a:tc>
+              </a:tr>
+              <a:tr h="246888">
+                <a:tc>
+                  <a:txBody>
+                    <a:bodyPr/>
+                    <a:lstStyle/>
+                    <a:p>
+                      <a:pPr indent="0" marL="0">
+                        <a:buNone/>
+                      </a:pPr>
+                      <a:r>
+                        <a:rPr lang="en-US" sz="1250" dirty="0">
+                          <a:solidFill>
+                            <a:srgbClr val="0B0B0B"/>
+                          </a:solidFill>
+                          <a:latin typeface="Calibri" pitchFamily="34" charset="0"/>
+                          <a:ea typeface="Calibri" pitchFamily="34" charset="-122"/>
+                          <a:cs typeface="Calibri" pitchFamily="34" charset="-120"/>
+                        </a:rPr>
+                        <a:t>missing_fdisplay</a:t>
+                      </a:r>
+                      <a:endParaRPr lang="en-US" sz="1250" dirty="0">
+                        <a:latin typeface="Calibri" charset="0"/>
+                        <a:ea typeface="Calibri" charset="0"/>
+                        <a:cs typeface="Calibri" charset="0"/>
+                      </a:endParaRPr>
+                    </a:p>
+                  </a:txBody>
+                  <a:tcPr marL="50800" marR="50800" marT="50800" marB="50800" anchor="ctr">
+                    <a:lnL w="12700" cap="flat" cmpd="sng" algn="ctr">
+                      <a:solidFill>
+                        <a:srgbClr val="E2E1DC"/>
+                      </a:solidFill>
+                      <a:prstDash val="solid"/>
+                      <a:round/>
+                      <a:headEnd type="none" w="med" len="med"/>
+                      <a:tailEnd type="none" w="med" len="med"/>
+                    </a:lnL>
+                    <a:lnR w="12700" cap="flat" cmpd="sng" algn="ctr">
+                      <a:solidFill>
+                        <a:srgbClr val="E2E1DC"/>
+                      </a:solidFill>
+                      <a:prstDash val="solid"/>
+                      <a:round/>
+                      <a:headEnd type="none" w="med" len="med"/>
+                      <a:tailEnd type="none" w="med" len="med"/>
+                    </a:lnR>
+                    <a:lnT w="12700" cap="flat" cmpd="sng" algn="ctr">
+                      <a:solidFill>
+                        <a:srgbClr val="E2E1DC"/>
+                      </a:solidFill>
+                      <a:prstDash val="solid"/>
+                      <a:round/>
+                      <a:headEnd type="none" w="med" len="med"/>
+                      <a:tailEnd type="none" w="med" len="med"/>
+                    </a:lnT>
+                    <a:lnB w="12700" cap="flat" cmpd="sng" algn="ctr">
+                      <a:solidFill>
+                        <a:srgbClr val="E2E1DC"/>
+                      </a:solidFill>
+                      <a:prstDash val="solid"/>
+                      <a:round/>
+                      <a:headEnd type="none" w="med" len="med"/>
+                      <a:tailEnd type="none" w="med" len="med"/>
+                    </a:lnB>
+                    <a:solidFill>
+                      <a:srgbClr val="FFFFFF"/>
+                    </a:solidFill>
+                  </a:tcPr>
+                </a:tc>
+                <a:tc>
+                  <a:txBody>
+                    <a:bodyPr/>
+                    <a:lstStyle/>
+                    <a:p>
+                      <a:pPr indent="0" marL="0">
+                        <a:buNone/>
+                      </a:pPr>
+                      <a:r>
+                        <a:rPr lang="en-US" sz="1250" dirty="0">
+                          <a:solidFill>
+                            <a:srgbClr val="0B0B0B"/>
+                          </a:solidFill>
+                          <a:latin typeface="Calibri" pitchFamily="34" charset="0"/>
+                          <a:ea typeface="Calibri" pitchFamily="34" charset="-122"/>
+                          <a:cs typeface="Calibri" pitchFamily="34" charset="-120"/>
+                        </a:rPr>
+                        <a:t>a clocked output never printed</a:t>
+                      </a:r>
+                      <a:endParaRPr lang="en-US" sz="1250" dirty="0">
+                        <a:latin typeface="Calibri" charset="0"/>
+                        <a:ea typeface="Calibri" charset="0"/>
+                        <a:cs typeface="Calibri" charset="0"/>
+                      </a:endParaRPr>
+                    </a:p>
+                  </a:txBody>
+                  <a:tcPr marL="50800" marR="50800" marT="50800" marB="50800" anchor="ctr">
+                    <a:lnL w="12700" cap="flat" cmpd="sng" algn="ctr">
+                      <a:solidFill>
+                        <a:srgbClr val="E2E1DC"/>
+                      </a:solidFill>
+                      <a:prstDash val="solid"/>
+                      <a:round/>
+                      <a:headEnd type="none" w="med" len="med"/>
+                      <a:tailEnd type="none" w="med" len="med"/>
+                    </a:lnL>
+                    <a:lnR w="12700" cap="flat" cmpd="sng" algn="ctr">
+                      <a:solidFill>
+                        <a:srgbClr val="E2E1DC"/>
+                      </a:solidFill>
+                      <a:prstDash val="solid"/>
+                      <a:round/>
+                      <a:headEnd type="none" w="med" len="med"/>
+                      <a:tailEnd type="none" w="med" len="med"/>
+                    </a:lnR>
+                    <a:lnT w="12700" cap="flat" cmpd="sng" algn="ctr">
+                      <a:solidFill>
+                        <a:srgbClr val="E2E1DC"/>
+                      </a:solidFill>
+                      <a:prstDash val="solid"/>
+                      <a:round/>
+                      <a:headEnd type="none" w="med" len="med"/>
+                      <a:tailEnd type="none" w="med" len="med"/>
+                    </a:lnT>
+                    <a:lnB w="12700" cap="flat" cmpd="sng" algn="ctr">
+                      <a:solidFill>
+                        <a:srgbClr val="E2E1DC"/>
+                      </a:solidFill>
+                      <a:prstDash val="solid"/>
+                      <a:round/>
+                      <a:headEnd type="none" w="med" len="med"/>
+                      <a:tailEnd type="none" w="med" len="med"/>
+                    </a:lnB>
+                    <a:solidFill>
+                      <a:srgbClr val="FFFFFF"/>
+                    </a:solidFill>
+                  </a:tcPr>
+                </a:tc>
+              </a:tr>
+              <a:tr h="246888">
+                <a:tc>
+                  <a:txBody>
+                    <a:bodyPr/>
+                    <a:lstStyle/>
+                    <a:p>
+                      <a:pPr indent="0" marL="0">
+                        <a:buNone/>
+                      </a:pPr>
+                      <a:r>
+                        <a:rPr lang="en-US" sz="1250" dirty="0">
+                          <a:solidFill>
+                            <a:srgbClr val="0B0B0B"/>
+                          </a:solidFill>
+                          <a:latin typeface="Calibri" pitchFamily="34" charset="0"/>
+                          <a:ea typeface="Calibri" pitchFamily="34" charset="-122"/>
+                          <a:cs typeface="Calibri" pitchFamily="34" charset="-120"/>
+                        </a:rPr>
+                        <a:t>clock_never_toggled</a:t>
+                      </a:r>
+                      <a:endParaRPr lang="en-US" sz="1250" dirty="0">
+                        <a:latin typeface="Calibri" charset="0"/>
+                        <a:ea typeface="Calibri" charset="0"/>
+                        <a:cs typeface="Calibri" charset="0"/>
+                      </a:endParaRPr>
+                    </a:p>
+                  </a:txBody>
+                  <a:tcPr marL="50800" marR="50800" marT="50800" marB="50800" anchor="ctr">
+                    <a:lnL w="12700" cap="flat" cmpd="sng" algn="ctr">
+                      <a:solidFill>
+                        <a:srgbClr val="E2E1DC"/>
+                      </a:solidFill>
+                      <a:prstDash val="solid"/>
+                      <a:round/>
+                      <a:headEnd type="none" w="med" len="med"/>
+                      <a:tailEnd type="none" w="med" len="med"/>
+                    </a:lnL>
+                    <a:lnR w="12700" cap="flat" cmpd="sng" algn="ctr">
+                      <a:solidFill>
+                        <a:srgbClr val="E2E1DC"/>
+                      </a:solidFill>
+                      <a:prstDash val="solid"/>
+                      <a:round/>
+                      <a:headEnd type="none" w="med" len="med"/>
+                      <a:tailEnd type="none" w="med" len="med"/>
+                    </a:lnR>
+                    <a:lnT w="12700" cap="flat" cmpd="sng" algn="ctr">
+                      <a:solidFill>
+                        <a:srgbClr val="E2E1DC"/>
+                      </a:solidFill>
+                      <a:prstDash val="solid"/>
+                      <a:round/>
+                      <a:headEnd type="none" w="med" len="med"/>
+                      <a:tailEnd type="none" w="med" len="med"/>
+                    </a:lnT>
+                    <a:lnB w="12700" cap="flat" cmpd="sng" algn="ctr">
+                      <a:solidFill>
+                        <a:srgbClr val="E2E1DC"/>
+                      </a:solidFill>
+                      <a:prstDash val="solid"/>
+                      <a:round/>
+                      <a:headEnd type="none" w="med" len="med"/>
+                      <a:tailEnd type="none" w="med" len="med"/>
+                    </a:lnB>
+                    <a:solidFill>
+                      <a:srgbClr val="FFFFFF"/>
+                    </a:solidFill>
+                  </a:tcPr>
+                </a:tc>
+                <a:tc>
+                  <a:txBody>
+                    <a:bodyPr/>
+                    <a:lstStyle/>
+                    <a:p>
+                      <a:pPr indent="0" marL="0">
+                        <a:buNone/>
+                      </a:pPr>
+                      <a:r>
+                        <a:rPr lang="en-US" sz="1250" dirty="0">
+                          <a:solidFill>
+                            <a:srgbClr val="0B0B0B"/>
+                          </a:solidFill>
+                          <a:latin typeface="Calibri" pitchFamily="34" charset="0"/>
+                          <a:ea typeface="Calibri" pitchFamily="34" charset="-122"/>
+                          <a:cs typeface="Calibri" pitchFamily="34" charset="-120"/>
+                        </a:rPr>
+                        <a:t>a clock that never ticks</a:t>
                       </a:r>
                       <a:endParaRPr lang="en-US" sz="1250" dirty="0">
                         <a:latin typeface="Calibri" charset="0"/>
@@ -12094,7 +12373,7 @@
                 <a:ea typeface="Calibri" pitchFamily="34" charset="-122"/>
                 <a:cs typeface="Calibri" pitchFamily="34" charset="-120"/>
               </a:rPr>
-              <a:t>Zero false alarms on clean testbenches. This is the core contribution.</a:t>
+              <a:t>Zero false alarms on clean testbenches. This is the core contribution — the next section shows how we measured it.</a:t>
             </a:r>
             <a:endParaRPr lang="en-US" sz="1300" dirty="0"/>
           </a:p>

--- a/docs/presentation.pptx
+++ b/docs/presentation.pptx
@@ -1701,8 +1701,17 @@
           <a:p>
             <a:r>
               <a:rPr lang="en-US" dirty="0"/>
-              <a:t>NOT ON SLIDE — the pilot behind the Eval2 claim was pre-registered: we wrote down the criteria before generating anything. Better broken copies moved the score one point; different circuits moved it forty-four.
-IF ASKED about sample size: 20 circuits, so the interval on that 20% runs roughly 8 to 42 percent. Their 26 sits inside it. No ranking is established in either direction, and I would not claim one.</a:t>
+              <a:t>WHERE EACH NUMBER COMES FROM, in case any one of them is queried.
+92.5% — our compile rate pooled over both models. Half our runs deliberately used a cheap model they never tested, which drags it down.
+98.7% — the same measure on the strong model alone. That is the like-for-like comparison with their 95.7%, because they used one good model throughout.
+31.4% — our pass rate against the real circuit, pooled. Low because these are the hardest fifth of their benchmark and three quarters of them are clocked, meaning the circuit has memory and a clock. Clocked circuits are the hard case for everyone: you have to get the timing right as well as the values.
+51.5% and 37.1% — theirs, across all circuits and across clocked ones only. Compare against 37.1, not 51.5.
+95% — our broken-copy detection. This counts individual broken copies caught, on our own small circuits. A one-bit flip-flop has nowhere for a bug to hide, so almost everything gets caught. It is a ceiling, not a result.
+44.8% — theirs, and NOT the same measure. They count a circuit as passed only if the testbench agrees with a reference testbench on at least 80% of the broken copies. Per-circuit with a threshold, against our per-copy raw rate.
+20% — our runs scored under their rule instead of ours: 4 of the 20 benchmark circuits cleared their 80% bar. That is the only honest comparison on this row, and it goes against their 26%.
+IF ASKED WHAT CHANGED BETWEEN 95 AND 20 — two things at once, so do not let it be read as one. The circuits got harder AND the scoring rule changed. The number that separates them is our raw detection on their circuits: about 54% with the weak model and 67% with the strong one. So harder circuits take it from 95 to roughly 60, and their stricter rule takes it from there to 20.
+IF ASKED WHAT n=20 MEANS: we tested 20 circuits, so 20% is 4 of them. With a sample that small the true value could plausibly sit anywhere from about 8% to 42%. Their 26% is inside that range, so neither of us is measurably ahead. I would not claim a ranking from 20 circuits and I do not.
+NOT ON SLIDE: the pilot behind the ceiling claim was pre-registered — we wrote the criteria down before generating anything. Better broken copies moved the score one point; different circuits moved it forty-four.</a:t>
             </a:r>
             <a:endParaRPr lang="en-US" dirty="0"/>
           </a:p>

--- a/docs/presentation.pptx
+++ b/docs/presentation.pptx
@@ -33,9 +33,10 @@
     <p:sldId id="281" r:id="rId27"/>
     <p:sldId id="282" r:id="rId28"/>
     <p:sldId id="283" r:id="rId29"/>
+    <p:sldId id="284" r:id="rId30"/>
   </p:sldIdLst>
   <p:notesMasterIdLst>
-    <p:notesMasterId r:id="rId30"/>
+    <p:notesMasterId r:id="rId31"/>
   </p:notesMasterIdLst>
   <p:sldSz cx="12192000" cy="6858000"/>
   <p:notesSz cx="6858000" cy="12192000"/>
@@ -1611,9 +1612,11 @@
           <a:p>
             <a:r>
               <a:rPr lang="en-US" dirty="0"/>
-              <a:t>NOT ON SLIDE: 215 faults, eight kinds, injected into testbenches that already passed. The checker localises to the right signal as well as the right class, not just “something is wrong”.
-IF ASKED how we know the injected faults were legal Verilog: an injector that produced a syntax error would score as the compiler catching a fault the injector itself created. Mutations must produce legal code, and injectors that cannot mutate cleanly decline — those cases are excluded from the denominator.
-This is the strongest slide in the talk. Take your time.</a:t>
+              <a:t>NOT ON SLIDE — the terms. A mutant is a copy of the circuit with one deliberate bug. Eval2 asks whether the testbench notices. It is the third and last of our three scores, and it only runs on testbenches that already passed Eval1.
+NOT ON SLIDE: 5 mutants per run, 440 generated in total, 437 of them valid. The three that were dropped would not compile.
+THE LINK BACK TO gen_scenarios, worth making explicitly: eight scenarios is our own prompt instruction. On a one-bit flip-flop eight covers everything there is. On a ten-input circuit there are 1,024 input combinations, so eight is under one percent of them, and a bug living in the other 99% is simply never visited.
+IF ASKED whether the mutants were too easy — we tested that rather than assuming. Regenerating them with a better model, using AutoBench's own prompt, and filtering out the ones that were not really broken moved the score from 96.7% to 97.4%. One point. Swapping in bigger circuits moved it forty-four. So it is the circuits.
+IF ASKED who makes the mutants: the cheap model, because introducing one deliberate bug is a structural edit, not a reasoning task.</a:t>
             </a:r>
             <a:endParaRPr lang="en-US" dirty="0"/>
           </a:p>
@@ -1701,17 +1704,12 @@
           <a:p>
             <a:r>
               <a:rPr lang="en-US" dirty="0"/>
-              <a:t>WHERE EACH NUMBER COMES FROM, in case any one of them is queried.
-92.5% — our compile rate pooled over both models. Half our runs deliberately used a cheap model they never tested, which drags it down.
-98.7% — the same measure on the strong model alone. That is the like-for-like comparison with their 95.7%, because they used one good model throughout.
-31.4% — our pass rate against the real circuit, pooled. Low because these are the hardest fifth of their benchmark and three quarters of them are clocked, meaning the circuit has memory and a clock. Clocked circuits are the hard case for everyone: you have to get the timing right as well as the values.
-51.5% and 37.1% — theirs, across all circuits and across clocked ones only. Compare against 37.1, not 51.5.
-95% — our broken-copy detection. This counts individual broken copies caught, on our own small circuits. A one-bit flip-flop has nowhere for a bug to hide, so almost everything gets caught. It is a ceiling, not a result.
-44.8% — theirs, and NOT the same measure. They count a circuit as passed only if the testbench agrees with a reference testbench on at least 80% of the broken copies. Per-circuit with a threshold, against our per-copy raw rate.
-20% — our runs scored under their rule instead of ours: 4 of the 20 benchmark circuits cleared their 80% bar. That is the only honest comparison on this row, and it goes against their 26%.
-IF ASKED WHAT CHANGED BETWEEN 95 AND 20 — two things at once, so do not let it be read as one. The circuits got harder AND the scoring rule changed. The number that separates them is our raw detection on their circuits: about 54% with the weak model and 67% with the strong one. So harder circuits take it from 95 to roughly 60, and their stricter rule takes it from there to 20.
-IF ASKED WHAT n=20 MEANS: we tested 20 circuits, so 20% is 4 of them. With a sample that small the true value could plausibly sit anywhere from about 8% to 42%. Their 26% is inside that range, so neither of us is measurably ahead. I would not claim a ranking from 20 circuits and I do not.
-NOT ON SLIDE: the pilot behind the ceiling claim was pre-registered — we wrote the criteria down before generating anything. Better broken copies moved the score one point; different circuits moved it forty-four.</a:t>
+              <a:t>HOW IT WAS DONE, if asked — it is a separate experiment, not part of a pipeline run. We took 14 testbenches already known to pass, injected one known fault at a time, and recorded whether each of three layers noticed: our checker, the compiler, and the simulator. Fully offline, no model involved, so it cost nothing.
+That control is why we can say 100% — we chose exactly what went in, so we know exactly what should have come out.
+NOT ON SLIDE: 215 faults across eight kinds. The checker localises to the right signal as well as the right class, not just “something is wrong”.
+IF ASKED how we know the injected faults were legal Verilog: an injector that produced a syntax error would score as the compiler catching a fault the injector itself created. Mutations must produce compiling code, and injectors that cannot mutate cleanly decline — those cases are excluded from the denominator.
+IF ASKED the difference between this and mutants: opposite directions. Mutants break the CIRCUIT to test whether the TESTBENCH notices — that is Eval2. Fault injection breaks the TESTBENCH to test whether OUR CHECKER notices.
+This is the strongest slide in the talk. Take your time.</a:t>
             </a:r>
             <a:endParaRPr lang="en-US" dirty="0"/>
           </a:p>
@@ -1799,9 +1797,17 @@
           <a:p>
             <a:r>
               <a:rPr lang="en-US" dirty="0"/>
-              <a:t>NOT ON SLIDE: 44 is 12 of our circuits on the strong model, the same 12 on the weak one, and 20 benchmark circuits — so 44 runs per setting, 220 in these three sweeps.
-The statistics: ours versus the control is McNemar p = 0.372. The control versus plain is p = 1.000, which is the useful one — a blind extra attempt is worth nothing, so any real gain has to sit on the diagnosis.
-IF ASKED about the noise floor: those two settings ran identical logic because our checker never fired, and still landed three circuits apart. That is the measurement.</a:t>
+              <a:t>WHERE EACH NUMBER COMES FROM, in case any one of them is queried.
+92.5% — our compile rate pooled over both models. Half our runs deliberately used a cheap model they never tested, which drags it down.
+98.7% — the same measure on the strong model alone. That is the like-for-like comparison with their 95.7%, because they used one good model throughout.
+31.4% — our pass rate against the real circuit, pooled. Low because these are the hardest fifth of their benchmark and three quarters of them are clocked, meaning the circuit has memory and a clock. Clocked circuits are the hard case for everyone: you have to get the timing right as well as the values.
+51.5% and 37.1% — theirs, across all circuits and across clocked ones only. Compare against 37.1, not 51.5.
+95% — our broken-copy detection. This counts individual broken copies caught, on our own small circuits. A one-bit flip-flop has nowhere for a bug to hide, so almost everything gets caught. It is a ceiling, not a result.
+44.8% — theirs, and NOT the same measure. They count a circuit as passed only if the testbench agrees with a reference testbench on at least 80% of the broken copies. Per-circuit with a threshold, against our per-copy raw rate.
+20% — our runs scored under their rule instead of ours: 4 of the 20 benchmark circuits cleared their 80% bar. That is the only honest comparison on this row, and it goes against their 26%.
+IF ASKED WHAT CHANGED BETWEEN 95 AND 20 — two things at once, so do not let it be read as one. The circuits got harder AND the scoring rule changed. The number that separates them is our raw detection on their circuits: about 54% with the weak model and 67% with the strong one. So harder circuits take it from 95 to roughly 60, and their stricter rule takes it from there to 20.
+IF ASKED WHAT n=20 MEANS: we tested 20 circuits, so 20% is 4 of them. With a sample that small the true value could plausibly sit anywhere from about 8% to 42%. Their 26% is inside that range, so neither of us is measurably ahead. I would not claim a ranking from 20 circuits and I do not.
+NOT ON SLIDE: the pilot behind the ceiling claim was pre-registered — we wrote the criteria down before generating anything. Better broken copies moved the score one point; different circuits moved it forty-four.</a:t>
             </a:r>
             <a:endParaRPr lang="en-US" dirty="0"/>
           </a:p>
@@ -1889,9 +1895,9 @@
           <a:p>
             <a:r>
               <a:rPr lang="en-US" dirty="0"/>
-              <a:t>DISCLOSE THIS BEFORE THEY FIND IT: our full version is also the only setting that can act on simulation feedback, which drove 79 of the 90 informed repairs. So its lead cannot be credited to our checker, and there is no simulation-only arm to separate them. That is a gap in our design and it is in the report. Volunteering it reads as confidence; being caught on it does not.
-NOT ON SLIDE: 102 runs attempted a repair and 26 succeeded, about one in four.
-Do not apologise here. It is a discovery, not a failure.</a:t>
+              <a:t>NOT ON SLIDE: 44 is 12 of our circuits on the strong model, the same 12 on the weak one, and 20 benchmark circuits — so 44 runs per setting, 220 in these three sweeps.
+The statistics: ours versus the control is McNemar p = 0.372. The control versus plain is p = 1.000, which is the useful one — a blind extra attempt is worth nothing, so any real gain has to sit on the diagnosis.
+IF ASKED about the noise floor: those two settings ran identical logic because our checker never fired, and still landed three circuits apart. That is the measurement.</a:t>
             </a:r>
             <a:endParaRPr lang="en-US" dirty="0"/>
           </a:p>
@@ -1979,8 +1985,9 @@
           <a:p>
             <a:r>
               <a:rPr lang="en-US" dirty="0"/>
-              <a:t>BE EXPLICIT ABOUT THE BOUNDARY: the measurements are solid — 87% of failures are semantic, the checker fired once. The explanation on the left and right is a reasonable reading of that, not something we ran an experiment on. Say so if pushed; it costs nothing and being caught overclaiming costs a lot.
-IF ASKED what would bring structural faults back: larger designs, or smaller and older models. Both are untested and both are in future work.</a:t>
+              <a:t>DISCLOSE THIS BEFORE THEY FIND IT: our full version is also the only setting that can act on simulation feedback, which drove 79 of the 90 informed repairs. So its lead cannot be credited to our checker, and there is no simulation-only arm to separate them. That is a gap in our design and it is in the report. Volunteering it reads as confidence; being caught on it does not.
+NOT ON SLIDE: 102 runs attempted a repair and 26 succeeded, about one in four.
+Do not apologise here. It is a discovery, not a failure.</a:t>
             </a:r>
             <a:endParaRPr lang="en-US" dirty="0"/>
           </a:p>
@@ -2068,8 +2075,8 @@
           <a:p>
             <a:r>
               <a:rPr lang="en-US" dirty="0"/>
-              <a:t>NOT ON SLIDE: per run at the strong tier it is about 7 cents for plain, 10 for ours, 11 for the control.
-THE NUANCE WORTH SAYING: our layer is nearly free and nearly useless against current models. Those are not in tension — free means there is little reason to remove it, in case a weaker or older model is the one generating.</a:t>
+              <a:t>BE EXPLICIT ABOUT THE BOUNDARY: the measurements are solid — 87% of failures are semantic, the checker fired once. The explanation on the left and right is a reasonable reading of that, not something we ran an experiment on. Say so if pushed; it costs nothing and being caught overclaiming costs a lot.
+IF ASKED what would bring structural faults back: larger designs, or smaller and older models. Both are untested and both are in future work.</a:t>
             </a:r>
             <a:endParaRPr lang="en-US" dirty="0"/>
           </a:p>
@@ -2157,7 +2164,8 @@
           <a:p>
             <a:r>
               <a:rPr lang="en-US" dirty="0"/>
-              <a:t>Keep this quick — they have seen all four answers already. The line that matters is the last one: a negative answer with a validated instrument behind it is worth more than a positive one without.</a:t>
+              <a:t>NOT ON SLIDE: per run at the strong tier it is about 7 cents for plain, 10 for ours, 11 for the control.
+THE NUANCE WORTH SAYING: our layer is nearly free and nearly useless against current models. Those are not in tension — free means there is little reason to remove it, in case a weaker or older model is the one generating.</a:t>
             </a:r>
             <a:endParaRPr lang="en-US" dirty="0"/>
           </a:p>
@@ -2245,8 +2253,7 @@
           <a:p>
             <a:r>
               <a:rPr lang="en-US" dirty="0"/>
-              <a:t>IF ASKED whether the project succeeded, the precise answer: we set out to find whether you can localise testbench errors before simulation. You can — completely, for the faults it targets, including ones nothing else sees. But against current models there is little left to find. We can say that with confidence rather than as a guess, because we validated the tool separately and ran a control group.
-IF ASKED what you would do differently: run a simulation-only arm to separate the two feedback sources, and use bigger circuits so the broken-copy score discriminates.</a:t>
+              <a:t>Keep this quick — they have seen all four answers already. The line that matters is the last one: a negative answer with a validated instrument behind it is worth more than a positive one without.</a:t>
             </a:r>
             <a:endParaRPr lang="en-US" dirty="0"/>
           </a:p>
@@ -2334,6 +2341,95 @@
           <a:p>
             <a:r>
               <a:rPr lang="en-US" dirty="0"/>
+              <a:t>IF ASKED whether the project succeeded, the precise answer: we set out to find whether you can localise testbench errors before simulation. You can — completely, for the faults it targets, including ones nothing else sees. But against current models there is little left to find. We can say that with confidence rather than as a guess, because we validated the tool separately and ran a control group.
+IF ASKED what you would do differently: run a simulation-only arm to separate the two feedback sources, and use bigger circuits so the broken-copy score discriminates.</a:t>
+            </a:r>
+            <a:endParaRPr lang="en-US" dirty="0"/>
+          </a:p>
+        </p:txBody>
+      </p:sp>
+      <p:sp>
+        <p:nvSpPr>
+          <p:cNvPr id="4" name="Slide Number Placeholder 3"/>
+          <p:cNvSpPr>
+            <a:spLocks noGrp="1"/>
+          </p:cNvSpPr>
+          <p:nvPr>
+            <p:ph type="sldNum" sz="quarter" idx="10"/>
+          </p:nvPr>
+        </p:nvSpPr>
+        <p:spPr/>
+        <p:txBody>
+          <a:bodyPr/>
+          <a:lstStyle/>
+          <a:p>
+            <a:fld id="{F7021451-1387-4CA6-816F-3879F97B5CBC}" type="slidenum">
+              <a:rPr lang="en-US"/>
+              <a:t>28</a:t>
+            </a:fld>
+            <a:endParaRPr lang="en-US"/>
+          </a:p>
+        </p:txBody>
+      </p:sp>
+    </p:spTree>
+    <p:extLst>
+      <p:ext uri="{BB962C8B-B14F-4D97-AF65-F5344CB8AC3E}">
+        <p14:creationId xmlns:p14="http://schemas.microsoft.com/office/powerpoint/2010/main" val="1024086991"/>
+      </p:ext>
+    </p:extLst>
+  </p:cSld>
+  <p:clrMapOvr>
+    <a:masterClrMapping/>
+  </p:clrMapOvr>
+</p:notes>
+</file>
+
+<file path=ppt/notesSlides/notesSlide29.xml><?xml version="1.0" encoding="utf-8"?>
+<p:notes xmlns:a="http://schemas.openxmlformats.org/drawingml/2006/main" xmlns:r="http://schemas.openxmlformats.org/officeDocument/2006/relationships" xmlns:p="http://schemas.openxmlformats.org/presentationml/2006/main">
+  <p:cSld>
+    <p:spTree>
+      <p:nvGrpSpPr>
+        <p:cNvPr id="1" name=""/>
+        <p:cNvGrpSpPr/>
+        <p:nvPr/>
+      </p:nvGrpSpPr>
+      <p:grpSpPr>
+        <a:xfrm>
+          <a:off x="0" y="0"/>
+          <a:ext cx="0" cy="0"/>
+          <a:chOff x="0" y="0"/>
+          <a:chExt cx="0" cy="0"/>
+        </a:xfrm>
+      </p:grpSpPr>
+      <p:sp>
+        <p:nvSpPr>
+          <p:cNvPr id="2" name="Slide Image Placeholder 1"/>
+          <p:cNvSpPr>
+            <a:spLocks noGrp="1" noRot="1" noChangeAspect="1"/>
+          </p:cNvSpPr>
+          <p:nvPr>
+            <p:ph type="sldImg"/>
+          </p:nvPr>
+        </p:nvSpPr>
+        <p:spPr/>
+      </p:sp>
+      <p:sp>
+        <p:nvSpPr>
+          <p:cNvPr id="3" name="Notes Placeholder 2"/>
+          <p:cNvSpPr>
+            <a:spLocks noGrp="1"/>
+          </p:cNvSpPr>
+          <p:nvPr>
+            <p:ph type="body" idx="1"/>
+          </p:nvPr>
+        </p:nvSpPr>
+        <p:spPr/>
+        <p:txBody>
+          <a:bodyPr/>
+          <a:lstStyle/>
+          <a:p>
+            <a:r>
+              <a:rPr lang="en-US" dirty="0"/>
               <a:t>The screenshot is the published results page — point at it if someone asks whether the numbers are reproducible.
 QUESTIONS YOU ARE LIKELY TO GET, and where the answer lives:
 · “Did you beat AutoBench?” — no, and we do not claim to. Different model, different sample, and their Eval2 measures something else. See the evaluate slide.
@@ -2362,7 +2458,7 @@
           <a:p>
             <a:fld id="{F7021451-1387-4CA6-816F-3879F97B5CBC}" type="slidenum">
               <a:rPr lang="en-US"/>
-              <a:t>28</a:t>
+              <a:t>29</a:t>
             </a:fld>
             <a:endParaRPr lang="en-US"/>
           </a:p>
@@ -2694,6 +2790,14 @@
             <a:r>
               <a:rPr lang="en-US" dirty="0"/>
               <a:t>Do not read the boxes out. Point at the four blue ones and move. Leave by 5:00.
+WHICH MODEL DOES WHAT, if asked — we route by difficulty to keep the cost down:
+  strong (claude-sonnet-4.5): writes the circuit, the spec, the testbench, the Python checker, the error reasoning, and every repair.
+  cheap (gpt-4o-mini): the combinational-or-sequential decision, the scenario list, and the broken copies used for scoring.
+The rule is simple: anything that writes Verilog gets the strong model; anything that classifies or lists gets the cheap one.
+THE CIRCUITS, if asked — 32 in total, in two sets.
+  12 of our own: 6 combinational, 6 sequential. Six are the small originals — dff, alu_1bit, mux2to1, comparator_2bit, priority_encoder, shift_register. The other six were purpose-built to be hard enough for the checks to fire at all: alu_8bit, barrel_shifter_8bit, bcd_to_7seg, fsm_sequence_detector, fifo_8x8, traffic_light_fsm.
+  20 from the public benchmark: 16 sequential, 4 combinational — the hardest fifth of their 156, chosen before any run.
+WHY SIX WERE PURPOSE-BUILT: the originals were 8 to 17 lines with two to four unambiguous ports, so four of the checks could not physically fire on them. You cannot wire a pin to the wrong name if there are only two pins.
 NOT ON SLIDE — mention it, it shows you read the paper properly: they have one thing we do not. They check that every scenario they planned actually made it into the generated testbench, retrying up to three times. We have no equivalent, and it is in our future work.</a:t>
             </a:r>
             <a:endParaRPr lang="en-US" dirty="0"/>
@@ -19199,6 +19303,1375 @@
                 <a:ea typeface="Calibri" pitchFamily="34" charset="-122"/>
                 <a:cs typeface="Calibri" pitchFamily="34" charset="-120"/>
               </a:rPr>
+              <a:t>HOW WE TEST THE TESTBENCH</a:t>
+            </a:r>
+            <a:endParaRPr lang="en-US" sz="1100" dirty="0"/>
+          </a:p>
+        </p:txBody>
+      </p:sp>
+      <p:sp>
+        <p:nvSpPr>
+          <p:cNvPr id="3" name="Text 1"/>
+          <p:cNvSpPr txBox="1"/>
+          <p:nvPr/>
+        </p:nvSpPr>
+        <p:spPr>
+          <a:xfrm>
+            <a:off x="640080" y="402336"/>
+            <a:ext cx="10908792" cy="566928"/>
+          </a:xfrm>
+          <a:prstGeom prst="rect">
+            <a:avLst/>
+          </a:prstGeom>
+          <a:noFill/>
+          <a:ln/>
+        </p:spPr>
+        <p:txBody>
+          <a:bodyPr wrap="square" lIns="0" tIns="0" rIns="0" bIns="0" rtlCol="0" anchor="ctr"/>
+          <a:lstStyle/>
+          <a:p>
+            <a:pPr indent="0" marL="0">
+              <a:buNone/>
+            </a:pPr>
+            <a:r>
+              <a:rPr lang="en-US" sz="3000" b="1" dirty="0">
+                <a:solidFill>
+                  <a:srgbClr val="0B0B0B"/>
+                </a:solidFill>
+                <a:latin typeface="Cambria" pitchFamily="34" charset="0"/>
+                <a:ea typeface="Cambria" pitchFamily="34" charset="-122"/>
+                <a:cs typeface="Cambria" pitchFamily="34" charset="-120"/>
+              </a:rPr>
+              <a:t>Mutants — deliberately broken copies of the circuit</a:t>
+            </a:r>
+            <a:endParaRPr lang="en-US" sz="3000" dirty="0"/>
+          </a:p>
+        </p:txBody>
+      </p:sp>
+      <p:sp>
+        <p:nvSpPr>
+          <p:cNvPr id="4" name="Text 2"/>
+          <p:cNvSpPr txBox="1"/>
+          <p:nvPr/>
+        </p:nvSpPr>
+        <p:spPr>
+          <a:xfrm>
+            <a:off x="640080" y="1005840"/>
+            <a:ext cx="10908792" cy="365760"/>
+          </a:xfrm>
+          <a:prstGeom prst="rect">
+            <a:avLst/>
+          </a:prstGeom>
+          <a:noFill/>
+          <a:ln/>
+        </p:spPr>
+        <p:txBody>
+          <a:bodyPr wrap="square" lIns="0" tIns="0" rIns="0" bIns="0" rtlCol="0" anchor="ctr"/>
+          <a:lstStyle/>
+          <a:p>
+            <a:pPr indent="0" marL="0">
+              <a:buNone/>
+            </a:pPr>
+            <a:r>
+              <a:rPr lang="en-US" sz="1500" dirty="0">
+                <a:solidFill>
+                  <a:srgbClr val="7A7974"/>
+                </a:solidFill>
+                <a:latin typeface="Calibri" pitchFamily="34" charset="0"/>
+                <a:ea typeface="Calibri" pitchFamily="34" charset="-122"/>
+                <a:cs typeface="Calibri" pitchFamily="34" charset="-120"/>
+              </a:rPr>
+              <a:t>This is what Eval2 measures, and it is the number most often misread</a:t>
+            </a:r>
+            <a:endParaRPr lang="en-US" sz="1500" dirty="0"/>
+          </a:p>
+        </p:txBody>
+      </p:sp>
+      <p:sp>
+        <p:nvSpPr>
+          <p:cNvPr id="5" name="Shape 3"/>
+          <p:cNvSpPr/>
+          <p:nvPr/>
+        </p:nvSpPr>
+        <p:spPr>
+          <a:xfrm>
+            <a:off x="640080" y="1600200"/>
+            <a:ext cx="5225796" cy="2331720"/>
+          </a:xfrm>
+          <a:prstGeom prst="roundRect">
+            <a:avLst>
+              <a:gd name="adj" fmla="val 3137"/>
+            </a:avLst>
+          </a:prstGeom>
+          <a:solidFill>
+            <a:srgbClr val="F1F1ED"/>
+          </a:solidFill>
+          <a:ln w="12700">
+            <a:solidFill>
+              <a:srgbClr val="F1F1ED"/>
+            </a:solidFill>
+            <a:prstDash val="solid"/>
+          </a:ln>
+          <a:effectLst>
+            <a:outerShdw sx="100000" sy="100000" kx="0" ky="0" algn="bl" rotWithShape="0" blurRad="76200" dist="381" dir="5400000">
+              <a:srgbClr val="000000">
+                <a:alpha val="7000"/>
+              </a:srgbClr>
+            </a:outerShdw>
+          </a:effectLst>
+        </p:spPr>
+      </p:sp>
+      <p:sp>
+        <p:nvSpPr>
+          <p:cNvPr id="6" name="Text 4"/>
+          <p:cNvSpPr txBox="1"/>
+          <p:nvPr/>
+        </p:nvSpPr>
+        <p:spPr>
+          <a:xfrm>
+            <a:off x="877824" y="1764792"/>
+            <a:ext cx="4768596" cy="310896"/>
+          </a:xfrm>
+          <a:prstGeom prst="rect">
+            <a:avLst/>
+          </a:prstGeom>
+          <a:noFill/>
+          <a:ln/>
+        </p:spPr>
+        <p:txBody>
+          <a:bodyPr wrap="square" lIns="0" tIns="0" rIns="0" bIns="0" rtlCol="0" anchor="ctr"/>
+          <a:lstStyle/>
+          <a:p>
+            <a:pPr indent="0" marL="0">
+              <a:buNone/>
+            </a:pPr>
+            <a:r>
+              <a:rPr lang="en-US" sz="1800" b="1" dirty="0">
+                <a:solidFill>
+                  <a:srgbClr val="0B0B0B"/>
+                </a:solidFill>
+                <a:latin typeface="Cambria" pitchFamily="34" charset="0"/>
+                <a:ea typeface="Cambria" pitchFamily="34" charset="-122"/>
+                <a:cs typeface="Cambria" pitchFamily="34" charset="-120"/>
+              </a:rPr>
+              <a:t>How we make them</a:t>
+            </a:r>
+            <a:endParaRPr lang="en-US" sz="1800" dirty="0"/>
+          </a:p>
+        </p:txBody>
+      </p:sp>
+      <p:sp>
+        <p:nvSpPr>
+          <p:cNvPr id="7" name="Text 5"/>
+          <p:cNvSpPr txBox="1"/>
+          <p:nvPr/>
+        </p:nvSpPr>
+        <p:spPr>
+          <a:xfrm>
+            <a:off x="877824" y="2167128"/>
+            <a:ext cx="4750308" cy="1417320"/>
+          </a:xfrm>
+          <a:prstGeom prst="rect">
+            <a:avLst/>
+          </a:prstGeom>
+          <a:noFill/>
+          <a:ln/>
+        </p:spPr>
+        <p:txBody>
+          <a:bodyPr wrap="square" lIns="0" tIns="0" rIns="0" bIns="0" rtlCol="0" anchor="t"/>
+          <a:lstStyle/>
+          <a:p>
+            <a:pPr indent="0" marL="0">
+              <a:lnSpc>
+                <a:spcPct val="118000"/>
+              </a:lnSpc>
+              <a:buNone/>
+            </a:pPr>
+            <a:r>
+              <a:rPr lang="en-US" sz="1400" dirty="0">
+                <a:solidFill>
+                  <a:srgbClr val="52514E"/>
+                </a:solidFill>
+                <a:latin typeface="Calibri" pitchFamily="34" charset="0"/>
+                <a:ea typeface="Calibri" pitchFamily="34" charset="-122"/>
+                <a:cs typeface="Calibri" pitchFamily="34" charset="-120"/>
+              </a:rPr>
+              <a:t>Five per run. We ask the cheap model to change exactly one line of logic in the circuit — flip an operator, invert a signal, alter a constant. It must still compile, and no ports may change.</a:t>
+            </a:r>
+            <a:endParaRPr lang="en-US" sz="1400" dirty="0"/>
+          </a:p>
+          <a:p>
+            <a:pPr indent="0" marL="0">
+              <a:lnSpc>
+                <a:spcPct val="118000"/>
+              </a:lnSpc>
+              <a:buNone/>
+            </a:pPr>
+            <a:endParaRPr lang="en-US" sz="1400" dirty="0"/>
+          </a:p>
+          <a:p>
+            <a:pPr indent="0" marL="0">
+              <a:lnSpc>
+                <a:spcPct val="118000"/>
+              </a:lnSpc>
+              <a:buNone/>
+            </a:pPr>
+            <a:r>
+              <a:rPr lang="en-US" sz="1400" dirty="0">
+                <a:solidFill>
+                  <a:srgbClr val="52514E"/>
+                </a:solidFill>
+                <a:latin typeface="Calibri" pitchFamily="34" charset="0"/>
+                <a:ea typeface="Calibri" pitchFamily="34" charset="-122"/>
+                <a:cs typeface="Calibri" pitchFamily="34" charset="-120"/>
+              </a:rPr>
+              <a:t>A copy that will not compile is a bad mutation, not a testbench failure, so it is dropped from both sides of the score.</a:t>
+            </a:r>
+            <a:endParaRPr lang="en-US" sz="1400" dirty="0"/>
+          </a:p>
+        </p:txBody>
+      </p:sp>
+      <p:sp>
+        <p:nvSpPr>
+          <p:cNvPr id="8" name="Shape 6"/>
+          <p:cNvSpPr/>
+          <p:nvPr/>
+        </p:nvSpPr>
+        <p:spPr>
+          <a:xfrm>
+            <a:off x="6323076" y="1600200"/>
+            <a:ext cx="5225796" cy="2331720"/>
+          </a:xfrm>
+          <a:prstGeom prst="roundRect">
+            <a:avLst>
+              <a:gd name="adj" fmla="val 3137"/>
+            </a:avLst>
+          </a:prstGeom>
+          <a:solidFill>
+            <a:srgbClr val="F1F1ED"/>
+          </a:solidFill>
+          <a:ln w="12700">
+            <a:solidFill>
+              <a:srgbClr val="F1F1ED"/>
+            </a:solidFill>
+            <a:prstDash val="solid"/>
+          </a:ln>
+          <a:effectLst>
+            <a:outerShdw sx="100000" sy="100000" kx="0" ky="0" algn="bl" rotWithShape="0" blurRad="76200" dist="381" dir="5400000">
+              <a:srgbClr val="000000">
+                <a:alpha val="7000"/>
+              </a:srgbClr>
+            </a:outerShdw>
+          </a:effectLst>
+        </p:spPr>
+      </p:sp>
+      <p:sp>
+        <p:nvSpPr>
+          <p:cNvPr id="9" name="Text 7"/>
+          <p:cNvSpPr txBox="1"/>
+          <p:nvPr/>
+        </p:nvSpPr>
+        <p:spPr>
+          <a:xfrm>
+            <a:off x="6560820" y="1764792"/>
+            <a:ext cx="4768596" cy="310896"/>
+          </a:xfrm>
+          <a:prstGeom prst="rect">
+            <a:avLst/>
+          </a:prstGeom>
+          <a:noFill/>
+          <a:ln/>
+        </p:spPr>
+        <p:txBody>
+          <a:bodyPr wrap="square" lIns="0" tIns="0" rIns="0" bIns="0" rtlCol="0" anchor="ctr"/>
+          <a:lstStyle/>
+          <a:p>
+            <a:pPr indent="0" marL="0">
+              <a:buNone/>
+            </a:pPr>
+            <a:r>
+              <a:rPr lang="en-US" sz="1800" b="1" dirty="0">
+                <a:solidFill>
+                  <a:srgbClr val="2A78D6"/>
+                </a:solidFill>
+                <a:latin typeface="Cambria" pitchFamily="34" charset="0"/>
+                <a:ea typeface="Cambria" pitchFamily="34" charset="-122"/>
+                <a:cs typeface="Cambria" pitchFamily="34" charset="-120"/>
+              </a:rPr>
+              <a:t>How a testbench scores</a:t>
+            </a:r>
+            <a:endParaRPr lang="en-US" sz="1800" dirty="0"/>
+          </a:p>
+        </p:txBody>
+      </p:sp>
+      <p:sp>
+        <p:nvSpPr>
+          <p:cNvPr id="10" name="Text 8"/>
+          <p:cNvSpPr txBox="1"/>
+          <p:nvPr/>
+        </p:nvSpPr>
+        <p:spPr>
+          <a:xfrm>
+            <a:off x="6560820" y="2167128"/>
+            <a:ext cx="4750308" cy="1417320"/>
+          </a:xfrm>
+          <a:prstGeom prst="rect">
+            <a:avLst/>
+          </a:prstGeom>
+          <a:noFill/>
+          <a:ln/>
+        </p:spPr>
+        <p:txBody>
+          <a:bodyPr wrap="square" lIns="0" tIns="0" rIns="0" bIns="0" rtlCol="0" anchor="t"/>
+          <a:lstStyle/>
+          <a:p>
+            <a:pPr indent="0" marL="0">
+              <a:lnSpc>
+                <a:spcPct val="118000"/>
+              </a:lnSpc>
+              <a:buNone/>
+            </a:pPr>
+            <a:r>
+              <a:rPr lang="en-US" sz="1400" dirty="0">
+                <a:solidFill>
+                  <a:srgbClr val="52514E"/>
+                </a:solidFill>
+                <a:latin typeface="Calibri" pitchFamily="34" charset="0"/>
+                <a:ea typeface="Calibri" pitchFamily="34" charset="-122"/>
+                <a:cs typeface="Calibri" pitchFamily="34" charset="-120"/>
+              </a:rPr>
+              <a:t>We run the same testbench against each broken copy. It catches one if any of its scenarios behaves differently than it did on the good circuit.</a:t>
+            </a:r>
+            <a:endParaRPr lang="en-US" sz="1400" dirty="0"/>
+          </a:p>
+          <a:p>
+            <a:pPr indent="0" marL="0">
+              <a:lnSpc>
+                <a:spcPct val="118000"/>
+              </a:lnSpc>
+              <a:buNone/>
+            </a:pPr>
+            <a:endParaRPr lang="en-US" sz="1400" dirty="0"/>
+          </a:p>
+          <a:p>
+            <a:pPr indent="0" marL="0">
+              <a:lnSpc>
+                <a:spcPct val="118000"/>
+              </a:lnSpc>
+              <a:buNone/>
+            </a:pPr>
+            <a:r>
+              <a:rPr lang="en-US" sz="1400" dirty="0">
+                <a:solidFill>
+                  <a:srgbClr val="52514E"/>
+                </a:solidFill>
+                <a:latin typeface="Calibri" pitchFamily="34" charset="0"/>
+                <a:ea typeface="Calibri" pitchFamily="34" charset="-122"/>
+                <a:cs typeface="Calibri" pitchFamily="34" charset="-120"/>
+              </a:rPr>
+              <a:t>If none of them happens to exercise the situation where that bug shows up, the testbench sees no difference and reports PASS. The mutant escapes.</a:t>
+            </a:r>
+            <a:endParaRPr lang="en-US" sz="1400" dirty="0"/>
+          </a:p>
+        </p:txBody>
+      </p:sp>
+      <p:sp>
+        <p:nvSpPr>
+          <p:cNvPr id="11" name="Text 9"/>
+          <p:cNvSpPr txBox="1"/>
+          <p:nvPr/>
+        </p:nvSpPr>
+        <p:spPr>
+          <a:xfrm>
+            <a:off x="640080" y="4142232"/>
+            <a:ext cx="10908792" cy="365760"/>
+          </a:xfrm>
+          <a:prstGeom prst="rect">
+            <a:avLst/>
+          </a:prstGeom>
+          <a:noFill/>
+          <a:ln/>
+        </p:spPr>
+        <p:txBody>
+          <a:bodyPr wrap="square" lIns="0" tIns="0" rIns="0" bIns="0" rtlCol="0" anchor="ctr"/>
+          <a:lstStyle/>
+          <a:p>
+            <a:pPr algn="ctr" indent="0" marL="0">
+              <a:buNone/>
+            </a:pPr>
+            <a:r>
+              <a:rPr lang="en-US" sz="1900" b="1" dirty="0">
+                <a:solidFill>
+                  <a:srgbClr val="0B0B0B"/>
+                </a:solidFill>
+                <a:latin typeface="Cambria" pitchFamily="34" charset="0"/>
+                <a:ea typeface="Cambria" pitchFamily="34" charset="-122"/>
+                <a:cs typeface="Cambria" pitchFamily="34" charset="-120"/>
+              </a:rPr>
+              <a:t>Which is why circuit size decides the score, not testbench quality</a:t>
+            </a:r>
+            <a:endParaRPr lang="en-US" sz="1900" dirty="0"/>
+          </a:p>
+        </p:txBody>
+      </p:sp>
+      <p:graphicFrame>
+        <p:nvGraphicFramePr>
+          <p:cNvPr id="21" name="Table 0"/>
+          <p:cNvGraphicFramePr>
+            <a:graphicFrameLocks noGrp="1"/>
+          </p:cNvGraphicFramePr>
+          <p:nvPr>
+            <p:extLst>
+              <p:ext uri="{D42A27DB-BD31-4B8C-83A1-F6EECF244321}">
+                <p14:modId xmlns:p14="http://schemas.microsoft.com/office/powerpoint/2010/main" val="1579011935"/>
+              </p:ext>
+            </p:extLst>
+          </p:nvPr>
+        </p:nvGraphicFramePr>
+        <p:xfrm>
+          <a:off x="1463040" y="4544568"/>
+          <a:ext cx="9262872" cy="914400"/>
+        </p:xfrm>
+        <a:graphic>
+          <a:graphicData uri="http://schemas.openxmlformats.org/drawingml/2006/table">
+            <a:tbl>
+              <a:tblPr/>
+              <a:tblGrid>
+                <a:gridCol w="3200400"/>
+                <a:gridCol w="2286000"/>
+                <a:gridCol w="2103120"/>
+                <a:gridCol w="1673352"/>
+              </a:tblGrid>
+              <a:tr h="310896">
+                <a:tc>
+                  <a:txBody>
+                    <a:bodyPr/>
+                    <a:lstStyle/>
+                    <a:p>
+                      <a:pPr indent="0" marL="0">
+                        <a:buNone/>
+                      </a:pPr>
+                      <a:r>
+                        <a:rPr lang="en-US" sz="1400" b="1" dirty="0">
+                          <a:solidFill>
+                            <a:srgbClr val="0B0B0B"/>
+                          </a:solidFill>
+                          <a:latin typeface="Calibri" pitchFamily="34" charset="0"/>
+                          <a:ea typeface="Calibri" pitchFamily="34" charset="-122"/>
+                          <a:cs typeface="Calibri" pitchFamily="34" charset="-120"/>
+                        </a:rPr>
+                        <a:t>Circuit</a:t>
+                      </a:r>
+                      <a:endParaRPr lang="en-US" sz="1400" dirty="0">
+                        <a:latin typeface="Calibri" charset="0"/>
+                        <a:ea typeface="Calibri" charset="0"/>
+                        <a:cs typeface="Calibri" charset="0"/>
+                      </a:endParaRPr>
+                    </a:p>
+                  </a:txBody>
+                  <a:tcPr marL="76200" marR="76200" marT="76200" marB="76200" anchor="ctr">
+                    <a:lnL w="12700" cap="flat" cmpd="sng" algn="ctr">
+                      <a:solidFill>
+                        <a:srgbClr val="E2E1DC"/>
+                      </a:solidFill>
+                      <a:prstDash val="solid"/>
+                      <a:round/>
+                      <a:headEnd type="none" w="med" len="med"/>
+                      <a:tailEnd type="none" w="med" len="med"/>
+                    </a:lnL>
+                    <a:lnR w="12700" cap="flat" cmpd="sng" algn="ctr">
+                      <a:solidFill>
+                        <a:srgbClr val="E2E1DC"/>
+                      </a:solidFill>
+                      <a:prstDash val="solid"/>
+                      <a:round/>
+                      <a:headEnd type="none" w="med" len="med"/>
+                      <a:tailEnd type="none" w="med" len="med"/>
+                    </a:lnR>
+                    <a:lnT w="12700" cap="flat" cmpd="sng" algn="ctr">
+                      <a:solidFill>
+                        <a:srgbClr val="E2E1DC"/>
+                      </a:solidFill>
+                      <a:prstDash val="solid"/>
+                      <a:round/>
+                      <a:headEnd type="none" w="med" len="med"/>
+                      <a:tailEnd type="none" w="med" len="med"/>
+                    </a:lnT>
+                    <a:lnB w="12700" cap="flat" cmpd="sng" algn="ctr">
+                      <a:solidFill>
+                        <a:srgbClr val="E2E1DC"/>
+                      </a:solidFill>
+                      <a:prstDash val="solid"/>
+                      <a:round/>
+                      <a:headEnd type="none" w="med" len="med"/>
+                      <a:tailEnd type="none" w="med" len="med"/>
+                    </a:lnB>
+                    <a:solidFill>
+                      <a:srgbClr val="F1F1ED"/>
+                    </a:solidFill>
+                  </a:tcPr>
+                </a:tc>
+                <a:tc>
+                  <a:txBody>
+                    <a:bodyPr/>
+                    <a:lstStyle/>
+                    <a:p>
+                      <a:pPr indent="0" marL="0">
+                        <a:buNone/>
+                      </a:pPr>
+                      <a:r>
+                        <a:rPr lang="en-US" sz="1400" b="1" dirty="0">
+                          <a:solidFill>
+                            <a:srgbClr val="0B0B0B"/>
+                          </a:solidFill>
+                          <a:latin typeface="Calibri" pitchFamily="34" charset="0"/>
+                          <a:ea typeface="Calibri" pitchFamily="34" charset="-122"/>
+                          <a:cs typeface="Calibri" pitchFamily="34" charset="-120"/>
+                        </a:rPr>
+                        <a:t>Input combinations</a:t>
+                      </a:r>
+                      <a:endParaRPr lang="en-US" sz="1400" dirty="0">
+                        <a:latin typeface="Calibri" charset="0"/>
+                        <a:ea typeface="Calibri" charset="0"/>
+                        <a:cs typeface="Calibri" charset="0"/>
+                      </a:endParaRPr>
+                    </a:p>
+                  </a:txBody>
+                  <a:tcPr marL="76200" marR="76200" marT="76200" marB="76200" anchor="ctr">
+                    <a:lnL w="12700" cap="flat" cmpd="sng" algn="ctr">
+                      <a:solidFill>
+                        <a:srgbClr val="E2E1DC"/>
+                      </a:solidFill>
+                      <a:prstDash val="solid"/>
+                      <a:round/>
+                      <a:headEnd type="none" w="med" len="med"/>
+                      <a:tailEnd type="none" w="med" len="med"/>
+                    </a:lnL>
+                    <a:lnR w="12700" cap="flat" cmpd="sng" algn="ctr">
+                      <a:solidFill>
+                        <a:srgbClr val="E2E1DC"/>
+                      </a:solidFill>
+                      <a:prstDash val="solid"/>
+                      <a:round/>
+                      <a:headEnd type="none" w="med" len="med"/>
+                      <a:tailEnd type="none" w="med" len="med"/>
+                    </a:lnR>
+                    <a:lnT w="12700" cap="flat" cmpd="sng" algn="ctr">
+                      <a:solidFill>
+                        <a:srgbClr val="E2E1DC"/>
+                      </a:solidFill>
+                      <a:prstDash val="solid"/>
+                      <a:round/>
+                      <a:headEnd type="none" w="med" len="med"/>
+                      <a:tailEnd type="none" w="med" len="med"/>
+                    </a:lnT>
+                    <a:lnB w="12700" cap="flat" cmpd="sng" algn="ctr">
+                      <a:solidFill>
+                        <a:srgbClr val="E2E1DC"/>
+                      </a:solidFill>
+                      <a:prstDash val="solid"/>
+                      <a:round/>
+                      <a:headEnd type="none" w="med" len="med"/>
+                      <a:tailEnd type="none" w="med" len="med"/>
+                    </a:lnB>
+                    <a:solidFill>
+                      <a:srgbClr val="F1F1ED"/>
+                    </a:solidFill>
+                  </a:tcPr>
+                </a:tc>
+                <a:tc>
+                  <a:txBody>
+                    <a:bodyPr/>
+                    <a:lstStyle/>
+                    <a:p>
+                      <a:pPr indent="0" marL="0">
+                        <a:buNone/>
+                      </a:pPr>
+                      <a:r>
+                        <a:rPr lang="en-US" sz="1400" b="1" dirty="0">
+                          <a:solidFill>
+                            <a:srgbClr val="0B0B0B"/>
+                          </a:solidFill>
+                          <a:latin typeface="Calibri" pitchFamily="34" charset="0"/>
+                          <a:ea typeface="Calibri" pitchFamily="34" charset="-122"/>
+                          <a:cs typeface="Calibri" pitchFamily="34" charset="-120"/>
+                        </a:rPr>
+                        <a:t>Our 8 scenarios cover</a:t>
+                      </a:r>
+                      <a:endParaRPr lang="en-US" sz="1400" dirty="0">
+                        <a:latin typeface="Calibri" charset="0"/>
+                        <a:ea typeface="Calibri" charset="0"/>
+                        <a:cs typeface="Calibri" charset="0"/>
+                      </a:endParaRPr>
+                    </a:p>
+                  </a:txBody>
+                  <a:tcPr marL="76200" marR="76200" marT="76200" marB="76200" anchor="ctr">
+                    <a:lnL w="12700" cap="flat" cmpd="sng" algn="ctr">
+                      <a:solidFill>
+                        <a:srgbClr val="E2E1DC"/>
+                      </a:solidFill>
+                      <a:prstDash val="solid"/>
+                      <a:round/>
+                      <a:headEnd type="none" w="med" len="med"/>
+                      <a:tailEnd type="none" w="med" len="med"/>
+                    </a:lnL>
+                    <a:lnR w="12700" cap="flat" cmpd="sng" algn="ctr">
+                      <a:solidFill>
+                        <a:srgbClr val="E2E1DC"/>
+                      </a:solidFill>
+                      <a:prstDash val="solid"/>
+                      <a:round/>
+                      <a:headEnd type="none" w="med" len="med"/>
+                      <a:tailEnd type="none" w="med" len="med"/>
+                    </a:lnR>
+                    <a:lnT w="12700" cap="flat" cmpd="sng" algn="ctr">
+                      <a:solidFill>
+                        <a:srgbClr val="E2E1DC"/>
+                      </a:solidFill>
+                      <a:prstDash val="solid"/>
+                      <a:round/>
+                      <a:headEnd type="none" w="med" len="med"/>
+                      <a:tailEnd type="none" w="med" len="med"/>
+                    </a:lnT>
+                    <a:lnB w="12700" cap="flat" cmpd="sng" algn="ctr">
+                      <a:solidFill>
+                        <a:srgbClr val="E2E1DC"/>
+                      </a:solidFill>
+                      <a:prstDash val="solid"/>
+                      <a:round/>
+                      <a:headEnd type="none" w="med" len="med"/>
+                      <a:tailEnd type="none" w="med" len="med"/>
+                    </a:lnB>
+                    <a:solidFill>
+                      <a:srgbClr val="F1F1ED"/>
+                    </a:solidFill>
+                  </a:tcPr>
+                </a:tc>
+                <a:tc>
+                  <a:txBody>
+                    <a:bodyPr/>
+                    <a:lstStyle/>
+                    <a:p>
+                      <a:pPr indent="0" marL="0">
+                        <a:buNone/>
+                      </a:pPr>
+                      <a:r>
+                        <a:rPr lang="en-US" sz="1400" b="1" dirty="0">
+                          <a:solidFill>
+                            <a:srgbClr val="0B0B0B"/>
+                          </a:solidFill>
+                          <a:latin typeface="Calibri" pitchFamily="34" charset="0"/>
+                          <a:ea typeface="Calibri" pitchFamily="34" charset="-122"/>
+                          <a:cs typeface="Calibri" pitchFamily="34" charset="-120"/>
+                        </a:rPr>
+                        <a:t>Caught</a:t>
+                      </a:r>
+                      <a:endParaRPr lang="en-US" sz="1400" dirty="0">
+                        <a:latin typeface="Calibri" charset="0"/>
+                        <a:ea typeface="Calibri" charset="0"/>
+                        <a:cs typeface="Calibri" charset="0"/>
+                      </a:endParaRPr>
+                    </a:p>
+                  </a:txBody>
+                  <a:tcPr marL="76200" marR="76200" marT="76200" marB="76200" anchor="ctr">
+                    <a:lnL w="12700" cap="flat" cmpd="sng" algn="ctr">
+                      <a:solidFill>
+                        <a:srgbClr val="E2E1DC"/>
+                      </a:solidFill>
+                      <a:prstDash val="solid"/>
+                      <a:round/>
+                      <a:headEnd type="none" w="med" len="med"/>
+                      <a:tailEnd type="none" w="med" len="med"/>
+                    </a:lnL>
+                    <a:lnR w="12700" cap="flat" cmpd="sng" algn="ctr">
+                      <a:solidFill>
+                        <a:srgbClr val="E2E1DC"/>
+                      </a:solidFill>
+                      <a:prstDash val="solid"/>
+                      <a:round/>
+                      <a:headEnd type="none" w="med" len="med"/>
+                      <a:tailEnd type="none" w="med" len="med"/>
+                    </a:lnR>
+                    <a:lnT w="12700" cap="flat" cmpd="sng" algn="ctr">
+                      <a:solidFill>
+                        <a:srgbClr val="E2E1DC"/>
+                      </a:solidFill>
+                      <a:prstDash val="solid"/>
+                      <a:round/>
+                      <a:headEnd type="none" w="med" len="med"/>
+                      <a:tailEnd type="none" w="med" len="med"/>
+                    </a:lnT>
+                    <a:lnB w="12700" cap="flat" cmpd="sng" algn="ctr">
+                      <a:solidFill>
+                        <a:srgbClr val="E2E1DC"/>
+                      </a:solidFill>
+                      <a:prstDash val="solid"/>
+                      <a:round/>
+                      <a:headEnd type="none" w="med" len="med"/>
+                      <a:tailEnd type="none" w="med" len="med"/>
+                    </a:lnB>
+                    <a:solidFill>
+                      <a:srgbClr val="F1F1ED"/>
+                    </a:solidFill>
+                  </a:tcPr>
+                </a:tc>
+              </a:tr>
+              <a:tr h="310896">
+                <a:tc>
+                  <a:txBody>
+                    <a:bodyPr/>
+                    <a:lstStyle/>
+                    <a:p>
+                      <a:pPr indent="0" marL="0">
+                        <a:buNone/>
+                      </a:pPr>
+                      <a:r>
+                        <a:rPr lang="en-US" sz="1400" b="1" dirty="0">
+                          <a:solidFill>
+                            <a:srgbClr val="0B0B0B"/>
+                          </a:solidFill>
+                          <a:latin typeface="Calibri" pitchFamily="34" charset="0"/>
+                          <a:ea typeface="Calibri" pitchFamily="34" charset="-122"/>
+                          <a:cs typeface="Calibri" pitchFamily="34" charset="-120"/>
+                        </a:rPr>
+                        <a:t>dff  — one input bit</a:t>
+                      </a:r>
+                      <a:endParaRPr lang="en-US" sz="1400" dirty="0">
+                        <a:latin typeface="Calibri" charset="0"/>
+                        <a:ea typeface="Calibri" charset="0"/>
+                        <a:cs typeface="Calibri" charset="0"/>
+                      </a:endParaRPr>
+                    </a:p>
+                  </a:txBody>
+                  <a:tcPr marL="76200" marR="76200" marT="76200" marB="76200" anchor="ctr">
+                    <a:lnL w="12700" cap="flat" cmpd="sng" algn="ctr">
+                      <a:solidFill>
+                        <a:srgbClr val="E2E1DC"/>
+                      </a:solidFill>
+                      <a:prstDash val="solid"/>
+                      <a:round/>
+                      <a:headEnd type="none" w="med" len="med"/>
+                      <a:tailEnd type="none" w="med" len="med"/>
+                    </a:lnL>
+                    <a:lnR w="12700" cap="flat" cmpd="sng" algn="ctr">
+                      <a:solidFill>
+                        <a:srgbClr val="E2E1DC"/>
+                      </a:solidFill>
+                      <a:prstDash val="solid"/>
+                      <a:round/>
+                      <a:headEnd type="none" w="med" len="med"/>
+                      <a:tailEnd type="none" w="med" len="med"/>
+                    </a:lnR>
+                    <a:lnT w="12700" cap="flat" cmpd="sng" algn="ctr">
+                      <a:solidFill>
+                        <a:srgbClr val="E2E1DC"/>
+                      </a:solidFill>
+                      <a:prstDash val="solid"/>
+                      <a:round/>
+                      <a:headEnd type="none" w="med" len="med"/>
+                      <a:tailEnd type="none" w="med" len="med"/>
+                    </a:lnT>
+                    <a:lnB w="12700" cap="flat" cmpd="sng" algn="ctr">
+                      <a:solidFill>
+                        <a:srgbClr val="E2E1DC"/>
+                      </a:solidFill>
+                      <a:prstDash val="solid"/>
+                      <a:round/>
+                      <a:headEnd type="none" w="med" len="med"/>
+                      <a:tailEnd type="none" w="med" len="med"/>
+                    </a:lnB>
+                    <a:solidFill>
+                      <a:srgbClr val="FFFFFF"/>
+                    </a:solidFill>
+                  </a:tcPr>
+                </a:tc>
+                <a:tc>
+                  <a:txBody>
+                    <a:bodyPr/>
+                    <a:lstStyle/>
+                    <a:p>
+                      <a:pPr indent="0" marL="0">
+                        <a:buNone/>
+                      </a:pPr>
+                      <a:r>
+                        <a:rPr lang="en-US" sz="1400" dirty="0">
+                          <a:solidFill>
+                            <a:srgbClr val="0B0B0B"/>
+                          </a:solidFill>
+                          <a:latin typeface="Calibri" pitchFamily="34" charset="0"/>
+                          <a:ea typeface="Calibri" pitchFamily="34" charset="-122"/>
+                          <a:cs typeface="Calibri" pitchFamily="34" charset="-120"/>
+                        </a:rPr>
+                        <a:t>2</a:t>
+                      </a:r>
+                      <a:endParaRPr lang="en-US" sz="1400" dirty="0">
+                        <a:latin typeface="Calibri" charset="0"/>
+                        <a:ea typeface="Calibri" charset="0"/>
+                        <a:cs typeface="Calibri" charset="0"/>
+                      </a:endParaRPr>
+                    </a:p>
+                  </a:txBody>
+                  <a:tcPr marL="76200" marR="76200" marT="76200" marB="76200" anchor="ctr">
+                    <a:lnL w="12700" cap="flat" cmpd="sng" algn="ctr">
+                      <a:solidFill>
+                        <a:srgbClr val="E2E1DC"/>
+                      </a:solidFill>
+                      <a:prstDash val="solid"/>
+                      <a:round/>
+                      <a:headEnd type="none" w="med" len="med"/>
+                      <a:tailEnd type="none" w="med" len="med"/>
+                    </a:lnL>
+                    <a:lnR w="12700" cap="flat" cmpd="sng" algn="ctr">
+                      <a:solidFill>
+                        <a:srgbClr val="E2E1DC"/>
+                      </a:solidFill>
+                      <a:prstDash val="solid"/>
+                      <a:round/>
+                      <a:headEnd type="none" w="med" len="med"/>
+                      <a:tailEnd type="none" w="med" len="med"/>
+                    </a:lnR>
+                    <a:lnT w="12700" cap="flat" cmpd="sng" algn="ctr">
+                      <a:solidFill>
+                        <a:srgbClr val="E2E1DC"/>
+                      </a:solidFill>
+                      <a:prstDash val="solid"/>
+                      <a:round/>
+                      <a:headEnd type="none" w="med" len="med"/>
+                      <a:tailEnd type="none" w="med" len="med"/>
+                    </a:lnT>
+                    <a:lnB w="12700" cap="flat" cmpd="sng" algn="ctr">
+                      <a:solidFill>
+                        <a:srgbClr val="E2E1DC"/>
+                      </a:solidFill>
+                      <a:prstDash val="solid"/>
+                      <a:round/>
+                      <a:headEnd type="none" w="med" len="med"/>
+                      <a:tailEnd type="none" w="med" len="med"/>
+                    </a:lnB>
+                    <a:solidFill>
+                      <a:srgbClr val="FFFFFF"/>
+                    </a:solidFill>
+                  </a:tcPr>
+                </a:tc>
+                <a:tc>
+                  <a:txBody>
+                    <a:bodyPr/>
+                    <a:lstStyle/>
+                    <a:p>
+                      <a:pPr indent="0" marL="0">
+                        <a:buNone/>
+                      </a:pPr>
+                      <a:r>
+                        <a:rPr lang="en-US" sz="1400" dirty="0">
+                          <a:solidFill>
+                            <a:srgbClr val="2A78D6"/>
+                          </a:solidFill>
+                          <a:latin typeface="Calibri" pitchFamily="34" charset="0"/>
+                          <a:ea typeface="Calibri" pitchFamily="34" charset="-122"/>
+                          <a:cs typeface="Calibri" pitchFamily="34" charset="-120"/>
+                        </a:rPr>
+                        <a:t>all of them</a:t>
+                      </a:r>
+                      <a:endParaRPr lang="en-US" sz="1400" dirty="0">
+                        <a:latin typeface="Calibri" charset="0"/>
+                        <a:ea typeface="Calibri" charset="0"/>
+                        <a:cs typeface="Calibri" charset="0"/>
+                      </a:endParaRPr>
+                    </a:p>
+                  </a:txBody>
+                  <a:tcPr marL="76200" marR="76200" marT="76200" marB="76200" anchor="ctr">
+                    <a:lnL w="12700" cap="flat" cmpd="sng" algn="ctr">
+                      <a:solidFill>
+                        <a:srgbClr val="E2E1DC"/>
+                      </a:solidFill>
+                      <a:prstDash val="solid"/>
+                      <a:round/>
+                      <a:headEnd type="none" w="med" len="med"/>
+                      <a:tailEnd type="none" w="med" len="med"/>
+                    </a:lnL>
+                    <a:lnR w="12700" cap="flat" cmpd="sng" algn="ctr">
+                      <a:solidFill>
+                        <a:srgbClr val="E2E1DC"/>
+                      </a:solidFill>
+                      <a:prstDash val="solid"/>
+                      <a:round/>
+                      <a:headEnd type="none" w="med" len="med"/>
+                      <a:tailEnd type="none" w="med" len="med"/>
+                    </a:lnR>
+                    <a:lnT w="12700" cap="flat" cmpd="sng" algn="ctr">
+                      <a:solidFill>
+                        <a:srgbClr val="E2E1DC"/>
+                      </a:solidFill>
+                      <a:prstDash val="solid"/>
+                      <a:round/>
+                      <a:headEnd type="none" w="med" len="med"/>
+                      <a:tailEnd type="none" w="med" len="med"/>
+                    </a:lnT>
+                    <a:lnB w="12700" cap="flat" cmpd="sng" algn="ctr">
+                      <a:solidFill>
+                        <a:srgbClr val="E2E1DC"/>
+                      </a:solidFill>
+                      <a:prstDash val="solid"/>
+                      <a:round/>
+                      <a:headEnd type="none" w="med" len="med"/>
+                      <a:tailEnd type="none" w="med" len="med"/>
+                    </a:lnB>
+                    <a:solidFill>
+                      <a:srgbClr val="FFFFFF"/>
+                    </a:solidFill>
+                  </a:tcPr>
+                </a:tc>
+                <a:tc>
+                  <a:txBody>
+                    <a:bodyPr/>
+                    <a:lstStyle/>
+                    <a:p>
+                      <a:pPr indent="0" marL="0">
+                        <a:buNone/>
+                      </a:pPr>
+                      <a:r>
+                        <a:rPr lang="en-US" sz="1400" b="1" dirty="0">
+                          <a:solidFill>
+                            <a:srgbClr val="2A78D6"/>
+                          </a:solidFill>
+                          <a:latin typeface="Calibri" pitchFamily="34" charset="0"/>
+                          <a:ea typeface="Calibri" pitchFamily="34" charset="-122"/>
+                          <a:cs typeface="Calibri" pitchFamily="34" charset="-120"/>
+                        </a:rPr>
+                        <a:t>95%</a:t>
+                      </a:r>
+                      <a:endParaRPr lang="en-US" sz="1400" dirty="0">
+                        <a:latin typeface="Calibri" charset="0"/>
+                        <a:ea typeface="Calibri" charset="0"/>
+                        <a:cs typeface="Calibri" charset="0"/>
+                      </a:endParaRPr>
+                    </a:p>
+                  </a:txBody>
+                  <a:tcPr marL="76200" marR="76200" marT="76200" marB="76200" anchor="ctr">
+                    <a:lnL w="12700" cap="flat" cmpd="sng" algn="ctr">
+                      <a:solidFill>
+                        <a:srgbClr val="E2E1DC"/>
+                      </a:solidFill>
+                      <a:prstDash val="solid"/>
+                      <a:round/>
+                      <a:headEnd type="none" w="med" len="med"/>
+                      <a:tailEnd type="none" w="med" len="med"/>
+                    </a:lnL>
+                    <a:lnR w="12700" cap="flat" cmpd="sng" algn="ctr">
+                      <a:solidFill>
+                        <a:srgbClr val="E2E1DC"/>
+                      </a:solidFill>
+                      <a:prstDash val="solid"/>
+                      <a:round/>
+                      <a:headEnd type="none" w="med" len="med"/>
+                      <a:tailEnd type="none" w="med" len="med"/>
+                    </a:lnR>
+                    <a:lnT w="12700" cap="flat" cmpd="sng" algn="ctr">
+                      <a:solidFill>
+                        <a:srgbClr val="E2E1DC"/>
+                      </a:solidFill>
+                      <a:prstDash val="solid"/>
+                      <a:round/>
+                      <a:headEnd type="none" w="med" len="med"/>
+                      <a:tailEnd type="none" w="med" len="med"/>
+                    </a:lnT>
+                    <a:lnB w="12700" cap="flat" cmpd="sng" algn="ctr">
+                      <a:solidFill>
+                        <a:srgbClr val="E2E1DC"/>
+                      </a:solidFill>
+                      <a:prstDash val="solid"/>
+                      <a:round/>
+                      <a:headEnd type="none" w="med" len="med"/>
+                      <a:tailEnd type="none" w="med" len="med"/>
+                    </a:lnB>
+                    <a:solidFill>
+                      <a:srgbClr val="FFFFFF"/>
+                    </a:solidFill>
+                  </a:tcPr>
+                </a:tc>
+              </a:tr>
+              <a:tr h="310896">
+                <a:tc>
+                  <a:txBody>
+                    <a:bodyPr/>
+                    <a:lstStyle/>
+                    <a:p>
+                      <a:pPr indent="0" marL="0">
+                        <a:buNone/>
+                      </a:pPr>
+                      <a:r>
+                        <a:rPr lang="en-US" sz="1400" b="1" dirty="0">
+                          <a:solidFill>
+                            <a:srgbClr val="0B0B0B"/>
+                          </a:solidFill>
+                          <a:latin typeface="Calibri" pitchFamily="34" charset="0"/>
+                          <a:ea typeface="Calibri" pitchFamily="34" charset="-122"/>
+                          <a:cs typeface="Calibri" pitchFamily="34" charset="-120"/>
+                        </a:rPr>
+                        <a:t>Prob081_7458  — ten input bits</a:t>
+                      </a:r>
+                      <a:endParaRPr lang="en-US" sz="1400" dirty="0">
+                        <a:latin typeface="Calibri" charset="0"/>
+                        <a:ea typeface="Calibri" charset="0"/>
+                        <a:cs typeface="Calibri" charset="0"/>
+                      </a:endParaRPr>
+                    </a:p>
+                  </a:txBody>
+                  <a:tcPr marL="76200" marR="76200" marT="76200" marB="76200" anchor="ctr">
+                    <a:lnL w="12700" cap="flat" cmpd="sng" algn="ctr">
+                      <a:solidFill>
+                        <a:srgbClr val="E2E1DC"/>
+                      </a:solidFill>
+                      <a:prstDash val="solid"/>
+                      <a:round/>
+                      <a:headEnd type="none" w="med" len="med"/>
+                      <a:tailEnd type="none" w="med" len="med"/>
+                    </a:lnL>
+                    <a:lnR w="12700" cap="flat" cmpd="sng" algn="ctr">
+                      <a:solidFill>
+                        <a:srgbClr val="E2E1DC"/>
+                      </a:solidFill>
+                      <a:prstDash val="solid"/>
+                      <a:round/>
+                      <a:headEnd type="none" w="med" len="med"/>
+                      <a:tailEnd type="none" w="med" len="med"/>
+                    </a:lnR>
+                    <a:lnT w="12700" cap="flat" cmpd="sng" algn="ctr">
+                      <a:solidFill>
+                        <a:srgbClr val="E2E1DC"/>
+                      </a:solidFill>
+                      <a:prstDash val="solid"/>
+                      <a:round/>
+                      <a:headEnd type="none" w="med" len="med"/>
+                      <a:tailEnd type="none" w="med" len="med"/>
+                    </a:lnT>
+                    <a:lnB w="12700" cap="flat" cmpd="sng" algn="ctr">
+                      <a:solidFill>
+                        <a:srgbClr val="E2E1DC"/>
+                      </a:solidFill>
+                      <a:prstDash val="solid"/>
+                      <a:round/>
+                      <a:headEnd type="none" w="med" len="med"/>
+                      <a:tailEnd type="none" w="med" len="med"/>
+                    </a:lnB>
+                    <a:solidFill>
+                      <a:srgbClr val="FFFFFF"/>
+                    </a:solidFill>
+                  </a:tcPr>
+                </a:tc>
+                <a:tc>
+                  <a:txBody>
+                    <a:bodyPr/>
+                    <a:lstStyle/>
+                    <a:p>
+                      <a:pPr indent="0" marL="0">
+                        <a:buNone/>
+                      </a:pPr>
+                      <a:r>
+                        <a:rPr lang="en-US" sz="1400" dirty="0">
+                          <a:solidFill>
+                            <a:srgbClr val="0B0B0B"/>
+                          </a:solidFill>
+                          <a:latin typeface="Calibri" pitchFamily="34" charset="0"/>
+                          <a:ea typeface="Calibri" pitchFamily="34" charset="-122"/>
+                          <a:cs typeface="Calibri" pitchFamily="34" charset="-120"/>
+                        </a:rPr>
+                        <a:t>1,024</a:t>
+                      </a:r>
+                      <a:endParaRPr lang="en-US" sz="1400" dirty="0">
+                        <a:latin typeface="Calibri" charset="0"/>
+                        <a:ea typeface="Calibri" charset="0"/>
+                        <a:cs typeface="Calibri" charset="0"/>
+                      </a:endParaRPr>
+                    </a:p>
+                  </a:txBody>
+                  <a:tcPr marL="76200" marR="76200" marT="76200" marB="76200" anchor="ctr">
+                    <a:lnL w="12700" cap="flat" cmpd="sng" algn="ctr">
+                      <a:solidFill>
+                        <a:srgbClr val="E2E1DC"/>
+                      </a:solidFill>
+                      <a:prstDash val="solid"/>
+                      <a:round/>
+                      <a:headEnd type="none" w="med" len="med"/>
+                      <a:tailEnd type="none" w="med" len="med"/>
+                    </a:lnL>
+                    <a:lnR w="12700" cap="flat" cmpd="sng" algn="ctr">
+                      <a:solidFill>
+                        <a:srgbClr val="E2E1DC"/>
+                      </a:solidFill>
+                      <a:prstDash val="solid"/>
+                      <a:round/>
+                      <a:headEnd type="none" w="med" len="med"/>
+                      <a:tailEnd type="none" w="med" len="med"/>
+                    </a:lnR>
+                    <a:lnT w="12700" cap="flat" cmpd="sng" algn="ctr">
+                      <a:solidFill>
+                        <a:srgbClr val="E2E1DC"/>
+                      </a:solidFill>
+                      <a:prstDash val="solid"/>
+                      <a:round/>
+                      <a:headEnd type="none" w="med" len="med"/>
+                      <a:tailEnd type="none" w="med" len="med"/>
+                    </a:lnT>
+                    <a:lnB w="12700" cap="flat" cmpd="sng" algn="ctr">
+                      <a:solidFill>
+                        <a:srgbClr val="E2E1DC"/>
+                      </a:solidFill>
+                      <a:prstDash val="solid"/>
+                      <a:round/>
+                      <a:headEnd type="none" w="med" len="med"/>
+                      <a:tailEnd type="none" w="med" len="med"/>
+                    </a:lnB>
+                    <a:solidFill>
+                      <a:srgbClr val="FFFFFF"/>
+                    </a:solidFill>
+                  </a:tcPr>
+                </a:tc>
+                <a:tc>
+                  <a:txBody>
+                    <a:bodyPr/>
+                    <a:lstStyle/>
+                    <a:p>
+                      <a:pPr indent="0" marL="0">
+                        <a:buNone/>
+                      </a:pPr>
+                      <a:r>
+                        <a:rPr lang="en-US" sz="1400" dirty="0">
+                          <a:solidFill>
+                            <a:srgbClr val="EB6834"/>
+                          </a:solidFill>
+                          <a:latin typeface="Calibri" pitchFamily="34" charset="0"/>
+                          <a:ea typeface="Calibri" pitchFamily="34" charset="-122"/>
+                          <a:cs typeface="Calibri" pitchFamily="34" charset="-120"/>
+                        </a:rPr>
+                        <a:t>under 1%</a:t>
+                      </a:r>
+                      <a:endParaRPr lang="en-US" sz="1400" dirty="0">
+                        <a:latin typeface="Calibri" charset="0"/>
+                        <a:ea typeface="Calibri" charset="0"/>
+                        <a:cs typeface="Calibri" charset="0"/>
+                      </a:endParaRPr>
+                    </a:p>
+                  </a:txBody>
+                  <a:tcPr marL="76200" marR="76200" marT="76200" marB="76200" anchor="ctr">
+                    <a:lnL w="12700" cap="flat" cmpd="sng" algn="ctr">
+                      <a:solidFill>
+                        <a:srgbClr val="E2E1DC"/>
+                      </a:solidFill>
+                      <a:prstDash val="solid"/>
+                      <a:round/>
+                      <a:headEnd type="none" w="med" len="med"/>
+                      <a:tailEnd type="none" w="med" len="med"/>
+                    </a:lnL>
+                    <a:lnR w="12700" cap="flat" cmpd="sng" algn="ctr">
+                      <a:solidFill>
+                        <a:srgbClr val="E2E1DC"/>
+                      </a:solidFill>
+                      <a:prstDash val="solid"/>
+                      <a:round/>
+                      <a:headEnd type="none" w="med" len="med"/>
+                      <a:tailEnd type="none" w="med" len="med"/>
+                    </a:lnR>
+                    <a:lnT w="12700" cap="flat" cmpd="sng" algn="ctr">
+                      <a:solidFill>
+                        <a:srgbClr val="E2E1DC"/>
+                      </a:solidFill>
+                      <a:prstDash val="solid"/>
+                      <a:round/>
+                      <a:headEnd type="none" w="med" len="med"/>
+                      <a:tailEnd type="none" w="med" len="med"/>
+                    </a:lnT>
+                    <a:lnB w="12700" cap="flat" cmpd="sng" algn="ctr">
+                      <a:solidFill>
+                        <a:srgbClr val="E2E1DC"/>
+                      </a:solidFill>
+                      <a:prstDash val="solid"/>
+                      <a:round/>
+                      <a:headEnd type="none" w="med" len="med"/>
+                      <a:tailEnd type="none" w="med" len="med"/>
+                    </a:lnB>
+                    <a:solidFill>
+                      <a:srgbClr val="FFFFFF"/>
+                    </a:solidFill>
+                  </a:tcPr>
+                </a:tc>
+                <a:tc>
+                  <a:txBody>
+                    <a:bodyPr/>
+                    <a:lstStyle/>
+                    <a:p>
+                      <a:pPr indent="0" marL="0">
+                        <a:buNone/>
+                      </a:pPr>
+                      <a:r>
+                        <a:rPr lang="en-US" sz="1400" b="1" dirty="0">
+                          <a:solidFill>
+                            <a:srgbClr val="EB6834"/>
+                          </a:solidFill>
+                          <a:latin typeface="Calibri" pitchFamily="34" charset="0"/>
+                          <a:ea typeface="Calibri" pitchFamily="34" charset="-122"/>
+                          <a:cs typeface="Calibri" pitchFamily="34" charset="-120"/>
+                        </a:rPr>
+                        <a:t>2 or 3 of 10</a:t>
+                      </a:r>
+                      <a:endParaRPr lang="en-US" sz="1400" dirty="0">
+                        <a:latin typeface="Calibri" charset="0"/>
+                        <a:ea typeface="Calibri" charset="0"/>
+                        <a:cs typeface="Calibri" charset="0"/>
+                      </a:endParaRPr>
+                    </a:p>
+                  </a:txBody>
+                  <a:tcPr marL="76200" marR="76200" marT="76200" marB="76200" anchor="ctr">
+                    <a:lnL w="12700" cap="flat" cmpd="sng" algn="ctr">
+                      <a:solidFill>
+                        <a:srgbClr val="E2E1DC"/>
+                      </a:solidFill>
+                      <a:prstDash val="solid"/>
+                      <a:round/>
+                      <a:headEnd type="none" w="med" len="med"/>
+                      <a:tailEnd type="none" w="med" len="med"/>
+                    </a:lnL>
+                    <a:lnR w="12700" cap="flat" cmpd="sng" algn="ctr">
+                      <a:solidFill>
+                        <a:srgbClr val="E2E1DC"/>
+                      </a:solidFill>
+                      <a:prstDash val="solid"/>
+                      <a:round/>
+                      <a:headEnd type="none" w="med" len="med"/>
+                      <a:tailEnd type="none" w="med" len="med"/>
+                    </a:lnR>
+                    <a:lnT w="12700" cap="flat" cmpd="sng" algn="ctr">
+                      <a:solidFill>
+                        <a:srgbClr val="E2E1DC"/>
+                      </a:solidFill>
+                      <a:prstDash val="solid"/>
+                      <a:round/>
+                      <a:headEnd type="none" w="med" len="med"/>
+                      <a:tailEnd type="none" w="med" len="med"/>
+                    </a:lnT>
+                    <a:lnB w="12700" cap="flat" cmpd="sng" algn="ctr">
+                      <a:solidFill>
+                        <a:srgbClr val="E2E1DC"/>
+                      </a:solidFill>
+                      <a:prstDash val="solid"/>
+                      <a:round/>
+                      <a:headEnd type="none" w="med" len="med"/>
+                      <a:tailEnd type="none" w="med" len="med"/>
+                    </a:lnB>
+                    <a:solidFill>
+                      <a:srgbClr val="FFFFFF"/>
+                    </a:solidFill>
+                  </a:tcPr>
+                </a:tc>
+              </a:tr>
+            </a:tbl>
+          </a:graphicData>
+        </a:graphic>
+      </p:graphicFrame>
+      <p:sp>
+        <p:nvSpPr>
+          <p:cNvPr id="13" name="Text 10"/>
+          <p:cNvSpPr txBox="1"/>
+          <p:nvPr/>
+        </p:nvSpPr>
+        <p:spPr>
+          <a:xfrm>
+            <a:off x="1463040" y="6217920"/>
+            <a:ext cx="9262872" cy="457200"/>
+          </a:xfrm>
+          <a:prstGeom prst="rect">
+            <a:avLst/>
+          </a:prstGeom>
+          <a:noFill/>
+          <a:ln/>
+        </p:spPr>
+        <p:txBody>
+          <a:bodyPr wrap="square" lIns="0" tIns="0" rIns="0" bIns="0" rtlCol="0" anchor="ctr"/>
+          <a:lstStyle/>
+          <a:p>
+            <a:pPr algn="ctr" indent="0" marL="0">
+              <a:buNone/>
+            </a:pPr>
+            <a:r>
+              <a:rPr lang="en-US" sz="1400" b="1" dirty="0">
+                <a:solidFill>
+                  <a:srgbClr val="0B0B0B"/>
+                </a:solidFill>
+                <a:latin typeface="Calibri" pitchFamily="34" charset="0"/>
+                <a:ea typeface="Calibri" pitchFamily="34" charset="-122"/>
+                <a:cs typeface="Calibri" pitchFamily="34" charset="-120"/>
+              </a:rPr>
+              <a:t>A one-bit flip-flop has nowhere for a bug to hide, so almost any testbench catches everything. That is why we report our 95% as a limitation.</a:t>
+            </a:r>
+            <a:endParaRPr lang="en-US" sz="1400" dirty="0"/>
+          </a:p>
+        </p:txBody>
+      </p:sp>
+    </p:spTree>
+  </p:cSld>
+  <p:clrMapOvr>
+    <a:masterClrMapping/>
+  </p:clrMapOvr>
+</p:sld>
+</file>
+
+<file path=ppt/slides/slide21.xml><?xml version="1.0" encoding="utf-8"?>
+<p:sld xmlns:a="http://schemas.openxmlformats.org/drawingml/2006/main" xmlns:r="http://schemas.openxmlformats.org/officeDocument/2006/relationships" xmlns:p="http://schemas.openxmlformats.org/presentationml/2006/main">
+  <p:cSld name="Slide 21">
+    <p:bg>
+      <p:bgPr>
+        <a:solidFill>
+          <a:srgbClr val="FCFCFB"/>
+        </a:solidFill>
+      </p:bgPr>
+    </p:bg>
+    <p:spTree>
+      <p:nvGrpSpPr>
+        <p:cNvPr id="1" name=""/>
+        <p:cNvGrpSpPr/>
+        <p:nvPr/>
+      </p:nvGrpSpPr>
+      <p:grpSpPr>
+        <a:xfrm>
+          <a:off x="0" y="0"/>
+          <a:ext cx="0" cy="0"/>
+          <a:chOff x="0" y="0"/>
+          <a:chExt cx="0" cy="0"/>
+        </a:xfrm>
+      </p:grpSpPr>
+      <p:sp>
+        <p:nvSpPr>
+          <p:cNvPr id="2" name="Text 0"/>
+          <p:cNvSpPr txBox="1"/>
+          <p:nvPr/>
+        </p:nvSpPr>
+        <p:spPr>
+          <a:xfrm>
+            <a:off x="640080" y="182880"/>
+            <a:ext cx="10908792" cy="274320"/>
+          </a:xfrm>
+          <a:prstGeom prst="rect">
+            <a:avLst/>
+          </a:prstGeom>
+          <a:noFill/>
+          <a:ln/>
+        </p:spPr>
+        <p:txBody>
+          <a:bodyPr wrap="square" lIns="0" tIns="0" rIns="0" bIns="0" rtlCol="0" anchor="ctr"/>
+          <a:lstStyle/>
+          <a:p>
+            <a:pPr indent="0" marL="0">
+              <a:buNone/>
+            </a:pPr>
+            <a:r>
+              <a:rPr lang="en-US" sz="1100" b="1" spc="160" kern="0" dirty="0">
+                <a:solidFill>
+                  <a:srgbClr val="7A7974"/>
+                </a:solidFill>
+                <a:latin typeface="Calibri" pitchFamily="34" charset="0"/>
+                <a:ea typeface="Calibri" pitchFamily="34" charset="-122"/>
+                <a:cs typeface="Calibri" pitchFamily="34" charset="-120"/>
+              </a:rPr>
               <a:t>RESULTS  ·  1 OF 6</a:t>
             </a:r>
             <a:endParaRPr lang="en-US" sz="1100" dirty="0"/>
@@ -19285,7 +20758,7 @@
       </p:sp>
       <p:graphicFrame>
         <p:nvGraphicFramePr>
-          <p:cNvPr id="21" name="Table 0"/>
+          <p:cNvPr id="22" name="Table 0"/>
           <p:cNvGraphicFramePr>
             <a:graphicFrameLocks noGrp="1"/>
           </p:cNvGraphicFramePr>
@@ -22475,9 +23948,9 @@
 </p:sld>
 </file>
 
-<file path=ppt/slides/slide21.xml><?xml version="1.0" encoding="utf-8"?>
+<file path=ppt/slides/slide22.xml><?xml version="1.0" encoding="utf-8"?>
 <p:sld xmlns:a="http://schemas.openxmlformats.org/drawingml/2006/main" xmlns:r="http://schemas.openxmlformats.org/officeDocument/2006/relationships" xmlns:p="http://schemas.openxmlformats.org/presentationml/2006/main">
-  <p:cSld name="Slide 21">
+  <p:cSld name="Slide 22">
     <p:bg>
       <p:bgPr>
         <a:solidFill>
@@ -22618,7 +24091,7 @@
       </p:sp>
       <p:graphicFrame>
         <p:nvGraphicFramePr>
-          <p:cNvPr id="22" name="Table 0"/>
+          <p:cNvPr id="23" name="Table 0"/>
           <p:cNvGraphicFramePr>
             <a:graphicFrameLocks noGrp="1"/>
           </p:cNvGraphicFramePr>
@@ -24586,9 +26059,9 @@
 </p:sld>
 </file>
 
-<file path=ppt/slides/slide22.xml><?xml version="1.0" encoding="utf-8"?>
+<file path=ppt/slides/slide23.xml><?xml version="1.0" encoding="utf-8"?>
 <p:sld xmlns:a="http://schemas.openxmlformats.org/drawingml/2006/main" xmlns:r="http://schemas.openxmlformats.org/officeDocument/2006/relationships" xmlns:p="http://schemas.openxmlformats.org/presentationml/2006/main">
-  <p:cSld name="Slide 22">
+  <p:cSld name="Slide 23">
     <p:bg>
       <p:bgPr>
         <a:solidFill>
@@ -24729,7 +26202,7 @@
       </p:sp>
       <p:graphicFrame>
         <p:nvGraphicFramePr>
-          <p:cNvPr id="23" name="Table 0"/>
+          <p:cNvPr id="24" name="Table 0"/>
           <p:cNvGraphicFramePr>
             <a:graphicFrameLocks noGrp="1"/>
           </p:cNvGraphicFramePr>
@@ -26348,9 +27821,9 @@
 </p:sld>
 </file>
 
-<file path=ppt/slides/slide23.xml><?xml version="1.0" encoding="utf-8"?>
+<file path=ppt/slides/slide24.xml><?xml version="1.0" encoding="utf-8"?>
 <p:sld xmlns:a="http://schemas.openxmlformats.org/drawingml/2006/main" xmlns:r="http://schemas.openxmlformats.org/officeDocument/2006/relationships" xmlns:p="http://schemas.openxmlformats.org/presentationml/2006/main">
-  <p:cSld name="Slide 23">
+  <p:cSld name="Slide 24">
     <p:bg>
       <p:bgPr>
         <a:solidFill>
@@ -26491,7 +27964,7 @@
       </p:sp>
       <p:graphicFrame>
         <p:nvGraphicFramePr>
-          <p:cNvPr id="24" name="Table 0"/>
+          <p:cNvPr id="25" name="Table 0"/>
           <p:cNvGraphicFramePr>
             <a:graphicFrameLocks noGrp="1"/>
           </p:cNvGraphicFramePr>
@@ -27463,9 +28936,9 @@
 </p:sld>
 </file>
 
-<file path=ppt/slides/slide24.xml><?xml version="1.0" encoding="utf-8"?>
+<file path=ppt/slides/slide25.xml><?xml version="1.0" encoding="utf-8"?>
 <p:sld xmlns:a="http://schemas.openxmlformats.org/drawingml/2006/main" xmlns:r="http://schemas.openxmlformats.org/officeDocument/2006/relationships" xmlns:p="http://schemas.openxmlformats.org/presentationml/2006/main">
-  <p:cSld name="Slide 24">
+  <p:cSld name="Slide 25">
     <p:bg>
       <p:bgPr>
         <a:solidFill>
@@ -27836,7 +29309,7 @@
       </p:sp>
       <p:graphicFrame>
         <p:nvGraphicFramePr>
-          <p:cNvPr id="25" name="Table 0"/>
+          <p:cNvPr id="26" name="Table 0"/>
           <p:cNvGraphicFramePr>
             <a:graphicFrameLocks noGrp="1"/>
           </p:cNvGraphicFramePr>
@@ -28590,9 +30063,9 @@
 </p:sld>
 </file>
 
-<file path=ppt/slides/slide25.xml><?xml version="1.0" encoding="utf-8"?>
+<file path=ppt/slides/slide26.xml><?xml version="1.0" encoding="utf-8"?>
 <p:sld xmlns:a="http://schemas.openxmlformats.org/drawingml/2006/main" xmlns:r="http://schemas.openxmlformats.org/officeDocument/2006/relationships" xmlns:p="http://schemas.openxmlformats.org/presentationml/2006/main">
-  <p:cSld name="Slide 25">
+  <p:cSld name="Slide 26">
     <p:bg>
       <p:bgPr>
         <a:solidFill>
@@ -28733,7 +30206,7 @@
       </p:sp>
       <p:graphicFrame>
         <p:nvGraphicFramePr>
-          <p:cNvPr id="26" name="Table 0"/>
+          <p:cNvPr id="27" name="Table 0"/>
           <p:cNvGraphicFramePr>
             <a:graphicFrameLocks noGrp="1"/>
           </p:cNvGraphicFramePr>
@@ -31211,9 +32684,9 @@
 </p:sld>
 </file>
 
-<file path=ppt/slides/slide26.xml><?xml version="1.0" encoding="utf-8"?>
+<file path=ppt/slides/slide27.xml><?xml version="1.0" encoding="utf-8"?>
 <p:sld xmlns:a="http://schemas.openxmlformats.org/drawingml/2006/main" xmlns:r="http://schemas.openxmlformats.org/officeDocument/2006/relationships" xmlns:p="http://schemas.openxmlformats.org/presentationml/2006/main">
-  <p:cSld name="Slide 26">
+  <p:cSld name="Slide 27">
     <p:bg>
       <p:bgPr>
         <a:solidFill>
@@ -32178,9 +33651,9 @@
 </p:sld>
 </file>
 
-<file path=ppt/slides/slide27.xml><?xml version="1.0" encoding="utf-8"?>
+<file path=ppt/slides/slide28.xml><?xml version="1.0" encoding="utf-8"?>
 <p:sld xmlns:a="http://schemas.openxmlformats.org/drawingml/2006/main" xmlns:r="http://schemas.openxmlformats.org/officeDocument/2006/relationships" xmlns:p="http://schemas.openxmlformats.org/presentationml/2006/main">
-  <p:cSld name="Slide 27">
+  <p:cSld name="Slide 28">
     <p:bg>
       <p:bgPr>
         <a:solidFill>
@@ -32834,9 +34307,9 @@
 </p:sld>
 </file>
 
-<file path=ppt/slides/slide28.xml><?xml version="1.0" encoding="utf-8"?>
+<file path=ppt/slides/slide29.xml><?xml version="1.0" encoding="utf-8"?>
 <p:sld xmlns:a="http://schemas.openxmlformats.org/drawingml/2006/main" xmlns:r="http://schemas.openxmlformats.org/officeDocument/2006/relationships" xmlns:p="http://schemas.openxmlformats.org/presentationml/2006/main">
-  <p:cSld name="Slide 28">
+  <p:cSld name="Slide 29">
     <p:bg>
       <p:bgPr>
         <a:solidFill>

--- a/docs/presentation.pptx
+++ b/docs/presentation.pptx
@@ -1612,11 +1612,23 @@
           <a:p>
             <a:r>
               <a:rPr lang="en-US" dirty="0"/>
-              <a:t>NOT ON SLIDE — the terms. A mutant is a copy of the circuit with one deliberate bug. Eval2 asks whether the testbench notices. It is the third and last of our three scores, and it only runs on testbenches that already passed Eval1.
-NOT ON SLIDE: 5 mutants per run, 440 generated in total, 437 of them valid. The three that were dropped would not compile.
-THE LINK BACK TO gen_scenarios, worth making explicitly: eight scenarios is our own prompt instruction. On a one-bit flip-flop eight covers everything there is. On a ten-input circuit there are 1,024 input combinations, so eight is under one percent of them, and a bug living in the other 99% is simply never visited.
-IF ASKED whether the mutants were too easy — we tested that rather than assuming. Regenerating them with a better model, using AutoBench's own prompt, and filtering out the ones that were not really broken moved the score from 96.7% to 97.4%. One point. Swapping in bigger circuits moved it forty-four. So it is the circuits.
-IF ASKED who makes the mutants: the cheap model, because introducing one deliberate bug is a structural edit, not a reasoning task.</a:t>
+              <a:t>WHOSE MUTANTS — do not let this blur.
+· ours: 5 per run, made by the cheap model. 440 generated, 437 valid.
+· AutoBench's: 10 per problem, published with their paper, 1,525 in total.
+· the table's two rows use different sets — 5 of ours, 10 of theirs.
+THE KINDS WE ASK FOR — one line of logic, never a port:
+· flip an operator      (+ becomes -, &amp; becomes |)
+· invert a signal       (rst becomes !rst)
+· change a constant     (4'b1111 becomes 4'b1110)
+· swap two signals      (a and b exchanged)
+THE LINK TO gen_scenarios
+· eight scenarios is our own prompt instruction, not a model limit
+· eight of 1,024 combinations is under 1% — the bug lives in the rest
+· this is our best explanation, not a measured one. Say so.
+WHAT WE DID MEASURE
+· better mutants moved the score 1 point (96.7 to 97.4)
+· different circuits moved it 44 points
+· so it is the circuits, not the mutants</a:t>
             </a:r>
             <a:endParaRPr lang="en-US" dirty="0"/>
           </a:p>
@@ -1797,17 +1809,25 @@
           <a:p>
             <a:r>
               <a:rPr lang="en-US" dirty="0"/>
-              <a:t>WHERE EACH NUMBER COMES FROM, in case any one of them is queried.
-92.5% — our compile rate pooled over both models. Half our runs deliberately used a cheap model they never tested, which drags it down.
-98.7% — the same measure on the strong model alone. That is the like-for-like comparison with their 95.7%, because they used one good model throughout.
-31.4% — our pass rate against the real circuit, pooled. Low because these are the hardest fifth of their benchmark and three quarters of them are clocked, meaning the circuit has memory and a clock. Clocked circuits are the hard case for everyone: you have to get the timing right as well as the values.
-51.5% and 37.1% — theirs, across all circuits and across clocked ones only. Compare against 37.1, not 51.5.
-95% — our broken-copy detection. This counts individual broken copies caught, on our own small circuits. A one-bit flip-flop has nowhere for a bug to hide, so almost everything gets caught. It is a ceiling, not a result.
-44.8% — theirs, and NOT the same measure. They count a circuit as passed only if the testbench agrees with a reference testbench on at least 80% of the broken copies. Per-circuit with a threshold, against our per-copy raw rate.
-20% — our runs scored under their rule instead of ours: 4 of the 20 benchmark circuits cleared their 80% bar. That is the only honest comparison on this row, and it goes against their 26%.
-IF ASKED WHAT CHANGED BETWEEN 95 AND 20 — two things at once, so do not let it be read as one. The circuits got harder AND the scoring rule changed. The number that separates them is our raw detection on their circuits: about 54% with the weak model and 67% with the strong one. So harder circuits take it from 95 to roughly 60, and their stricter rule takes it from there to 20.
-IF ASKED WHAT n=20 MEANS: we tested 20 circuits, so 20% is 4 of them. With a sample that small the true value could plausibly sit anywhere from about 8% to 42%. Their 26% is inside that range, so neither of us is measurably ahead. I would not claim a ranking from 20 circuits and I do not.
-NOT ON SLIDE: the pilot behind the ceiling claim was pre-registered — we wrote the criteria down before generating anything. Better broken copies moved the score one point; different circuits moved it forty-four.</a:t>
+              <a:t>DEFENDING 31.4% — the number they will pick on.
+· it is pooled over both models; half our runs used a cheap model they never tested
+· strong model alone is 49.2%, against their 51.5%. That is the like-for-like figure
+· ours are the hardest fifth of their benchmark, 16 of 20 clocked — their own clocked figure is 37.1%
+· so on comparable circuits with a comparable model we are level or ahead
+· it is NOT caused by the scenario count — that affects Eval2, not Eval1
+CLOCKED means the circuit has memory and a clock. Hard case for everyone: timing as well as values.
+THE THREE Eval2 ROWS, read downwards
+· 95% — our circuits, our 5 mutants each, raw count
+· 67% — same testbenches, THEIR circuits. The 28-point fall is circuit difficulty
+· 20% — their circuits AND their rule. Their rule counts a circuit as passed only if the testbench agrees with a reference testbench on 80% of copies
+· only the bottom row compares like with like: 20 against their 26
+WHY THEIR 44.8% IS NOT LOW — pre-empt this misreading
+· it is their pass rate under that same 80% rule across all 156 problems
+· nothing to do with display statements — that was their compile rate, a different metric
+WHAT n=20 MEANS
+· 20 circuits, so 20% is 4 of them
+· at that size the true value could be anywhere from about 8% to 42%
+· their 26% sits inside that. Neither of us is measurably ahead, and I do not claim it</a:t>
             </a:r>
             <a:endParaRPr lang="en-US" dirty="0"/>
           </a:p>
@@ -10432,7 +10452,7 @@
                 <a:ea typeface="Calibri" pitchFamily="34" charset="-122"/>
                 <a:cs typeface="Calibri" pitchFamily="34" charset="-120"/>
               </a:rPr>
-              <a:t>AutoBench's version of this step was their single biggest win — worth 42 points. Ours does almost nothing.</a:t>
+              <a:t>The same idea was AutoBench's single biggest win: inserting missing display statements took their compile rate from 55% to 97%. Forty-two points. Ours does almost nothing, because the mistake stopped happening.</a:t>
             </a:r>
             <a:endParaRPr lang="en-US" sz="1300" dirty="0"/>
           </a:p>
@@ -20238,7 +20258,7 @@
                           <a:ea typeface="Calibri" pitchFamily="34" charset="-122"/>
                           <a:cs typeface="Calibri" pitchFamily="34" charset="-120"/>
                         </a:rPr>
-                        <a:t>95%</a:t>
+                        <a:t>5 of our 5</a:t>
                       </a:r>
                       <a:endParaRPr lang="en-US" sz="1400" dirty="0">
                         <a:latin typeface="Calibri" charset="0"/>
@@ -20512,7 +20532,7 @@
                           <a:ea typeface="Calibri" pitchFamily="34" charset="-122"/>
                           <a:cs typeface="Calibri" pitchFamily="34" charset="-120"/>
                         </a:rPr>
-                        <a:t>2 or 3 of 10</a:t>
+                        <a:t>2 of AutoBench's 10</a:t>
                       </a:r>
                       <a:endParaRPr lang="en-US" sz="1400" dirty="0">
                         <a:latin typeface="Calibri" charset="0"/>
@@ -24112,11 +24132,11 @@
             <a:tbl>
               <a:tblPr/>
               <a:tblGrid>
-                <a:gridCol w="1188720"/>
-                <a:gridCol w="3977640"/>
-                <a:gridCol w="1371600"/>
-                <a:gridCol w="2468880"/>
-                <a:gridCol w="1901952"/>
+                <a:gridCol w="1005840"/>
+                <a:gridCol w="4114800"/>
+                <a:gridCol w="2148840"/>
+                <a:gridCol w="2011680"/>
+                <a:gridCol w="1627632"/>
               </a:tblGrid>
               <a:tr h="310896">
                 <a:tc>
@@ -24397,7 +24417,7 @@
                           <a:ea typeface="Calibri" pitchFamily="34" charset="-122"/>
                           <a:cs typeface="Calibri" pitchFamily="34" charset="-120"/>
                         </a:rPr>
-                        <a:t>Read it as</a:t>
+                        <a:t>Why</a:t>
                       </a:r>
                       <a:endParaRPr lang="en-US" sz="1400" dirty="0">
                         <a:latin typeface="Calibri" charset="0"/>
@@ -24535,7 +24555,7 @@
                           <a:ea typeface="Calibri" pitchFamily="34" charset="-122"/>
                           <a:cs typeface="Calibri" pitchFamily="34" charset="-120"/>
                         </a:rPr>
-                        <a:t>does the testbench compile?</a:t>
+                        <a:t>does it compile?</a:t>
                       </a:r>
                       <a:endParaRPr lang="en-US" sz="1400" dirty="0">
                         <a:latin typeface="Calibri" charset="0"/>
@@ -24603,7 +24623,7 @@
                           <a:ea typeface="Calibri" pitchFamily="34" charset="-122"/>
                           <a:cs typeface="Calibri" pitchFamily="34" charset="-120"/>
                         </a:rPr>
-                        <a:t>92.5%</a:t>
+                        <a:t>92.5%  ·  98.7% strong</a:t>
                       </a:r>
                       <a:endParaRPr lang="en-US" sz="1400" dirty="0">
                         <a:latin typeface="Calibri" charset="0"/>
@@ -24739,7 +24759,7 @@
                           <a:ea typeface="Calibri" pitchFamily="34" charset="-122"/>
                           <a:cs typeface="Calibri" pitchFamily="34" charset="-120"/>
                         </a:rPr>
-                        <a:t>level — 98.7% on our strong model</a:t>
+                        <a:t>level — theirs used one good model throughout</a:t>
                       </a:r>
                       <a:endParaRPr lang="en-US" sz="1400" dirty="0">
                         <a:latin typeface="Calibri" charset="0"/>
@@ -24877,7 +24897,7 @@
                           <a:ea typeface="Calibri" pitchFamily="34" charset="-122"/>
                           <a:cs typeface="Calibri" pitchFamily="34" charset="-120"/>
                         </a:rPr>
-                        <a:t>does it pass against the real circuit?</a:t>
+                        <a:t>does it pass on the real circuit?</a:t>
                       </a:r>
                       <a:endParaRPr lang="en-US" sz="1400" dirty="0">
                         <a:latin typeface="Calibri" charset="0"/>
@@ -24945,7 +24965,7 @@
                           <a:ea typeface="Calibri" pitchFamily="34" charset="-122"/>
                           <a:cs typeface="Calibri" pitchFamily="34" charset="-120"/>
                         </a:rPr>
-                        <a:t>31.4%</a:t>
+                        <a:t>31.4%  ·  49.2% strong</a:t>
                       </a:r>
                       <a:endParaRPr lang="en-US" sz="1400" dirty="0">
                         <a:latin typeface="Calibri" charset="0"/>
@@ -25013,7 +25033,7 @@
                           <a:ea typeface="Calibri" pitchFamily="34" charset="-122"/>
                           <a:cs typeface="Calibri" pitchFamily="34" charset="-120"/>
                         </a:rPr>
-                        <a:t>51.5%   ·   37.1% clocked</a:t>
+                        <a:t>51.5%  ·  37.1% clocked</a:t>
                       </a:r>
                       <a:endParaRPr lang="en-US" sz="1400" dirty="0">
                         <a:latin typeface="Calibri" charset="0"/>
@@ -25081,7 +25101,7 @@
                           <a:ea typeface="Calibri" pitchFamily="34" charset="-122"/>
                           <a:cs typeface="Calibri" pitchFamily="34" charset="-120"/>
                         </a:rPr>
-                        <a:t>comparable — ours are mostly clocked</a:t>
+                        <a:t>level — compare strong to clocked</a:t>
                       </a:r>
                       <a:endParaRPr lang="en-US" sz="1400" dirty="0">
                         <a:latin typeface="Calibri" charset="0"/>
@@ -25219,7 +25239,7 @@
                           <a:ea typeface="Calibri" pitchFamily="34" charset="-122"/>
                           <a:cs typeface="Calibri" pitchFamily="34" charset="-120"/>
                         </a:rPr>
-                        <a:t>does it catch deliberately broken copies?</a:t>
+                        <a:t>catches broken copies — our circuits</a:t>
                       </a:r>
                       <a:endParaRPr lang="en-US" sz="1400" dirty="0">
                         <a:latin typeface="Calibri" charset="0"/>
@@ -25355,7 +25375,7 @@
                           <a:ea typeface="Calibri" pitchFamily="34" charset="-122"/>
                           <a:cs typeface="Calibri" pitchFamily="34" charset="-120"/>
                         </a:rPr>
-                        <a:t>44.8%</a:t>
+                        <a:t>—</a:t>
                       </a:r>
                       <a:endParaRPr lang="en-US" sz="1400" dirty="0">
                         <a:latin typeface="Calibri" charset="0"/>
@@ -25415,7 +25435,7 @@
                         <a:buNone/>
                       </a:pPr>
                       <a:r>
-                        <a:rPr lang="en-US" sz="1400" b="1" dirty="0">
+                        <a:rPr lang="en-US" sz="1400" dirty="0">
                           <a:solidFill>
                             <a:srgbClr val="EB6834"/>
                           </a:solidFill>
@@ -25423,7 +25443,7 @@
                           <a:ea typeface="Calibri" pitchFamily="34" charset="-122"/>
                           <a:cs typeface="Calibri" pitchFamily="34" charset="-120"/>
                         </a:rPr>
-                        <a:t>NOT comparable — different rule</a:t>
+                        <a:t>our circuits are too small to hide a bug</a:t>
                       </a:r>
                       <a:endParaRPr lang="en-US" sz="1400" dirty="0">
                         <a:latin typeface="Calibri" charset="0"/>
@@ -25487,7 +25507,7 @@
                       <a:r>
                         <a:rPr lang="en-US" sz="1400" b="1" dirty="0">
                           <a:solidFill>
-                            <a:srgbClr val="52514E"/>
+                            <a:srgbClr val="0B0B0B"/>
                           </a:solidFill>
                           <a:latin typeface="Calibri" pitchFamily="34" charset="0"/>
                           <a:ea typeface="Calibri" pitchFamily="34" charset="-122"/>
@@ -25561,7 +25581,349 @@
                           <a:ea typeface="Calibri" pitchFamily="34" charset="-122"/>
                           <a:cs typeface="Calibri" pitchFamily="34" charset="-120"/>
                         </a:rPr>
-                        <a:t>…scored under AutoBench's own rule</a:t>
+                        <a:t>…the same testbenches on THEIR circuits</a:t>
+                      </a:r>
+                      <a:endParaRPr lang="en-US" sz="1400" dirty="0">
+                        <a:latin typeface="Calibri" charset="0"/>
+                        <a:ea typeface="Calibri" charset="0"/>
+                        <a:cs typeface="Calibri" charset="0"/>
+                      </a:endParaRPr>
+                    </a:p>
+                  </a:txBody>
+                  <a:tcPr marL="76200" marR="76200" marT="76200" marB="76200" anchor="ctr">
+                    <a:lnL w="12700" cap="flat" cmpd="sng" algn="ctr">
+                      <a:solidFill>
+                        <a:srgbClr val="E2E1DC"/>
+                      </a:solidFill>
+                      <a:prstDash val="solid"/>
+                      <a:round/>
+                      <a:headEnd type="none" w="med" len="med"/>
+                      <a:tailEnd type="none" w="med" len="med"/>
+                    </a:lnL>
+                    <a:lnR w="12700" cap="flat" cmpd="sng" algn="ctr">
+                      <a:solidFill>
+                        <a:srgbClr val="E2E1DC"/>
+                      </a:solidFill>
+                      <a:prstDash val="solid"/>
+                      <a:round/>
+                      <a:headEnd type="none" w="med" len="med"/>
+                      <a:tailEnd type="none" w="med" len="med"/>
+                    </a:lnR>
+                    <a:lnT w="12700" cap="flat" cmpd="sng" algn="ctr">
+                      <a:solidFill>
+                        <a:srgbClr val="E2E1DC"/>
+                      </a:solidFill>
+                      <a:prstDash val="solid"/>
+                      <a:round/>
+                      <a:headEnd type="none" w="med" len="med"/>
+                      <a:tailEnd type="none" w="med" len="med"/>
+                    </a:lnT>
+                    <a:lnB w="12700" cap="flat" cmpd="sng" algn="ctr">
+                      <a:solidFill>
+                        <a:srgbClr val="E2E1DC"/>
+                      </a:solidFill>
+                      <a:prstDash val="solid"/>
+                      <a:round/>
+                      <a:headEnd type="none" w="med" len="med"/>
+                      <a:tailEnd type="none" w="med" len="med"/>
+                    </a:lnB>
+                    <a:solidFill>
+                      <a:srgbClr val="FFFFFF"/>
+                    </a:solidFill>
+                  </a:tcPr>
+                </a:tc>
+                <a:tc>
+                  <a:txBody>
+                    <a:bodyPr/>
+                    <a:lstStyle/>
+                    <a:p>
+                      <a:pPr indent="0" marL="0">
+                        <a:buNone/>
+                      </a:pPr>
+                      <a:r>
+                        <a:rPr lang="en-US" sz="1400" b="1" dirty="0">
+                          <a:solidFill>
+                            <a:srgbClr val="0B0B0B"/>
+                          </a:solidFill>
+                          <a:latin typeface="Calibri" pitchFamily="34" charset="0"/>
+                          <a:ea typeface="Calibri" pitchFamily="34" charset="-122"/>
+                          <a:cs typeface="Calibri" pitchFamily="34" charset="-120"/>
+                        </a:rPr>
+                        <a:t>67%</a:t>
+                      </a:r>
+                      <a:endParaRPr lang="en-US" sz="1400" dirty="0">
+                        <a:latin typeface="Calibri" charset="0"/>
+                        <a:ea typeface="Calibri" charset="0"/>
+                        <a:cs typeface="Calibri" charset="0"/>
+                      </a:endParaRPr>
+                    </a:p>
+                  </a:txBody>
+                  <a:tcPr marL="76200" marR="76200" marT="76200" marB="76200" anchor="ctr">
+                    <a:lnL w="12700" cap="flat" cmpd="sng" algn="ctr">
+                      <a:solidFill>
+                        <a:srgbClr val="E2E1DC"/>
+                      </a:solidFill>
+                      <a:prstDash val="solid"/>
+                      <a:round/>
+                      <a:headEnd type="none" w="med" len="med"/>
+                      <a:tailEnd type="none" w="med" len="med"/>
+                    </a:lnL>
+                    <a:lnR w="12700" cap="flat" cmpd="sng" algn="ctr">
+                      <a:solidFill>
+                        <a:srgbClr val="E2E1DC"/>
+                      </a:solidFill>
+                      <a:prstDash val="solid"/>
+                      <a:round/>
+                      <a:headEnd type="none" w="med" len="med"/>
+                      <a:tailEnd type="none" w="med" len="med"/>
+                    </a:lnR>
+                    <a:lnT w="12700" cap="flat" cmpd="sng" algn="ctr">
+                      <a:solidFill>
+                        <a:srgbClr val="E2E1DC"/>
+                      </a:solidFill>
+                      <a:prstDash val="solid"/>
+                      <a:round/>
+                      <a:headEnd type="none" w="med" len="med"/>
+                      <a:tailEnd type="none" w="med" len="med"/>
+                    </a:lnT>
+                    <a:lnB w="12700" cap="flat" cmpd="sng" algn="ctr">
+                      <a:solidFill>
+                        <a:srgbClr val="E2E1DC"/>
+                      </a:solidFill>
+                      <a:prstDash val="solid"/>
+                      <a:round/>
+                      <a:headEnd type="none" w="med" len="med"/>
+                      <a:tailEnd type="none" w="med" len="med"/>
+                    </a:lnB>
+                    <a:solidFill>
+                      <a:srgbClr val="FFFFFF"/>
+                    </a:solidFill>
+                  </a:tcPr>
+                </a:tc>
+                <a:tc>
+                  <a:txBody>
+                    <a:bodyPr/>
+                    <a:lstStyle/>
+                    <a:p>
+                      <a:pPr indent="0" marL="0">
+                        <a:buNone/>
+                      </a:pPr>
+                      <a:r>
+                        <a:rPr lang="en-US" sz="1400" dirty="0">
+                          <a:solidFill>
+                            <a:srgbClr val="0B0B0B"/>
+                          </a:solidFill>
+                          <a:latin typeface="Calibri" pitchFamily="34" charset="0"/>
+                          <a:ea typeface="Calibri" pitchFamily="34" charset="-122"/>
+                          <a:cs typeface="Calibri" pitchFamily="34" charset="-120"/>
+                        </a:rPr>
+                        <a:t>—</a:t>
+                      </a:r>
+                      <a:endParaRPr lang="en-US" sz="1400" dirty="0">
+                        <a:latin typeface="Calibri" charset="0"/>
+                        <a:ea typeface="Calibri" charset="0"/>
+                        <a:cs typeface="Calibri" charset="0"/>
+                      </a:endParaRPr>
+                    </a:p>
+                  </a:txBody>
+                  <a:tcPr marL="76200" marR="76200" marT="76200" marB="76200" anchor="ctr">
+                    <a:lnL w="12700" cap="flat" cmpd="sng" algn="ctr">
+                      <a:solidFill>
+                        <a:srgbClr val="E2E1DC"/>
+                      </a:solidFill>
+                      <a:prstDash val="solid"/>
+                      <a:round/>
+                      <a:headEnd type="none" w="med" len="med"/>
+                      <a:tailEnd type="none" w="med" len="med"/>
+                    </a:lnL>
+                    <a:lnR w="12700" cap="flat" cmpd="sng" algn="ctr">
+                      <a:solidFill>
+                        <a:srgbClr val="E2E1DC"/>
+                      </a:solidFill>
+                      <a:prstDash val="solid"/>
+                      <a:round/>
+                      <a:headEnd type="none" w="med" len="med"/>
+                      <a:tailEnd type="none" w="med" len="med"/>
+                    </a:lnR>
+                    <a:lnT w="12700" cap="flat" cmpd="sng" algn="ctr">
+                      <a:solidFill>
+                        <a:srgbClr val="E2E1DC"/>
+                      </a:solidFill>
+                      <a:prstDash val="solid"/>
+                      <a:round/>
+                      <a:headEnd type="none" w="med" len="med"/>
+                      <a:tailEnd type="none" w="med" len="med"/>
+                    </a:lnT>
+                    <a:lnB w="12700" cap="flat" cmpd="sng" algn="ctr">
+                      <a:solidFill>
+                        <a:srgbClr val="E2E1DC"/>
+                      </a:solidFill>
+                      <a:prstDash val="solid"/>
+                      <a:round/>
+                      <a:headEnd type="none" w="med" len="med"/>
+                      <a:tailEnd type="none" w="med" len="med"/>
+                    </a:lnB>
+                    <a:solidFill>
+                      <a:srgbClr val="FFFFFF"/>
+                    </a:solidFill>
+                  </a:tcPr>
+                </a:tc>
+                <a:tc>
+                  <a:txBody>
+                    <a:bodyPr/>
+                    <a:lstStyle/>
+                    <a:p>
+                      <a:pPr indent="0" marL="0">
+                        <a:buNone/>
+                      </a:pPr>
+                      <a:r>
+                        <a:rPr lang="en-US" sz="1400" dirty="0">
+                          <a:solidFill>
+                            <a:srgbClr val="52514E"/>
+                          </a:solidFill>
+                          <a:latin typeface="Calibri" pitchFamily="34" charset="0"/>
+                          <a:ea typeface="Calibri" pitchFamily="34" charset="-122"/>
+                          <a:cs typeface="Calibri" pitchFamily="34" charset="-120"/>
+                        </a:rPr>
+                        <a:t>harder circuits cost ~28 points</a:t>
+                      </a:r>
+                      <a:endParaRPr lang="en-US" sz="1400" dirty="0">
+                        <a:latin typeface="Calibri" charset="0"/>
+                        <a:ea typeface="Calibri" charset="0"/>
+                        <a:cs typeface="Calibri" charset="0"/>
+                      </a:endParaRPr>
+                    </a:p>
+                  </a:txBody>
+                  <a:tcPr marL="76200" marR="76200" marT="76200" marB="76200" anchor="ctr">
+                    <a:lnL w="12700" cap="flat" cmpd="sng" algn="ctr">
+                      <a:solidFill>
+                        <a:srgbClr val="E2E1DC"/>
+                      </a:solidFill>
+                      <a:prstDash val="solid"/>
+                      <a:round/>
+                      <a:headEnd type="none" w="med" len="med"/>
+                      <a:tailEnd type="none" w="med" len="med"/>
+                    </a:lnL>
+                    <a:lnR w="12700" cap="flat" cmpd="sng" algn="ctr">
+                      <a:solidFill>
+                        <a:srgbClr val="E2E1DC"/>
+                      </a:solidFill>
+                      <a:prstDash val="solid"/>
+                      <a:round/>
+                      <a:headEnd type="none" w="med" len="med"/>
+                      <a:tailEnd type="none" w="med" len="med"/>
+                    </a:lnR>
+                    <a:lnT w="12700" cap="flat" cmpd="sng" algn="ctr">
+                      <a:solidFill>
+                        <a:srgbClr val="E2E1DC"/>
+                      </a:solidFill>
+                      <a:prstDash val="solid"/>
+                      <a:round/>
+                      <a:headEnd type="none" w="med" len="med"/>
+                      <a:tailEnd type="none" w="med" len="med"/>
+                    </a:lnT>
+                    <a:lnB w="12700" cap="flat" cmpd="sng" algn="ctr">
+                      <a:solidFill>
+                        <a:srgbClr val="E2E1DC"/>
+                      </a:solidFill>
+                      <a:prstDash val="solid"/>
+                      <a:round/>
+                      <a:headEnd type="none" w="med" len="med"/>
+                      <a:tailEnd type="none" w="med" len="med"/>
+                    </a:lnB>
+                    <a:solidFill>
+                      <a:srgbClr val="FFFFFF"/>
+                    </a:solidFill>
+                  </a:tcPr>
+                </a:tc>
+              </a:tr>
+              <a:tr h="310896">
+                <a:tc>
+                  <a:txBody>
+                    <a:bodyPr/>
+                    <a:lstStyle/>
+                    <a:p>
+                      <a:pPr indent="0" marL="0">
+                        <a:buNone/>
+                      </a:pPr>
+                      <a:r>
+                        <a:rPr lang="en-US" sz="1400" b="1" dirty="0">
+                          <a:solidFill>
+                            <a:srgbClr val="0B0B0B"/>
+                          </a:solidFill>
+                          <a:latin typeface="Calibri" pitchFamily="34" charset="0"/>
+                          <a:ea typeface="Calibri" pitchFamily="34" charset="-122"/>
+                          <a:cs typeface="Calibri" pitchFamily="34" charset="-120"/>
+                        </a:rPr>
+                        <a:t>Eval2</a:t>
+                      </a:r>
+                      <a:endParaRPr lang="en-US" sz="1400" dirty="0">
+                        <a:latin typeface="Calibri" charset="0"/>
+                        <a:ea typeface="Calibri" charset="0"/>
+                        <a:cs typeface="Calibri" charset="0"/>
+                      </a:endParaRPr>
+                    </a:p>
+                  </a:txBody>
+                  <a:tcPr marL="76200" marR="76200" marT="76200" marB="76200" anchor="ctr">
+                    <a:lnL w="12700" cap="flat" cmpd="sng" algn="ctr">
+                      <a:solidFill>
+                        <a:srgbClr val="E2E1DC"/>
+                      </a:solidFill>
+                      <a:prstDash val="solid"/>
+                      <a:round/>
+                      <a:headEnd type="none" w="med" len="med"/>
+                      <a:tailEnd type="none" w="med" len="med"/>
+                    </a:lnL>
+                    <a:lnR w="12700" cap="flat" cmpd="sng" algn="ctr">
+                      <a:solidFill>
+                        <a:srgbClr val="E2E1DC"/>
+                      </a:solidFill>
+                      <a:prstDash val="solid"/>
+                      <a:round/>
+                      <a:headEnd type="none" w="med" len="med"/>
+                      <a:tailEnd type="none" w="med" len="med"/>
+                    </a:lnR>
+                    <a:lnT w="12700" cap="flat" cmpd="sng" algn="ctr">
+                      <a:solidFill>
+                        <a:srgbClr val="E2E1DC"/>
+                      </a:solidFill>
+                      <a:prstDash val="solid"/>
+                      <a:round/>
+                      <a:headEnd type="none" w="med" len="med"/>
+                      <a:tailEnd type="none" w="med" len="med"/>
+                    </a:lnT>
+                    <a:lnB w="12700" cap="flat" cmpd="sng" algn="ctr">
+                      <a:solidFill>
+                        <a:srgbClr val="E2E1DC"/>
+                      </a:solidFill>
+                      <a:prstDash val="solid"/>
+                      <a:round/>
+                      <a:headEnd type="none" w="med" len="med"/>
+                      <a:tailEnd type="none" w="med" len="med"/>
+                    </a:lnB>
+                    <a:solidFill>
+                      <a:srgbClr val="FFFFFF"/>
+                    </a:solidFill>
+                  </a:tcPr>
+                </a:tc>
+                <a:tc>
+                  <a:txBody>
+                    <a:bodyPr/>
+                    <a:lstStyle/>
+                    <a:p>
+                      <a:pPr indent="0" marL="0">
+                        <a:buNone/>
+                      </a:pPr>
+                      <a:r>
+                        <a:rPr lang="en-US" sz="1400" dirty="0">
+                          <a:solidFill>
+                            <a:srgbClr val="52514E"/>
+                          </a:solidFill>
+                          <a:latin typeface="Calibri" pitchFamily="34" charset="0"/>
+                          <a:ea typeface="Calibri" pitchFamily="34" charset="-122"/>
+                          <a:cs typeface="Calibri" pitchFamily="34" charset="-120"/>
+                        </a:rPr>
+                        <a:t>…their circuits AND their stricter rule</a:t>
                       </a:r>
                       <a:endParaRPr lang="en-US" sz="1400" dirty="0">
                         <a:latin typeface="Calibri" charset="0"/>
@@ -25765,7 +26127,7 @@
                           <a:ea typeface="Calibri" pitchFamily="34" charset="-122"/>
                           <a:cs typeface="Calibri" pitchFamily="34" charset="-120"/>
                         </a:rPr>
-                        <a:t>comparable — no ranking at n=20</a:t>
+                        <a:t>level — their rule needs 80% agreement</a:t>
                       </a:r>
                       <a:endParaRPr lang="en-US" sz="1400" dirty="0">
                         <a:latin typeface="Calibri" charset="0"/>
@@ -25829,12 +26191,12 @@
         </p:nvSpPr>
         <p:spPr>
           <a:xfrm>
-            <a:off x="640080" y="4663440"/>
-            <a:ext cx="5225796" cy="1737360"/>
+            <a:off x="640080" y="5532120"/>
+            <a:ext cx="10908792" cy="868680"/>
           </a:xfrm>
           <a:prstGeom prst="roundRect">
             <a:avLst>
-              <a:gd name="adj" fmla="val 4211"/>
+              <a:gd name="adj" fmla="val 8421"/>
             </a:avLst>
           </a:prstGeom>
           <a:solidFill>
@@ -25863,8 +26225,8 @@
         </p:nvSpPr>
         <p:spPr>
           <a:xfrm>
-            <a:off x="877824" y="4809744"/>
-            <a:ext cx="4768596" cy="292608"/>
+            <a:off x="877824" y="5650992"/>
+            <a:ext cx="10433304" cy="658368"/>
           </a:xfrm>
           <a:prstGeom prst="rect">
             <a:avLst/>
@@ -25877,10 +26239,13 @@
           <a:lstStyle/>
           <a:p>
             <a:pPr indent="0" marL="0">
+              <a:lnSpc>
+                <a:spcPct val="115000"/>
+              </a:lnSpc>
               <a:buNone/>
             </a:pPr>
             <a:r>
-              <a:rPr lang="en-US" sz="1300" b="1" spc="110" kern="0" dirty="0">
+              <a:rPr lang="en-US" sz="1400" b="1" dirty="0">
                 <a:solidFill>
                   <a:srgbClr val="EB6834"/>
                 </a:solidFill>
@@ -25888,166 +26253,26 @@
                 <a:ea typeface="Calibri" pitchFamily="34" charset="-122"/>
                 <a:cs typeface="Calibri" pitchFamily="34" charset="-120"/>
               </a:rPr>
-              <a:t>Why our Eval2 is not a win</a:t>
+              <a:t>Read the three Eval2 rows downwards.  </a:t>
             </a:r>
-            <a:endParaRPr lang="en-US" sz="1300" dirty="0"/>
-          </a:p>
-        </p:txBody>
-      </p:sp>
-      <p:sp>
-        <p:nvSpPr>
-          <p:cNvPr id="8" name="Text 5"/>
-          <p:cNvSpPr txBox="1"/>
-          <p:nvPr/>
-        </p:nvSpPr>
-        <p:spPr>
-          <a:xfrm>
-            <a:off x="877824" y="5120640"/>
-            <a:ext cx="4750308" cy="1188720"/>
-          </a:xfrm>
-          <a:prstGeom prst="rect">
-            <a:avLst/>
-          </a:prstGeom>
-          <a:noFill/>
-          <a:ln/>
-        </p:spPr>
-        <p:txBody>
-          <a:bodyPr wrap="square" lIns="0" tIns="0" rIns="0" bIns="0" rtlCol="0" anchor="t"/>
-          <a:lstStyle/>
-          <a:p>
             <a:pPr indent="0" marL="0">
               <a:lnSpc>
-                <a:spcPct val="118000"/>
+                <a:spcPct val="115000"/>
               </a:lnSpc>
               <a:buNone/>
             </a:pPr>
             <a:r>
-              <a:rPr lang="en-US" sz="1300" dirty="0">
+              <a:rPr lang="en-US" sz="1400" dirty="0">
                 <a:solidFill>
-                  <a:srgbClr val="52514E"/>
+                  <a:srgbClr val="0B0B0B"/>
                 </a:solidFill>
                 <a:latin typeface="Calibri" pitchFamily="34" charset="0"/>
                 <a:ea typeface="Calibri" pitchFamily="34" charset="-122"/>
                 <a:cs typeface="Calibri" pitchFamily="34" charset="-120"/>
               </a:rPr>
-              <a:t>95% is a ceiling — our own test circuits are too small for a bug to hide in. We checked: better broken copies moved the score one point, bigger circuits moved it forty-four. So it measures our choice of circuits, not our testbenches.</a:t>
+              <a:t>95 to 67 is the circuits getting harder. 67 to 20 is their stricter rule, not our testbenches getting worse. Only the bottom row compares like with like — and every like-for-like row is level.</a:t>
             </a:r>
-            <a:endParaRPr lang="en-US" sz="1300" dirty="0"/>
-          </a:p>
-        </p:txBody>
-      </p:sp>
-      <p:sp>
-        <p:nvSpPr>
-          <p:cNvPr id="9" name="Shape 6"/>
-          <p:cNvSpPr/>
-          <p:nvPr/>
-        </p:nvSpPr>
-        <p:spPr>
-          <a:xfrm>
-            <a:off x="6323076" y="4663440"/>
-            <a:ext cx="5225796" cy="1737360"/>
-          </a:xfrm>
-          <a:prstGeom prst="roundRect">
-            <a:avLst>
-              <a:gd name="adj" fmla="val 4211"/>
-            </a:avLst>
-          </a:prstGeom>
-          <a:solidFill>
-            <a:srgbClr val="F1F1ED"/>
-          </a:solidFill>
-          <a:ln w="12700">
-            <a:solidFill>
-              <a:srgbClr val="F1F1ED"/>
-            </a:solidFill>
-            <a:prstDash val="solid"/>
-          </a:ln>
-          <a:effectLst>
-            <a:outerShdw sx="100000" sy="100000" kx="0" ky="0" algn="bl" rotWithShape="0" blurRad="76200" dist="381" dir="5400000">
-              <a:srgbClr val="000000">
-                <a:alpha val="7000"/>
-              </a:srgbClr>
-            </a:outerShdw>
-          </a:effectLst>
-        </p:spPr>
-      </p:sp>
-      <p:sp>
-        <p:nvSpPr>
-          <p:cNvPr id="10" name="Text 7"/>
-          <p:cNvSpPr txBox="1"/>
-          <p:nvPr/>
-        </p:nvSpPr>
-        <p:spPr>
-          <a:xfrm>
-            <a:off x="6560820" y="4809744"/>
-            <a:ext cx="4768596" cy="292608"/>
-          </a:xfrm>
-          <a:prstGeom prst="rect">
-            <a:avLst/>
-          </a:prstGeom>
-          <a:noFill/>
-          <a:ln/>
-        </p:spPr>
-        <p:txBody>
-          <a:bodyPr wrap="square" lIns="0" tIns="0" rIns="0" bIns="0" rtlCol="0" anchor="ctr"/>
-          <a:lstStyle/>
-          <a:p>
-            <a:pPr indent="0" marL="0">
-              <a:buNone/>
-            </a:pPr>
-            <a:r>
-              <a:rPr lang="en-US" sz="1300" b="1" spc="110" kern="0" dirty="0">
-                <a:solidFill>
-                  <a:srgbClr val="2A78D6"/>
-                </a:solidFill>
-                <a:latin typeface="Calibri" pitchFamily="34" charset="0"/>
-                <a:ea typeface="Calibri" pitchFamily="34" charset="-122"/>
-                <a:cs typeface="Calibri" pitchFamily="34" charset="-120"/>
-              </a:rPr>
-              <a:t>Why the rest is a fair comparison</a:t>
-            </a:r>
-            <a:endParaRPr lang="en-US" sz="1300" dirty="0"/>
-          </a:p>
-        </p:txBody>
-      </p:sp>
-      <p:sp>
-        <p:nvSpPr>
-          <p:cNvPr id="11" name="Text 8"/>
-          <p:cNvSpPr txBox="1"/>
-          <p:nvPr/>
-        </p:nvSpPr>
-        <p:spPr>
-          <a:xfrm>
-            <a:off x="6560820" y="5120640"/>
-            <a:ext cx="4750308" cy="1188720"/>
-          </a:xfrm>
-          <a:prstGeom prst="rect">
-            <a:avLst/>
-          </a:prstGeom>
-          <a:noFill/>
-          <a:ln/>
-        </p:spPr>
-        <p:txBody>
-          <a:bodyPr wrap="square" lIns="0" tIns="0" rIns="0" bIns="0" rtlCol="0" anchor="t"/>
-          <a:lstStyle/>
-          <a:p>
-            <a:pPr indent="0" marL="0">
-              <a:lnSpc>
-                <a:spcPct val="118000"/>
-              </a:lnSpc>
-              <a:buNone/>
-            </a:pPr>
-            <a:r>
-              <a:rPr lang="en-US" sz="1300" dirty="0">
-                <a:solidFill>
-                  <a:srgbClr val="52514E"/>
-                </a:solidFill>
-                <a:latin typeface="Calibri" pitchFamily="34" charset="0"/>
-                <a:ea typeface="Calibri" pitchFamily="34" charset="-122"/>
-                <a:cs typeface="Calibri" pitchFamily="34" charset="-120"/>
-              </a:rPr>
-              <a:t>Our 20 benchmark circuits are the hardest fifth of theirs, and three quarters are clocked — the hard case. Where the measures line up we are in the same range, with a newer model, on harder circuits.</a:t>
-            </a:r>
-            <a:endParaRPr lang="en-US" sz="1300" dirty="0"/>
+            <a:endParaRPr lang="en-US" sz="1400" dirty="0"/>
           </a:p>
         </p:txBody>
       </p:sp>

--- a/docs/presentation.pptx
+++ b/docs/presentation.pptx
@@ -1915,9 +1915,27 @@
           <a:p>
             <a:r>
               <a:rPr lang="en-US" dirty="0"/>
-              <a:t>NOT ON SLIDE: 44 is 12 of our circuits on the strong model, the same 12 on the weak one, and 20 benchmark circuits — so 44 runs per setting, 220 in these three sweeps.
-The statistics: ours versus the control is McNemar p = 0.372. The control versus plain is p = 1.000, which is the useful one — a blind extra attempt is worth nothing, so any real gain has to sit on the diagnosis.
-IF ASKED about the noise floor: those two settings ran identical logic because our checker never fired, and still landed three circuits apart. That is the measurement.</a:t>
+              <a:t>WHERE 44 COMES FROM
+· 12 of our circuits on the strong model
+· the same 12 on the weak model
+· 20 benchmark circuits on the weak model
+· = 44 runs per setting, 220 across these three sweeps
+· the fourth sweep ran only three of the five, so it is not in this table
+WHAT EACH SETTING MAY DO
+· baseline — one attempt, never repairs
+· retry_only — always rewrites once, told nothing. The control
+· compiler_only — rewrites only if it did not compile
+· pyverilog_only — rewrites only if our checker complained
+· hybrid — rewrites for any of those three reasons
+WHY pyverilog_only IS LOWEST
+· it repaired 0 times in all 44 runs — the checker never complained
+· so it ran the same logic as baseline and should have scored the same
+· 9 against baseline’s 12 is therefore luck. That is the noise floor
+THE STATISTICS
+· ours vs the control: McNemar p = 0.372, not significant
+· control vs baseline: p = 1.000 — a blind extra attempt is worth nothing
+· so any real gain must sit on the diagnosis, not the extra try
+THIS SLIDE ANSWERS ‘which setting wins’. The next answers ‘what caused the repairs’. Say that as you move — they are easy to conflate.</a:t>
             </a:r>
             <a:endParaRPr lang="en-US" dirty="0"/>
           </a:p>
@@ -2005,9 +2023,20 @@
           <a:p>
             <a:r>
               <a:rPr lang="en-US" dirty="0"/>
-              <a:t>DISCLOSE THIS BEFORE THEY FIND IT: our full version is also the only setting that can act on simulation feedback, which drove 79 of the 90 informed repairs. So its lead cannot be credited to our checker, and there is no simulation-only arm to separate them. That is a gap in our design and it is in the report. Volunteering it reads as confidence; being caught on it does not.
-NOT ON SLIDE: 102 runs attempted a repair and 26 succeeded, about one in four.
-Do not apologise here. It is a discovery, not a failure.</a:t>
+              <a:t>THIS SLIDE COUNTS REPAIRS. The last one counted circuits that worked. Different question, same experiment.
+WHAT EACH TRIGGER MEANS
+· simulation — it compiled and ran, but scenarios came out wrong. The failing scenario names go back to the model
+· blind retry — no information at all. The control, always fires once by definition
+· compiler — iverilog refused the file; the error text goes back
+· static — our checker found a structural problem before anything ran
+IF THEY SPOT THE 0 AND THE 1 — looks contradictory, is not:
+· pyverilog_only repaired 0 times, in the three sweeps it ran in
+· the one static-triggered repair was in hybrid, in the fourth sweep
+· pyverilog_only was not in that fourth sweep at all
+· both numbers are true and describe different runs
+DID THE 79 SIMULATION REPAIRS HELP? The previous slide is the answer — hybrid is the only setting that can act on them and it leads, 18 against 12, but not significantly. And only 3 of those 18 came from a repair; the other 15 passed first time.
+DISCLOSE BEFORE THEY FIND IT: hybrid is also the only setting with simulation feedback, so its lead cannot be credited to our checker. No simulation-only arm exists to separate them. It is in the report.
+102 runs attempted a repair, 26 succeeded. About one in four.</a:t>
             </a:r>
             <a:endParaRPr lang="en-US" dirty="0"/>
           </a:p>
@@ -2184,8 +2213,13 @@
           <a:p>
             <a:r>
               <a:rPr lang="en-US" dirty="0"/>
-              <a:t>NOT ON SLIDE: per run at the strong tier it is about 7 cents for plain, 10 for ours, 11 for the control.
-THE NUANCE WORTH SAYING: our layer is nearly free and nearly useless against current models. Those are not in tension — free means there is little reason to remove it, in case a weaker or older model is the one generating.</a:t>
+              <a:t>THE SAME FIVE SETTINGS AS TWO SLIDES AGO, now priced. The Worked column is identical — same 44 runs each.
+HOW TO READ IT
+· compiler_only is the value winner: 7 points for 6% more tokens
+· hybrid buys the top score at +50% tokens and +50% time, and is not significant
+· pyverilog_only is 2% CHEAPER than baseline, because we skip the reasoning call when the report comes back clean — which it almost always did
+PER RUN at the strong tier: about 7 cents baseline, 10 ours, 11 the control.
+THE NUANCE WORTH SAYING OUT LOUD: our layer is nearly free and nearly useless against current models. Not in tension — free means there is little reason to remove it, in case a weaker or older model is the one generating.</a:t>
             </a:r>
             <a:endParaRPr lang="en-US" dirty="0"/>
           </a:p>

--- a/docs/presentation.pptx
+++ b/docs/presentation.pptx
@@ -532,7 +532,12 @@
               <a:rPr lang="en-US" dirty="0"/>
               <a:t>Opening line is yours — the slide says the title. One sentence on what the project is and move.
 TIMING: 20 minutes. Protect the results, slides 20 to 25, above everything else. If you are past 5 minutes when you leave the pipeline overview, speed up — the node slides are built to run at about 30 seconds each and they are deliberately uniform so the audience learns the layout once.
-The three chips on the slide are there so the scale lands before you say anything: 280 runs, 215 injected faults, 4 sweeps.</a:t>
+The three chips on the slide are there so the scale lands before you say anything: 280 runs, 215 injected faults, 4 sweeps.
+LIKELY QUESTIONS
+Q: How long did this take?
+A: One semester. Twenty weeks, five phases, from literature to report.
+Q: Summarise the contribution in one sentence.
+A: A tool that finds testbench bugs before running anything, measured properly, plus the finding that current models have largely stopped making the bugs it finds.</a:t>
             </a:r>
             <a:endParaRPr lang="en-US" dirty="0"/>
           </a:p>
@@ -622,7 +627,12 @@
               <a:rPr lang="en-US" dirty="0"/>
               <a:t>NOT ON SLIDE — the eight is our own instruction, not a model limit. The prompt says “generate between 5 and 10 scenarios” and the distribution peaks at 8 and 9.
 IF ASKED whether eight is enough: on a circuit with ten input bits there are 1,024 input combinations, so eight is under one percent of them. That is the honest reason our broken-copy detection falls from 95% on our small circuits to about half on the big benchmark ones — the bug lives in a case the eight never visit. Raising the count is in the report as future work.
-IF ASKED about AutoBench: they check that every scenario they planned actually made it into the testbench, with up to three retries. We have no equivalent. Also future work.</a:t>
+IF ASKED about AutoBench: they check that every scenario they planned actually made it into the testbench, with up to three retries. We have no equivalent. Also future work.
+LIKELY QUESTIONS
+Q: Why between five and ten? Did you try more?
+A: We did not, and I would not defend the number as optimal. It was chosen to keep the testbench short enough to compile reliably. Raising it is in future work.
+Q: Could more scenarios fix the mutant score?
+A: That is our hypothesis, not a result. The measured facts are that better mutants moved the score one point and bigger circuits moved it forty-four.</a:t>
             </a:r>
             <a:endParaRPr lang="en-US" dirty="0"/>
           </a:p>
@@ -712,7 +722,12 @@
               <a:rPr lang="en-US" dirty="0"/>
               <a:t>Strong model — writing correct hardware code is genuinely hard.
 NOT ON SLIDE: 92.5% compile but only 31% pass. That gap is where this project lives.
-IF ASKED what the failures look like: almost all are wrong expected values rather than broken structure. 87% of them.</a:t>
+IF ASKED what the failures look like: almost all are wrong expected values rather than broken structure. 87% of them.
+LIKELY QUESTIONS
+Q: Why does only a third pass?
+A: Hardest fifth of the benchmark, mostly clocked. On the strong model alone it is 49%, against AutoBench's 51.5%.
+Q: Would a better prompt fix it?
+A: Probably some of it. We froze the prompts before the experiments deliberately, so that tuning could not leak into the results.</a:t>
             </a:r>
             <a:endParaRPr lang="en-US" dirty="0"/>
           </a:p>
@@ -803,7 +818,10 @@
               <a:t>Thirty seconds. Nothing here produced a finding.
 NOT ON SLIDE — how this differs from AutoBench, worth one sentence: theirs is a bigger split. Their Verilog only drives the circuit and dumps what it sees to a text file, and Python does the judging. Ours is self-checking — the Verilog prints PASS or FAIL itself.
 Ours is simpler and closer to what engineers actually write. Theirs separates the stimulus from the checking, which in principle allows more thorough checking. We did not test which is better and I would not guess.
-IF ASKED why the two run in parallel: both read the same inputs and neither needs the other's output. Nothing is executing at this point — both steps are writing files.</a:t>
+IF ASKED why the two run in parallel: both read the same inputs and neither needs the other's output. Nothing is executing at this point — both steps are writing files.
+LIKELY QUESTIONS
+Q: Why two tracks at all?
+A: It is AutoBench's structure and we kept it. Ours carries less of the load because our testbench prints its own verdicts.</a:t>
             </a:r>
             <a:endParaRPr lang="en-US" dirty="0"/>
           </a:p>
@@ -892,7 +910,10 @@
             <a:r>
               <a:rPr lang="en-US" dirty="0"/>
               <a:t>Fifteen seconds. It is on its own slide for completeness, not because it is interesting.
-IF ASKED why it exists at all: the two previous steps run in parallel to save wall-clock time, and something has to wait for both.</a:t>
+IF ASKED why it exists at all: the two previous steps run in parallel to save wall-clock time, and something has to wait for both.
+LIKELY QUESTIONS
+Q: How much time does the parallelism actually save?
+A: One model call's worth per run — roughly ten to fifteen seconds of a forty-second run.</a:t>
             </a:r>
             <a:endParaRPr lang="en-US" dirty="0"/>
           </a:p>
@@ -983,7 +1004,12 @@
               <a:t>THE POINT, and it is only half on the slide: AutoBench has the same idea and for them it was the single biggest improvement in the paper — sequential compile rate 55% to 97%. Forty-two points. Ours fired six times in 188 runs.
 That is not because ours is worse. The mistake it fixes has stopped happening. I show the number that proves it in the results.
 IF ASKED for the proof now: the 182 runs where our script never fired still compile at 90.7%, against AutoBench's 55.5% without theirs.
-IF ASKED why Python rather than a model: one correct answer, so a script is faster, free, and does the same thing every time. It also marks its own work so a second pass cannot double-insert.</a:t>
+IF ASKED why Python rather than a model: one correct answer, so a script is faster, free, and does the same thing every time. It also marks its own work so a second pass cannot double-insert.
+LIKELY QUESTIONS
+Q: How do you know it is the models and not that your script is weaker than theirs?
+A: Because the runs where ours never fired at all still compile at 90.7%, against their 55.5% without theirs. The baseline moved, not the fix.
+Q: Would it still help on an older model?
+A: Very likely, and that is the honest framing — the technique has a shelf life rather than being wrong.</a:t>
             </a:r>
             <a:endParaRPr lang="en-US" dirty="0"/>
           </a:p>
@@ -1076,7 +1102,14 @@
 WHAT THIS DOES NOT DO — worth being clear if asked: it is not part of Eval0, 1 or 2. It runs before any of them, before anything is compiled or simulated. That earliness is the whole point — “early error localisation” in the title.
 THE INFERENCE WORTH DRAWING, and it is the cleanest way to put the whole project: the checker detects 100% of these six in a controlled test, and in 280 real runs it found almost nothing. Both things being true means the real testbenches did not contain these mistakes. That is a statement about what current models produce, not about whether our tool works.
 IF ASKED about coverage: the parser could only read 262 of 434 files. The rest use newer SystemVerilog syntax it does not support and fall back to a second parser that only checks validity. Real limitation, in the report. Worse, those unreadable files fail Eval1 far more often, so our result is measured on the healthier half.
-IF ASKED whether we tuned the checks to flatter ourselves: we built seven and deleted one. It caught none of the five faults it was built for and raised the only false alarm on a correct testbench, so we removed it rather than patch it.</a:t>
+IF ASKED whether we tuned the checks to flatter ourselves: we built seven and deleted one. It caught none of the five faults it was built for and raised the only false alarm on a correct testbench, so we removed it rather than patch it.
+LIKELY QUESTIONS
+Q: Why Pyverilog and not a commercial linter?
+A: Free, scriptable, and gives an syntax tree we can query. A commercial linter would likely parse more files — that is the main limitation here.
+Q: Why only six checks?
+A: Seven were built. One was deleted for catching nothing and raising a false alarm. The six are the ones that survived measurement.
+Q: Did you pick checks you knew would pass?
+A: The opposite — we included two fault classes deliberately built to be undetectable, and we score zero on them.</a:t>
             </a:r>
             <a:endParaRPr lang="en-US" dirty="0"/>
           </a:p>
@@ -1165,7 +1198,10 @@
             <a:r>
               <a:rPr lang="en-US" dirty="0"/>
               <a:t>Thirty seconds.
-NOT ON SLIDE: because our reports were almost always clean, skipping the call made the static-only setting cheaper to run than doing nothing at all — 2% fewer tokens than baseline.</a:t>
+NOT ON SLIDE: because our reports were almost always clean, skipping the call made the static-only setting cheaper to run than doing nothing at all — 2% fewer tokens than baseline.
+LIKELY QUESTIONS
+Q: Why use a model here rather than a template?
+A: A template would probably do for the six we have. It exists so the layer generalises to findings we did not anticipate.</a:t>
             </a:r>
             <a:endParaRPr lang="en-US" dirty="0"/>
           </a:p>
@@ -1255,7 +1291,12 @@
               <a:rPr lang="en-US" dirty="0"/>
               <a:t>NOT ON SLIDE — two safeguards. If the same error comes back twice we stop, because a fourth identical attempt will not work. And we keep the best version rather than the last, because repair rewrites the whole file and attempt three can be worse than attempt one. Without that a setting that repairs more could score worse, which an experiment cannot allow.
 IF ASKED why three quarters fail: two patterns. Some regenerate a testbench failing the exact same scenarios — the diagnosis was not acted on. Others produce a different error every iteration until the budget runs out. Across fourteen multi-attempt runs, no error signature ever repeated. Prior work does not report this.
-IF ASKED about the example: the repair worked at attempt 2 and the loop then undid it. Cause is on the gen_dut slide — our checker reads the generated circuit, marking uses the real one.</a:t>
+IF ASKED about the example: the repair worked at attempt 2 and the loop then undid it. Cause is on the gen_dut slide — our checker reads the generated circuit, marking uses the real one.
+LIKELY QUESTIONS
+Q: Why cap at three attempts?
+A: Cost, and diminishing returns — by attempt three we were seeing a different error every time rather than convergence.
+Q: Did you try more?
+A: No. AutoBench allows up to five restarts, so it is a fair thing to raise, and it is in future work.</a:t>
             </a:r>
             <a:endParaRPr lang="en-US" dirty="0"/>
           </a:p>
@@ -1345,7 +1386,12 @@
               <a:rPr lang="en-US" dirty="0"/>
               <a:t>THE METHODOLOGICAL POINT. Spend your time here, not on the mechanics.
 NOT ON SLIDE: AutoBench has no arm like this, so their reported gains cannot separate “the feedback worked” from “the model got another go”.
-IF ASKED whose idea it was: ours, and it came from catching our own mistake. We re-audited the earlier results before building on them and found an apparent win was fake — all five of its static-triggered repairs traced to a single false positive. So that setting was really just one extra attempt, and nothing could tell the two apart. The control was built to expose exactly that.</a:t>
+IF ASKED whose idea it was: ours, and it came from catching our own mistake. We re-audited the earlier results before building on them and found an apparent win was fake — all five of its static-triggered repairs traced to a single false positive. So that setting was really just one extra attempt, and nothing could tell the two apart. The control was built to expose exactly that.
+LIKELY QUESTIONS
+Q: Is the control not just wasted compute?
+A: It is 29% more tokens for no gain — which is precisely the finding. Without it we would have reported a win we cannot support.
+Q: Whose idea was it?
+A: Ours, after auditing our own earlier result and finding its apparent win came from a single false positive.</a:t>
             </a:r>
             <a:endParaRPr lang="en-US" dirty="0"/>
           </a:p>
@@ -1435,7 +1481,12 @@
               <a:rPr lang="en-US" dirty="0"/>
               <a:t>NOT ON SLIDE: Eval2's 95% on our own circuits is a ceiling, not a result, and I would say so before being asked. Our circuits are too small for a bug to hide in. We tested that rather than assuming — regenerating the broken copies with a better model moved the score one point; swapping in bigger circuits moved it forty-four.
 IF ASKED how 31% compares: AutoBench report 37% on clocked circuits, and ours are mostly clocked and the hardest fifth of their benchmark. Same range.
-IF ASKED whether our 95 beats their 44.8: it does not — they measure agreement with a reference testbench at an 80% threshold. Under their rule we get 20% against their 26%. Next section has the table.</a:t>
+IF ASKED whether our 95 beats their 44.8: it does not — they measure agreement with a reference testbench at an 80% threshold. Under their rule we get 20% against their 26%. Next section has the table.
+LIKELY QUESTIONS
+Q: Why Icarus and not a commercial simulator?
+A: Free, standard, and what the prior work used, so the numbers sit on the same ground.
+Q: Is three levels enough?
+A: It is what AutoBench defined and we kept it for comparability. Eval2 turned out to be the weak one, and we say so.</a:t>
             </a:r>
             <a:endParaRPr lang="en-US" dirty="0"/>
           </a:p>
@@ -1524,7 +1575,12 @@
             <a:r>
               <a:rPr lang="en-US" dirty="0"/>
               <a:t>NOT ON SLIDE, worth saying: Verilog does not execute line by line like a normal programme. Everything happens at once, because it describes physical hardware. That is the single biggest source of confusion for a software audience.
-DUT is the jargon they will hear for the rest of the talk — say it once here so it lands.</a:t>
+DUT is the jargon they will hear for the rest of the talk — say it once here so it lands.
+LIKELY QUESTIONS
+Q: Why Verilog and not SystemVerilog?
+A: The benchmark ships Verilog, and the parser we use targets it. The models often write SystemVerilog anyway, which is where our parse-coverage problem comes from.
+Q: Why not formal verification instead of testbenches?
+A: Different tool for a different job, and out of scope. Testbench generation is what the prior work does and what the project brief asked for.</a:t>
             </a:r>
             <a:endParaRPr lang="en-US" dirty="0"/>
           </a:p>
@@ -1628,7 +1684,12 @@
 WHAT WE DID MEASURE
 · better mutants moved the score 1 point (96.7 to 97.4)
 · different circuits moved it 44 points
-· so it is the circuits, not the mutants</a:t>
+· so it is the circuits, not the mutants
+LIKELY QUESTIONS
+Q: Are model-generated mutants realistic bugs?
+A: Not necessarily, and we tested whether it mattered: regenerating them with a better model and their own prompt moved the score one point.
+Q: Why five per run?
+A: Cost. AutoBench publishes ten per problem and we score against those too, which is where the 20% comes from.</a:t>
             </a:r>
             <a:endParaRPr lang="en-US" dirty="0"/>
           </a:p>
@@ -1721,7 +1782,12 @@
 NOT ON SLIDE: 215 faults across eight kinds. The checker localises to the right signal as well as the right class, not just “something is wrong”.
 IF ASKED how we know the injected faults were legal Verilog: an injector that produced a syntax error would score as the compiler catching a fault the injector itself created. Mutations must produce compiling code, and injectors that cannot mutate cleanly decline — those cases are excluded from the denominator.
 IF ASKED the difference between this and mutants: opposite directions. Mutants break the CIRCUIT to test whether the TESTBENCH notices — that is Eval2. Fault injection breaks the TESTBENCH to test whether OUR CHECKER notices.
-This is the strongest slide in the talk. Take your time.</a:t>
+This is the strongest slide in the talk. Take your time.
+LIKELY QUESTIONS
+Q: Only fourteen testbenches — is that enough?
+A: Fourteen testbenches but 215 faults, and each fault class has its own denominator. The per-class rates are what matter, not the file count.
+Q: Did you write the injectors to suit your checker?
+A: That is exactly why the two negative controls are in there. We built faults our checker provably cannot see and reported scoring zero on them.</a:t>
             </a:r>
             <a:endParaRPr lang="en-US" dirty="0"/>
           </a:p>
@@ -1827,7 +1893,10 @@
 WHAT n=20 MEANS
 · 20 circuits, so 20% is 4 of them
 · at that size the true value could be anywhere from about 8% to 42%
-· their 26% sits inside that. Neither of us is measurably ahead, and I do not claim it</a:t>
+· their 26% sits inside that. Neither of us is measurably ahead, and I do not claim it
+LIKELY QUESTIONS
+Q: So did you beat AutoBench?
+A: No, and we do not claim to. Where the measures line up we are level, with a newer model on harder circuits. That is as far as the evidence goes.</a:t>
             </a:r>
             <a:endParaRPr lang="en-US" dirty="0"/>
           </a:p>
@@ -1935,7 +2004,12 @@
 · ours vs the control: McNemar p = 0.372, not significant
 · control vs baseline: p = 1.000 — a blind extra attempt is worth nothing
 · so any real gain must sit on the diagnosis, not the extra try
-THIS SLIDE ANSWERS ‘which setting wins’. The next answers ‘what caused the repairs’. Say that as you move — they are easy to conflate.</a:t>
+THIS SLIDE ANSWERS ‘which setting wins’. The next answers ‘what caused the repairs’. Say that as you move — they are easy to conflate.
+LIKELY QUESTIONS
+Q: Why not more repeats to tighten the numbers?
+A: Budget. The whole project cost about sixteen dollars fifty; more repeats was the first thing we would spend on.
+Q: Is n=44 not too small to conclude anything?
+A: It is too small to conclude a win, which is why we do not claim one. It is large enough to measure the noise floor, which is what we did.</a:t>
             </a:r>
             <a:endParaRPr lang="en-US" dirty="0"/>
           </a:p>
@@ -2036,7 +2110,10 @@
 · both numbers are true and describe different runs
 DID THE 79 SIMULATION REPAIRS HELP? The previous slide is the answer — hybrid is the only setting that can act on them and it leads, 18 against 12, but not significantly. And only 3 of those 18 came from a repair; the other 15 passed first time.
 DISCLOSE BEFORE THEY FIND IT: hybrid is also the only setting with simulation feedback, so its lead cannot be credited to our checker. No simulation-only arm exists to separate them. It is in the report.
-102 runs attempted a repair, 26 succeeded. About one in four.</a:t>
+102 runs attempted a repair, 26 succeeded. About one in four.
+LIKELY QUESTIONS
+Q: So is static analysis useless?
+A: Not in general. It costs essentially nothing, both findings we did get were real, and smaller or older models are untested. What we rule out is treating it as the primary defence against current frontier models.</a:t>
             </a:r>
             <a:endParaRPr lang="en-US" dirty="0"/>
           </a:p>
@@ -2125,7 +2202,12 @@
             <a:r>
               <a:rPr lang="en-US" dirty="0"/>
               <a:t>BE EXPLICIT ABOUT THE BOUNDARY: the measurements are solid — 87% of failures are semantic, the checker fired once. The explanation on the left and right is a reasonable reading of that, not something we ran an experiment on. Say so if pushed; it costs nothing and being caught overclaiming costs a lot.
-IF ASKED what would bring structural faults back: larger designs, or smaller and older models. Both are untested and both are in future work.</a:t>
+IF ASKED what would bring structural faults back: larger designs, or smaller and older models. Both are untested and both are in future work.
+LIKELY QUESTIONS
+Q: Could this reverse — will structural faults come back?
+A: Plausibly, on larger designs or with smaller models. Both untested, both in future work.
+Q: Is this not just saying your tool was pointless?
+A: It says the tool works and the problem has moved. That is a finding about the field, and prior work could not have found it without a control group.</a:t>
             </a:r>
             <a:endParaRPr lang="en-US" dirty="0"/>
           </a:p>
@@ -2219,7 +2301,10 @@
 · hybrid buys the top score at +50% tokens and +50% time, and is not significant
 · pyverilog_only is 2% CHEAPER than baseline, because we skip the reasoning call when the report comes back clean — which it almost always did
 PER RUN at the strong tier: about 7 cents baseline, 10 ours, 11 the control.
-THE NUANCE WORTH SAYING OUT LOUD: our layer is nearly free and nearly useless against current models. Not in tension — free means there is little reason to remove it, in case a weaker or older model is the one generating.</a:t>
+THE NUANCE WORTH SAYING OUT LOUD: our layer is nearly free and nearly useless against current models. Not in tension — free means there is little reason to remove it, in case a weaker or older model is the one generating.
+LIKELY QUESTIONS
+Q: Would this scale to a real design?
+A: Unknown. Everything here is benchmark-sized. The cost per testbench is about ten cents, so scale is not the obstacle — circuit complexity is.</a:t>
             </a:r>
             <a:endParaRPr lang="en-US" dirty="0"/>
           </a:p>
@@ -2307,7 +2392,10 @@
           <a:p>
             <a:r>
               <a:rPr lang="en-US" dirty="0"/>
-              <a:t>Keep this quick — they have seen all four answers already. The line that matters is the last one: a negative answer with a validated instrument behind it is worth more than a positive one without.</a:t>
+              <a:t>Keep this quick — they have seen all four answers already. The line that matters is the last one: a negative answer with a validated instrument behind it is worth more than a positive one without.
+LIKELY QUESTIONS
+Q: Which question is the real contribution?
+A: Two and three together. Two says the tool works; three says there is little left for it to find. Neither is worth much without the other.</a:t>
             </a:r>
             <a:endParaRPr lang="en-US" dirty="0"/>
           </a:p>
@@ -2396,7 +2484,12 @@
             <a:r>
               <a:rPr lang="en-US" dirty="0"/>
               <a:t>IF ASKED whether the project succeeded, the precise answer: we set out to find whether you can localise testbench errors before simulation. You can — completely, for the faults it targets, including ones nothing else sees. But against current models there is little left to find. We can say that with confidence rather than as a guess, because we validated the tool separately and ran a control group.
-IF ASKED what you would do differently: run a simulation-only arm to separate the two feedback sources, and use bigger circuits so the broken-copy score discriminates.</a:t>
+IF ASKED what you would do differently: run a simulation-only arm to separate the two feedback sources, and use bigger circuits so the broken-copy score discriminates.
+LIKELY QUESTIONS
+Q: What would you do differently?
+A: Run a simulation-only arm to separate the two feedback sources, and use bigger circuits so the mutant score discriminates.
+Q: What is the single most defensible thing here?
+A: The control group. It changed our own conclusion, which is the point of having one.</a:t>
             </a:r>
             <a:endParaRPr lang="en-US" dirty="0"/>
           </a:p>
@@ -2578,7 +2671,12 @@
             <a:r>
               <a:rPr lang="en-US" dirty="0"/>
               <a:t>Source for the 60%: Foster 2022, the Wilson Research industry survey.
-PAUSE after the box. That one sentence is the reason the whole project exists, and the rest of the talk only makes sense if it lands.</a:t>
+PAUSE after the box. That one sentence is the reason the whole project exists, and the rest of the talk only makes sense if it lands.
+LIKELY QUESTIONS
+Q: Is the 60% figure still current?
+A: It is from the 2022 Wilson Research survey — the standard citation. I would not claim precision beyond about three-fifths.
+Q: Why not just write testbenches by hand?
+A: People do, and that is the cost. The question is whether a model can take some of it on.</a:t>
             </a:r>
             <a:endParaRPr lang="en-US" dirty="0"/>
           </a:p>
@@ -2666,7 +2764,10 @@
           <a:p>
             <a:r>
               <a:rPr lang="en-US" dirty="0"/>
-              <a:t>Thirty seconds. Plant them, do not answer them — the answers get their own slide at the end, and the payoff depends on them not being spoiled here.</a:t>
+              <a:t>Thirty seconds. Plant them, do not answer them — the answers get their own slide at the end, and the payoff depends on them not being spoiled here.
+LIKELY QUESTIONS
+Q: Who set these questions?
+A: They come from the project brief, refined with my supervisor after the scope was confirmed in May.</a:t>
             </a:r>
             <a:endParaRPr lang="en-US" dirty="0"/>
           </a:p>
@@ -2755,7 +2856,12 @@
             <a:r>
               <a:rPr lang="en-US" dirty="0"/>
               <a:t>IF ASKED why build on AutoBench: it is the closest prior work on this exact task and it uses the standard benchmark, so our numbers sit on the same ground as theirs.
-NOT ON SLIDE: they ran 156 circuits with GPT-4-turbo. We run a 20-circuit subset of the same benchmark, chosen as the hardest fifth, plus 12 of our own.</a:t>
+NOT ON SLIDE: they ran 156 circuits with GPT-4-turbo. We run a 20-circuit subset of the same benchmark, chosen as the hardest fifth, plus 12 of our own.
+LIKELY QUESTIONS
+Q: Why not just use AutoBench directly?
+A: We do use its structure. The project is about what it leaves out: it never reads the Verilog, and it has no control group.
+Q: Did you contact the authors?
+A: No. Their mutants and numbers are published, which is what the comparison needs.</a:t>
             </a:r>
             <a:endParaRPr lang="en-US" dirty="0"/>
           </a:p>
@@ -2852,7 +2958,12 @@
   12 of our own: 6 combinational, 6 sequential. Six are the small originals — dff, alu_1bit, mux2to1, comparator_2bit, priority_encoder, shift_register. The other six were purpose-built to be hard enough for the checks to fire at all: alu_8bit, barrel_shifter_8bit, bcd_to_7seg, fsm_sequence_detector, fifo_8x8, traffic_light_fsm.
   20 from the public benchmark: 16 sequential, 4 combinational — the hardest fifth of their 156, chosen before any run.
 WHY SIX WERE PURPOSE-BUILT: the originals were 8 to 17 lines with two to four unambiguous ports, so four of the checks could not physically fire on them. You cannot wire a pin to the wrong name if there are only two pins.
-NOT ON SLIDE — mention it, it shows you read the paper properly: they have one thing we do not. They check that every scenario they planned actually made it into the generated testbench, retrying up to three times. We have no equivalent, and it is in our future work.</a:t>
+NOT ON SLIDE — mention it, it shows you read the paper properly: they have one thing we do not. They check that every scenario they planned actually made it into the generated testbench, retrying up to three times. We have no equivalent, and it is in our future work.
+LIKELY QUESTIONS
+Q: Why LangGraph rather than a plain script?
+A: Because of the repair loop. In a script the conditions controlling it get scattered; as a graph each is a small named function, and we could verify the five settings genuinely differ rather than assume it.
+Q: Thirteen steps — is that not over-engineered?
+A: Four exist only because we added them. The rest map one-to-one onto AutoBench's stages.</a:t>
             </a:r>
             <a:endParaRPr lang="en-US" dirty="0"/>
           </a:p>
@@ -2942,7 +3053,12 @@
               <a:rPr lang="en-US" dirty="0"/>
               <a:t>Cheap model — a yes/no question from a paragraph does not need the expensive one.
 NOT ON SLIDE: AutoBench does this differently — they have the AI write a sample of the circuit, then text-search it for a clock. We just ask the model.
-IF ASKED how often it is wrong: we never traced a failure back to a wrong answer here. It is the easy part of the problem.</a:t>
+IF ASKED how often it is wrong: we never traced a failure back to a wrong answer here. It is the easy part of the problem.
+LIKELY QUESTIONS
+Q: What happens if it classifies wrong?
+A: A combinational circuit treated as clocked gets a clock it does not need — harmless. The other way round is worse, but we never observed it.
+Q: Why not just detect it from the description with a keyword?
+A: That is roughly what AutoBench does. Asking the model is more robust to phrasing, and at this price there was no reason not to.</a:t>
             </a:r>
             <a:endParaRPr lang="en-US" dirty="0"/>
           </a:p>
@@ -3032,7 +3148,12 @@
               <a:rPr lang="en-US" dirty="0"/>
               <a:t>SAY OUT LOUD, it is not on the slide: for most of the pipeline we work with the AI's own version of the circuit, and only swap in the real one at marking. Two versions in play. We measured how far apart they get.
 IF PUSHED: the 273/280 is the pin interface only — no equivalence check was run, so it bounds the structural side and says nothing about behaviour. The seven exceptions are all Prob150, under both models and all five settings, so it is that problem's description and not sampling noise. All seven fail Eval1 anyway.
-IF ASKED why AutoBench does not do this: they argue mixing the two makes it impossible to tell a bad test from a bad design. Fair — our answer is the golden circuit at marking.</a:t>
+IF ASKED why AutoBench does not do this: they argue mixing the two makes it impossible to tell a bad test from a bad design. Fair — our answer is the golden circuit at marking.
+LIKELY QUESTIONS
+Q: Is this not circular — the AI testing its own circuit?
+A: It would be if we marked against the generated circuit. We do not. Marking always uses the known-correct one, which the model never sees.
+Q: Why not use the known-correct circuit throughout?
+A: Then the model could read the answers out of it while writing the test. And you would no longer be testing the realistic flow.</a:t>
             </a:r>
             <a:endParaRPr lang="en-US" dirty="0"/>
           </a:p>
@@ -3122,7 +3243,10 @@
               <a:rPr lang="en-US" dirty="0"/>
               <a:t>Straight out of AutoBench — their Stage 1. Nothing interesting happened here, and saying that plainly is better than padding it.
 Thirty seconds. Move.
-IF ASKED why not just re-read the description each time: the AI answers slightly differently each time it reads prose. Pinning it down once means every later step agrees.</a:t>
+IF ASKED why not just re-read the description each time: the AI answers slightly differently each time it reads prose. Pinning it down once means every later step agrees.
+LIKELY QUESTIONS
+Q: What if the spec it extracts is wrong?
+A: Then everything downstream is wrong, and it shows up as a failed run. We did not measure spec accuracy separately — a fair gap.</a:t>
             </a:r>
             <a:endParaRPr lang="en-US" dirty="0"/>
           </a:p>
